--- a/output/wordlabs-super-prefix-3day.pptx
+++ b/output/wordlabs-super-prefix-3day.pptx
@@ -6040,7 +6040,7 @@
                 <a:ea typeface="Calibri" pitchFamily="34" charset="-122"/>
                 <a:cs typeface="Calibri" pitchFamily="34" charset="-120"/>
               </a:rPr>
-              <a:t>Our </a:t>
+              <a:t>The </a:t>
             </a:r>
             <a:pPr algn="l" indent="0" marL="0">
               <a:buNone/>
@@ -6057,7 +6057,7 @@
                 <a:ea typeface="Calibri" pitchFamily="34" charset="-122"/>
                 <a:cs typeface="Calibri" pitchFamily="34" charset="-120"/>
               </a:rPr>
-              <a:t>supervisor</a:t>
+              <a:t>supervising</a:t>
             </a:r>
             <a:pPr algn="l" indent="0" marL="0">
               <a:buNone/>
@@ -6071,7 +6071,7 @@
                 <a:ea typeface="Calibri" pitchFamily="34" charset="-122"/>
                 <a:cs typeface="Calibri" pitchFamily="34" charset="-120"/>
               </a:rPr>
-              <a:t> said the team did a </a:t>
+              <a:t> teacher made sure everyone at the </a:t>
             </a:r>
             <a:pPr algn="l" indent="0" marL="0">
               <a:buNone/>
@@ -6088,7 +6088,7 @@
                 <a:ea typeface="Calibri" pitchFamily="34" charset="-122"/>
                 <a:cs typeface="Calibri" pitchFamily="34" charset="-120"/>
               </a:rPr>
-              <a:t>superb</a:t>
+              <a:t>supermarket</a:t>
             </a:r>
             <a:pPr algn="l" indent="0" marL="0">
               <a:buNone/>
@@ -6102,7 +6102,7 @@
                 <a:ea typeface="Calibri" pitchFamily="34" charset="-122"/>
                 <a:cs typeface="Calibri" pitchFamily="34" charset="-120"/>
               </a:rPr>
-              <a:t> job cleaning up the oval.</a:t>
+              <a:t> excursion stayed safe.</a:t>
             </a:r>
             <a:endParaRPr lang="en-US" sz="1800" dirty="0"/>
           </a:p>
@@ -6257,7 +6257,7 @@
                 <a:ea typeface="Trebuchet MS" pitchFamily="34" charset="-122"/>
                 <a:cs typeface="Trebuchet MS" pitchFamily="34" charset="-120"/>
               </a:rPr>
-              <a:t>supervisor</a:t>
+              <a:t>supervising</a:t>
             </a:r>
             <a:endParaRPr lang="en-US" sz="1400" dirty="0"/>
           </a:p>
@@ -6385,7 +6385,7 @@
                 <a:ea typeface="Trebuchet MS" pitchFamily="34" charset="-122"/>
                 <a:cs typeface="Trebuchet MS" pitchFamily="34" charset="-120"/>
               </a:rPr>
-              <a:t>superb</a:t>
+              <a:t>supermarket</a:t>
             </a:r>
             <a:endParaRPr lang="en-US" sz="1400" dirty="0"/>
           </a:p>
@@ -6855,7 +6855,7 @@
                 <a:ea typeface="Trebuchet MS" pitchFamily="34" charset="-122"/>
                 <a:cs typeface="Trebuchet MS" pitchFamily="34" charset="-120"/>
               </a:rPr>
-              <a:t>supervisor</a:t>
+              <a:t>supervising</a:t>
             </a:r>
             <a:endParaRPr lang="en-US" sz="2800" dirty="0"/>
           </a:p>
@@ -7682,7 +7682,7 @@
                 <a:ea typeface="Trebuchet MS" pitchFamily="34" charset="-122"/>
                 <a:cs typeface="Trebuchet MS" pitchFamily="34" charset="-120"/>
               </a:rPr>
-              <a:t>supervisor</a:t>
+              <a:t>supervising</a:t>
             </a:r>
             <a:endParaRPr lang="en-US" sz="2800" dirty="0"/>
           </a:p>
@@ -7762,8 +7762,8 @@
         </p:nvSpPr>
         <p:spPr>
           <a:xfrm>
-            <a:off x="2221992" y="2258568"/>
-            <a:ext cx="1828800" cy="292608"/>
+            <a:off x="1989734" y="2258568"/>
+            <a:ext cx="1581912" cy="292608"/>
           </a:xfrm>
           <a:prstGeom prst="rect">
             <a:avLst>
@@ -7796,8 +7796,8 @@
         </p:nvSpPr>
         <p:spPr>
           <a:xfrm>
-            <a:off x="2221992" y="2258568"/>
-            <a:ext cx="1828800" cy="292608"/>
+            <a:off x="1989734" y="2258568"/>
+            <a:ext cx="1581912" cy="292608"/>
           </a:xfrm>
           <a:prstGeom prst="rect">
             <a:avLst/>
@@ -7835,8 +7835,8 @@
         </p:nvSpPr>
         <p:spPr>
           <a:xfrm>
-            <a:off x="2221992" y="2569464"/>
-            <a:ext cx="1828800" cy="201168"/>
+            <a:off x="1989734" y="2569464"/>
+            <a:ext cx="1581912" cy="201168"/>
           </a:xfrm>
           <a:prstGeom prst="rect">
             <a:avLst/>
@@ -7874,8 +7874,8 @@
         </p:nvSpPr>
         <p:spPr>
           <a:xfrm>
-            <a:off x="4370832" y="2258568"/>
-            <a:ext cx="1828800" cy="292608"/>
+            <a:off x="3659429" y="2258568"/>
+            <a:ext cx="1581912" cy="292608"/>
           </a:xfrm>
           <a:prstGeom prst="rect">
             <a:avLst>
@@ -7908,8 +7908,8 @@
         </p:nvSpPr>
         <p:spPr>
           <a:xfrm>
-            <a:off x="4370832" y="2258568"/>
-            <a:ext cx="1828800" cy="292608"/>
+            <a:off x="3659429" y="2258568"/>
+            <a:ext cx="1581912" cy="292608"/>
           </a:xfrm>
           <a:prstGeom prst="rect">
             <a:avLst/>
@@ -7933,7 +7933,7 @@
                 <a:ea typeface="Trebuchet MS" pitchFamily="34" charset="-122"/>
                 <a:cs typeface="Trebuchet MS" pitchFamily="34" charset="-120"/>
               </a:rPr>
-              <a:t>vise</a:t>
+              <a:t>vis</a:t>
             </a:r>
             <a:endParaRPr lang="en-US" sz="1300" dirty="0"/>
           </a:p>
@@ -7947,8 +7947,8 @@
         </p:nvSpPr>
         <p:spPr>
           <a:xfrm>
-            <a:off x="4370832" y="2569464"/>
-            <a:ext cx="1828800" cy="201168"/>
+            <a:off x="3659429" y="2569464"/>
+            <a:ext cx="1581912" cy="201168"/>
           </a:xfrm>
           <a:prstGeom prst="rect">
             <a:avLst/>
@@ -7972,7 +7972,7 @@
                 <a:ea typeface="Calibri" pitchFamily="34" charset="-122"/>
                 <a:cs typeface="Calibri" pitchFamily="34" charset="-120"/>
               </a:rPr>
-              <a:t>to see, to watch</a:t>
+              <a:t>to see</a:t>
             </a:r>
             <a:endParaRPr lang="en-US" sz="850" dirty="0"/>
           </a:p>
@@ -7986,8 +7986,8 @@
         </p:nvSpPr>
         <p:spPr>
           <a:xfrm>
-            <a:off x="6519672" y="2258568"/>
-            <a:ext cx="1828800" cy="292608"/>
+            <a:off x="5329123" y="2258568"/>
+            <a:ext cx="1581912" cy="292608"/>
           </a:xfrm>
           <a:prstGeom prst="rect">
             <a:avLst>
@@ -8020,8 +8020,8 @@
         </p:nvSpPr>
         <p:spPr>
           <a:xfrm>
-            <a:off x="6519672" y="2258568"/>
-            <a:ext cx="1828800" cy="292608"/>
+            <a:off x="5329123" y="2258568"/>
+            <a:ext cx="1581912" cy="292608"/>
           </a:xfrm>
           <a:prstGeom prst="rect">
             <a:avLst/>
@@ -8045,7 +8045,7 @@
                 <a:ea typeface="Trebuchet MS" pitchFamily="34" charset="-122"/>
                 <a:cs typeface="Trebuchet MS" pitchFamily="34" charset="-120"/>
               </a:rPr>
-              <a:t>or</a:t>
+              <a:t>e</a:t>
             </a:r>
             <a:endParaRPr lang="en-US" sz="1300" dirty="0"/>
           </a:p>
@@ -8059,8 +8059,8 @@
         </p:nvSpPr>
         <p:spPr>
           <a:xfrm>
-            <a:off x="6519672" y="2569464"/>
-            <a:ext cx="1828800" cy="201168"/>
+            <a:off x="5329123" y="2569464"/>
+            <a:ext cx="1581912" cy="201168"/>
           </a:xfrm>
           <a:prstGeom prst="rect">
             <a:avLst/>
@@ -8084,7 +8084,7 @@
                 <a:ea typeface="Calibri" pitchFamily="34" charset="-122"/>
                 <a:cs typeface="Calibri" pitchFamily="34" charset="-120"/>
               </a:rPr>
-              <a:t>person who does</a:t>
+              <a:t>base ending</a:t>
             </a:r>
             <a:endParaRPr lang="en-US" sz="850" dirty="0"/>
           </a:p>
@@ -8092,7 +8092,158 @@
       </p:sp>
       <p:sp>
         <p:nvSpPr>
-          <p:cNvPr id="25" name="Shape 23"/>
+          <p:cNvPr id="25" name="Text 23"/>
+          <p:cNvSpPr/>
+          <p:nvPr/>
+        </p:nvSpPr>
+        <p:spPr>
+          <a:xfrm>
+            <a:off x="5329123" y="2752344"/>
+            <a:ext cx="1581912" cy="182880"/>
+          </a:xfrm>
+          <a:prstGeom prst="rect">
+            <a:avLst/>
+          </a:prstGeom>
+          <a:noFill/>
+          <a:ln/>
+        </p:spPr>
+        <p:txBody>
+          <a:bodyPr wrap="square" lIns="0" tIns="0" rIns="0" bIns="0" rtlCol="0" anchor="t"/>
+          <a:lstStyle/>
+          <a:p>
+            <a:pPr algn="ctr" indent="0" marL="0">
+              <a:buNone/>
+            </a:pPr>
+            <a:r>
+              <a:rPr lang="en-US" sz="700" i="1" dirty="0">
+                <a:solidFill>
+                  <a:srgbClr val="94A3B8"/>
+                </a:solidFill>
+                <a:latin typeface="Calibri" pitchFamily="34" charset="0"/>
+                <a:ea typeface="Calibri" pitchFamily="34" charset="-122"/>
+                <a:cs typeface="Calibri" pitchFamily="34" charset="-120"/>
+              </a:rPr>
+              <a:t>'e' dropped before vowel suffix</a:t>
+            </a:r>
+            <a:endParaRPr lang="en-US" sz="700" dirty="0"/>
+          </a:p>
+        </p:txBody>
+      </p:sp>
+      <p:sp>
+        <p:nvSpPr>
+          <p:cNvPr id="26" name="Shape 24"/>
+          <p:cNvSpPr/>
+          <p:nvPr/>
+        </p:nvSpPr>
+        <p:spPr>
+          <a:xfrm>
+            <a:off x="6998818" y="2258568"/>
+            <a:ext cx="1581912" cy="292608"/>
+          </a:xfrm>
+          <a:prstGeom prst="rect">
+            <a:avLst>
+              <a:gd name="adj" fmla="val 25000"/>
+            </a:avLst>
+          </a:prstGeom>
+          <a:solidFill>
+            <a:srgbClr val="FCE7F3"/>
+          </a:solidFill>
+          <a:ln w="19050">
+            <a:solidFill>
+              <a:srgbClr val="DB2777"/>
+            </a:solidFill>
+            <a:prstDash val="solid"/>
+          </a:ln>
+          <a:effectLst>
+            <a:outerShdw sx="100000" sy="100000" kx="0" ky="0" algn="bl" rotWithShape="0" blurRad="101600" dist="38100" dir="8100000">
+              <a:srgbClr val="000000">
+                <a:alpha val="12000"/>
+              </a:srgbClr>
+            </a:outerShdw>
+          </a:effectLst>
+        </p:spPr>
+      </p:sp>
+      <p:sp>
+        <p:nvSpPr>
+          <p:cNvPr id="27" name="Text 25"/>
+          <p:cNvSpPr/>
+          <p:nvPr/>
+        </p:nvSpPr>
+        <p:spPr>
+          <a:xfrm>
+            <a:off x="6998818" y="2258568"/>
+            <a:ext cx="1581912" cy="292608"/>
+          </a:xfrm>
+          <a:prstGeom prst="rect">
+            <a:avLst/>
+          </a:prstGeom>
+          <a:noFill/>
+          <a:ln/>
+        </p:spPr>
+        <p:txBody>
+          <a:bodyPr wrap="square" lIns="0" tIns="0" rIns="0" bIns="0" rtlCol="0" anchor="ctr"/>
+          <a:lstStyle/>
+          <a:p>
+            <a:pPr algn="ctr" indent="0" marL="0">
+              <a:buNone/>
+            </a:pPr>
+            <a:r>
+              <a:rPr lang="en-US" sz="1300" b="1" dirty="0">
+                <a:solidFill>
+                  <a:srgbClr val="9D174D"/>
+                </a:solidFill>
+                <a:latin typeface="Trebuchet MS" pitchFamily="34" charset="0"/>
+                <a:ea typeface="Trebuchet MS" pitchFamily="34" charset="-122"/>
+                <a:cs typeface="Trebuchet MS" pitchFamily="34" charset="-120"/>
+              </a:rPr>
+              <a:t>ing</a:t>
+            </a:r>
+            <a:endParaRPr lang="en-US" sz="1300" dirty="0"/>
+          </a:p>
+        </p:txBody>
+      </p:sp>
+      <p:sp>
+        <p:nvSpPr>
+          <p:cNvPr id="28" name="Text 26"/>
+          <p:cNvSpPr/>
+          <p:nvPr/>
+        </p:nvSpPr>
+        <p:spPr>
+          <a:xfrm>
+            <a:off x="6998818" y="2569464"/>
+            <a:ext cx="1581912" cy="201168"/>
+          </a:xfrm>
+          <a:prstGeom prst="rect">
+            <a:avLst/>
+          </a:prstGeom>
+          <a:noFill/>
+          <a:ln/>
+        </p:spPr>
+        <p:txBody>
+          <a:bodyPr wrap="square" lIns="0" tIns="0" rIns="0" bIns="0" rtlCol="0" anchor="t"/>
+          <a:lstStyle/>
+          <a:p>
+            <a:pPr algn="ctr" indent="0" marL="0">
+              <a:buNone/>
+            </a:pPr>
+            <a:r>
+              <a:rPr lang="en-US" sz="850" dirty="0">
+                <a:solidFill>
+                  <a:srgbClr val="475569"/>
+                </a:solidFill>
+                <a:latin typeface="Calibri" pitchFamily="34" charset="0"/>
+                <a:ea typeface="Calibri" pitchFamily="34" charset="-122"/>
+                <a:cs typeface="Calibri" pitchFamily="34" charset="-120"/>
+              </a:rPr>
+              <a:t>ongoing action</a:t>
+            </a:r>
+            <a:endParaRPr lang="en-US" sz="850" dirty="0"/>
+          </a:p>
+        </p:txBody>
+      </p:sp>
+      <p:sp>
+        <p:nvSpPr>
+          <p:cNvPr id="29" name="Shape 27"/>
           <p:cNvSpPr/>
           <p:nvPr/>
         </p:nvSpPr>
@@ -8119,7 +8270,7 @@
       </p:sp>
       <p:sp>
         <p:nvSpPr>
-          <p:cNvPr id="26" name="Text 24"/>
+          <p:cNvPr id="30" name="Text 28"/>
           <p:cNvSpPr/>
           <p:nvPr/>
         </p:nvSpPr>
@@ -8158,7 +8309,7 @@
       </p:sp>
       <p:sp>
         <p:nvSpPr>
-          <p:cNvPr id="27" name="Shape 25"/>
+          <p:cNvPr id="31" name="Shape 29"/>
           <p:cNvSpPr/>
           <p:nvPr/>
         </p:nvSpPr>
@@ -8185,7 +8336,7 @@
       </p:sp>
       <p:sp>
         <p:nvSpPr>
-          <p:cNvPr id="28" name="Text 26"/>
+          <p:cNvPr id="32" name="Text 30"/>
           <p:cNvSpPr/>
           <p:nvPr/>
         </p:nvSpPr>
@@ -8224,7 +8375,7 @@
       </p:sp>
       <p:sp>
         <p:nvSpPr>
-          <p:cNvPr id="29" name="Shape 27"/>
+          <p:cNvPr id="33" name="Shape 31"/>
           <p:cNvSpPr/>
           <p:nvPr/>
         </p:nvSpPr>
@@ -8251,7 +8402,7 @@
       </p:sp>
       <p:sp>
         <p:nvSpPr>
-          <p:cNvPr id="30" name="Text 28"/>
+          <p:cNvPr id="34" name="Text 32"/>
           <p:cNvSpPr/>
           <p:nvPr/>
         </p:nvSpPr>
@@ -8290,7 +8441,7 @@
       </p:sp>
       <p:sp>
         <p:nvSpPr>
-          <p:cNvPr id="31" name="Shape 29"/>
+          <p:cNvPr id="35" name="Shape 33"/>
           <p:cNvSpPr/>
           <p:nvPr/>
         </p:nvSpPr>
@@ -8317,7 +8468,7 @@
       </p:sp>
       <p:sp>
         <p:nvSpPr>
-          <p:cNvPr id="32" name="Text 30"/>
+          <p:cNvPr id="36" name="Text 34"/>
           <p:cNvSpPr/>
           <p:nvPr/>
         </p:nvSpPr>
@@ -8779,7 +8930,7 @@
                 <a:ea typeface="Trebuchet MS" pitchFamily="34" charset="-122"/>
                 <a:cs typeface="Trebuchet MS" pitchFamily="34" charset="-120"/>
               </a:rPr>
-              <a:t>supervisor</a:t>
+              <a:t>supervising</a:t>
             </a:r>
             <a:endParaRPr lang="en-US" sz="2800" dirty="0"/>
           </a:p>
@@ -8859,8 +9010,8 @@
         </p:nvSpPr>
         <p:spPr>
           <a:xfrm>
-            <a:off x="2221992" y="2258568"/>
-            <a:ext cx="1828800" cy="292608"/>
+            <a:off x="1989734" y="2258568"/>
+            <a:ext cx="1581912" cy="292608"/>
           </a:xfrm>
           <a:prstGeom prst="rect">
             <a:avLst>
@@ -8893,8 +9044,8 @@
         </p:nvSpPr>
         <p:spPr>
           <a:xfrm>
-            <a:off x="2221992" y="2258568"/>
-            <a:ext cx="1828800" cy="292608"/>
+            <a:off x="1989734" y="2258568"/>
+            <a:ext cx="1581912" cy="292608"/>
           </a:xfrm>
           <a:prstGeom prst="rect">
             <a:avLst/>
@@ -8932,8 +9083,8 @@
         </p:nvSpPr>
         <p:spPr>
           <a:xfrm>
-            <a:off x="2221992" y="2569464"/>
-            <a:ext cx="1828800" cy="201168"/>
+            <a:off x="1989734" y="2569464"/>
+            <a:ext cx="1581912" cy="201168"/>
           </a:xfrm>
           <a:prstGeom prst="rect">
             <a:avLst/>
@@ -8971,8 +9122,8 @@
         </p:nvSpPr>
         <p:spPr>
           <a:xfrm>
-            <a:off x="4370832" y="2258568"/>
-            <a:ext cx="1828800" cy="292608"/>
+            <a:off x="3659429" y="2258568"/>
+            <a:ext cx="1581912" cy="292608"/>
           </a:xfrm>
           <a:prstGeom prst="rect">
             <a:avLst>
@@ -9005,8 +9156,8 @@
         </p:nvSpPr>
         <p:spPr>
           <a:xfrm>
-            <a:off x="4370832" y="2258568"/>
-            <a:ext cx="1828800" cy="292608"/>
+            <a:off x="3659429" y="2258568"/>
+            <a:ext cx="1581912" cy="292608"/>
           </a:xfrm>
           <a:prstGeom prst="rect">
             <a:avLst/>
@@ -9030,7 +9181,7 @@
                 <a:ea typeface="Trebuchet MS" pitchFamily="34" charset="-122"/>
                 <a:cs typeface="Trebuchet MS" pitchFamily="34" charset="-120"/>
               </a:rPr>
-              <a:t>vise</a:t>
+              <a:t>vis</a:t>
             </a:r>
             <a:endParaRPr lang="en-US" sz="1300" dirty="0"/>
           </a:p>
@@ -9044,8 +9195,8 @@
         </p:nvSpPr>
         <p:spPr>
           <a:xfrm>
-            <a:off x="4370832" y="2569464"/>
-            <a:ext cx="1828800" cy="201168"/>
+            <a:off x="3659429" y="2569464"/>
+            <a:ext cx="1581912" cy="201168"/>
           </a:xfrm>
           <a:prstGeom prst="rect">
             <a:avLst/>
@@ -9069,7 +9220,7 @@
                 <a:ea typeface="Calibri" pitchFamily="34" charset="-122"/>
                 <a:cs typeface="Calibri" pitchFamily="34" charset="-120"/>
               </a:rPr>
-              <a:t>to see, to watch</a:t>
+              <a:t>to see</a:t>
             </a:r>
             <a:endParaRPr lang="en-US" sz="850" dirty="0"/>
           </a:p>
@@ -9083,8 +9234,8 @@
         </p:nvSpPr>
         <p:spPr>
           <a:xfrm>
-            <a:off x="6519672" y="2258568"/>
-            <a:ext cx="1828800" cy="292608"/>
+            <a:off x="5329123" y="2258568"/>
+            <a:ext cx="1581912" cy="292608"/>
           </a:xfrm>
           <a:prstGeom prst="rect">
             <a:avLst>
@@ -9117,8 +9268,8 @@
         </p:nvSpPr>
         <p:spPr>
           <a:xfrm>
-            <a:off x="6519672" y="2258568"/>
-            <a:ext cx="1828800" cy="292608"/>
+            <a:off x="5329123" y="2258568"/>
+            <a:ext cx="1581912" cy="292608"/>
           </a:xfrm>
           <a:prstGeom prst="rect">
             <a:avLst/>
@@ -9142,7 +9293,7 @@
                 <a:ea typeface="Trebuchet MS" pitchFamily="34" charset="-122"/>
                 <a:cs typeface="Trebuchet MS" pitchFamily="34" charset="-120"/>
               </a:rPr>
-              <a:t>or</a:t>
+              <a:t>e</a:t>
             </a:r>
             <a:endParaRPr lang="en-US" sz="1300" dirty="0"/>
           </a:p>
@@ -9156,8 +9307,8 @@
         </p:nvSpPr>
         <p:spPr>
           <a:xfrm>
-            <a:off x="6519672" y="2569464"/>
-            <a:ext cx="1828800" cy="201168"/>
+            <a:off x="5329123" y="2569464"/>
+            <a:ext cx="1581912" cy="201168"/>
           </a:xfrm>
           <a:prstGeom prst="rect">
             <a:avLst/>
@@ -9181,7 +9332,7 @@
                 <a:ea typeface="Calibri" pitchFamily="34" charset="-122"/>
                 <a:cs typeface="Calibri" pitchFamily="34" charset="-120"/>
               </a:rPr>
-              <a:t>person who does</a:t>
+              <a:t>base ending</a:t>
             </a:r>
             <a:endParaRPr lang="en-US" sz="850" dirty="0"/>
           </a:p>
@@ -9189,7 +9340,158 @@
       </p:sp>
       <p:sp>
         <p:nvSpPr>
-          <p:cNvPr id="25" name="Shape 23"/>
+          <p:cNvPr id="25" name="Text 23"/>
+          <p:cNvSpPr/>
+          <p:nvPr/>
+        </p:nvSpPr>
+        <p:spPr>
+          <a:xfrm>
+            <a:off x="5329123" y="2752344"/>
+            <a:ext cx="1581912" cy="182880"/>
+          </a:xfrm>
+          <a:prstGeom prst="rect">
+            <a:avLst/>
+          </a:prstGeom>
+          <a:noFill/>
+          <a:ln/>
+        </p:spPr>
+        <p:txBody>
+          <a:bodyPr wrap="square" lIns="0" tIns="0" rIns="0" bIns="0" rtlCol="0" anchor="t"/>
+          <a:lstStyle/>
+          <a:p>
+            <a:pPr algn="ctr" indent="0" marL="0">
+              <a:buNone/>
+            </a:pPr>
+            <a:r>
+              <a:rPr lang="en-US" sz="700" i="1" dirty="0">
+                <a:solidFill>
+                  <a:srgbClr val="94A3B8"/>
+                </a:solidFill>
+                <a:latin typeface="Calibri" pitchFamily="34" charset="0"/>
+                <a:ea typeface="Calibri" pitchFamily="34" charset="-122"/>
+                <a:cs typeface="Calibri" pitchFamily="34" charset="-120"/>
+              </a:rPr>
+              <a:t>'e' dropped before vowel suffix</a:t>
+            </a:r>
+            <a:endParaRPr lang="en-US" sz="700" dirty="0"/>
+          </a:p>
+        </p:txBody>
+      </p:sp>
+      <p:sp>
+        <p:nvSpPr>
+          <p:cNvPr id="26" name="Shape 24"/>
+          <p:cNvSpPr/>
+          <p:nvPr/>
+        </p:nvSpPr>
+        <p:spPr>
+          <a:xfrm>
+            <a:off x="6998818" y="2258568"/>
+            <a:ext cx="1581912" cy="292608"/>
+          </a:xfrm>
+          <a:prstGeom prst="rect">
+            <a:avLst>
+              <a:gd name="adj" fmla="val 25000"/>
+            </a:avLst>
+          </a:prstGeom>
+          <a:solidFill>
+            <a:srgbClr val="FCE7F3"/>
+          </a:solidFill>
+          <a:ln w="19050">
+            <a:solidFill>
+              <a:srgbClr val="DB2777"/>
+            </a:solidFill>
+            <a:prstDash val="solid"/>
+          </a:ln>
+          <a:effectLst>
+            <a:outerShdw sx="100000" sy="100000" kx="0" ky="0" algn="bl" rotWithShape="0" blurRad="101600" dist="38100" dir="8100000">
+              <a:srgbClr val="000000">
+                <a:alpha val="12000"/>
+              </a:srgbClr>
+            </a:outerShdw>
+          </a:effectLst>
+        </p:spPr>
+      </p:sp>
+      <p:sp>
+        <p:nvSpPr>
+          <p:cNvPr id="27" name="Text 25"/>
+          <p:cNvSpPr/>
+          <p:nvPr/>
+        </p:nvSpPr>
+        <p:spPr>
+          <a:xfrm>
+            <a:off x="6998818" y="2258568"/>
+            <a:ext cx="1581912" cy="292608"/>
+          </a:xfrm>
+          <a:prstGeom prst="rect">
+            <a:avLst/>
+          </a:prstGeom>
+          <a:noFill/>
+          <a:ln/>
+        </p:spPr>
+        <p:txBody>
+          <a:bodyPr wrap="square" lIns="0" tIns="0" rIns="0" bIns="0" rtlCol="0" anchor="ctr"/>
+          <a:lstStyle/>
+          <a:p>
+            <a:pPr algn="ctr" indent="0" marL="0">
+              <a:buNone/>
+            </a:pPr>
+            <a:r>
+              <a:rPr lang="en-US" sz="1300" b="1" dirty="0">
+                <a:solidFill>
+                  <a:srgbClr val="9D174D"/>
+                </a:solidFill>
+                <a:latin typeface="Trebuchet MS" pitchFamily="34" charset="0"/>
+                <a:ea typeface="Trebuchet MS" pitchFamily="34" charset="-122"/>
+                <a:cs typeface="Trebuchet MS" pitchFamily="34" charset="-120"/>
+              </a:rPr>
+              <a:t>ing</a:t>
+            </a:r>
+            <a:endParaRPr lang="en-US" sz="1300" dirty="0"/>
+          </a:p>
+        </p:txBody>
+      </p:sp>
+      <p:sp>
+        <p:nvSpPr>
+          <p:cNvPr id="28" name="Text 26"/>
+          <p:cNvSpPr/>
+          <p:nvPr/>
+        </p:nvSpPr>
+        <p:spPr>
+          <a:xfrm>
+            <a:off x="6998818" y="2569464"/>
+            <a:ext cx="1581912" cy="201168"/>
+          </a:xfrm>
+          <a:prstGeom prst="rect">
+            <a:avLst/>
+          </a:prstGeom>
+          <a:noFill/>
+          <a:ln/>
+        </p:spPr>
+        <p:txBody>
+          <a:bodyPr wrap="square" lIns="0" tIns="0" rIns="0" bIns="0" rtlCol="0" anchor="t"/>
+          <a:lstStyle/>
+          <a:p>
+            <a:pPr algn="ctr" indent="0" marL="0">
+              <a:buNone/>
+            </a:pPr>
+            <a:r>
+              <a:rPr lang="en-US" sz="850" dirty="0">
+                <a:solidFill>
+                  <a:srgbClr val="475569"/>
+                </a:solidFill>
+                <a:latin typeface="Calibri" pitchFamily="34" charset="0"/>
+                <a:ea typeface="Calibri" pitchFamily="34" charset="-122"/>
+                <a:cs typeface="Calibri" pitchFamily="34" charset="-120"/>
+              </a:rPr>
+              <a:t>ongoing action</a:t>
+            </a:r>
+            <a:endParaRPr lang="en-US" sz="850" dirty="0"/>
+          </a:p>
+        </p:txBody>
+      </p:sp>
+      <p:sp>
+        <p:nvSpPr>
+          <p:cNvPr id="29" name="Shape 27"/>
           <p:cNvSpPr/>
           <p:nvPr/>
         </p:nvSpPr>
@@ -9216,7 +9518,7 @@
       </p:sp>
       <p:sp>
         <p:nvSpPr>
-          <p:cNvPr id="26" name="Text 24"/>
+          <p:cNvPr id="30" name="Text 28"/>
           <p:cNvSpPr/>
           <p:nvPr/>
         </p:nvSpPr>
@@ -9255,7 +9557,7 @@
       </p:sp>
       <p:sp>
         <p:nvSpPr>
-          <p:cNvPr id="27" name="Shape 25"/>
+          <p:cNvPr id="31" name="Shape 29"/>
           <p:cNvSpPr/>
           <p:nvPr/>
         </p:nvSpPr>
@@ -9282,7 +9584,7 @@
       </p:sp>
       <p:sp>
         <p:nvSpPr>
-          <p:cNvPr id="28" name="Shape 26"/>
+          <p:cNvPr id="32" name="Shape 30"/>
           <p:cNvSpPr/>
           <p:nvPr/>
         </p:nvSpPr>
@@ -9309,7 +9611,7 @@
       </p:sp>
       <p:sp>
         <p:nvSpPr>
-          <p:cNvPr id="29" name="Text 27"/>
+          <p:cNvPr id="33" name="Text 31"/>
           <p:cNvSpPr/>
           <p:nvPr/>
         </p:nvSpPr>
@@ -9348,7 +9650,7 @@
       </p:sp>
       <p:sp>
         <p:nvSpPr>
-          <p:cNvPr id="30" name="Text 28"/>
+          <p:cNvPr id="34" name="Text 32"/>
           <p:cNvSpPr/>
           <p:nvPr/>
         </p:nvSpPr>
@@ -9387,7 +9689,7 @@
       </p:sp>
       <p:sp>
         <p:nvSpPr>
-          <p:cNvPr id="31" name="Shape 29"/>
+          <p:cNvPr id="35" name="Shape 33"/>
           <p:cNvSpPr/>
           <p:nvPr/>
         </p:nvSpPr>
@@ -9414,7 +9716,7 @@
       </p:sp>
       <p:sp>
         <p:nvSpPr>
-          <p:cNvPr id="32" name="Text 30"/>
+          <p:cNvPr id="36" name="Text 34"/>
           <p:cNvSpPr/>
           <p:nvPr/>
         </p:nvSpPr>
@@ -9453,7 +9755,7 @@
       </p:sp>
       <p:sp>
         <p:nvSpPr>
-          <p:cNvPr id="33" name="Text 31"/>
+          <p:cNvPr id="37" name="Text 35"/>
           <p:cNvSpPr/>
           <p:nvPr/>
         </p:nvSpPr>
@@ -9492,7 +9794,7 @@
       </p:sp>
       <p:sp>
         <p:nvSpPr>
-          <p:cNvPr id="34" name="Shape 32"/>
+          <p:cNvPr id="38" name="Shape 36"/>
           <p:cNvSpPr/>
           <p:nvPr/>
         </p:nvSpPr>
@@ -9519,7 +9821,7 @@
       </p:sp>
       <p:sp>
         <p:nvSpPr>
-          <p:cNvPr id="35" name="Text 33"/>
+          <p:cNvPr id="39" name="Text 37"/>
           <p:cNvSpPr/>
           <p:nvPr/>
         </p:nvSpPr>
@@ -9558,7 +9860,7 @@
       </p:sp>
       <p:sp>
         <p:nvSpPr>
-          <p:cNvPr id="36" name="Text 34"/>
+          <p:cNvPr id="40" name="Text 38"/>
           <p:cNvSpPr/>
           <p:nvPr/>
         </p:nvSpPr>
@@ -9597,7 +9899,7 @@
       </p:sp>
       <p:sp>
         <p:nvSpPr>
-          <p:cNvPr id="37" name="Shape 35"/>
+          <p:cNvPr id="41" name="Shape 39"/>
           <p:cNvSpPr/>
           <p:nvPr/>
         </p:nvSpPr>
@@ -9624,7 +9926,7 @@
       </p:sp>
       <p:sp>
         <p:nvSpPr>
-          <p:cNvPr id="38" name="Text 36"/>
+          <p:cNvPr id="42" name="Text 40"/>
           <p:cNvSpPr/>
           <p:nvPr/>
         </p:nvSpPr>
@@ -9655,7 +9957,7 @@
                 <a:ea typeface="Trebuchet MS" pitchFamily="34" charset="-122"/>
                 <a:cs typeface="Trebuchet MS" pitchFamily="34" charset="-120"/>
               </a:rPr>
-              <a:t>sor</a:t>
+              <a:t>sing</a:t>
             </a:r>
             <a:endParaRPr lang="en-US" sz="1400" dirty="0"/>
           </a:p>
@@ -9663,7 +9965,7 @@
       </p:sp>
       <p:sp>
         <p:nvSpPr>
-          <p:cNvPr id="39" name="Shape 37"/>
+          <p:cNvPr id="43" name="Shape 41"/>
           <p:cNvSpPr/>
           <p:nvPr/>
         </p:nvSpPr>
@@ -9690,7 +9992,7 @@
       </p:sp>
       <p:sp>
         <p:nvSpPr>
-          <p:cNvPr id="40" name="Text 38"/>
+          <p:cNvPr id="44" name="Text 42"/>
           <p:cNvSpPr/>
           <p:nvPr/>
         </p:nvSpPr>
@@ -9729,7 +10031,7 @@
       </p:sp>
       <p:sp>
         <p:nvSpPr>
-          <p:cNvPr id="41" name="Shape 39"/>
+          <p:cNvPr id="45" name="Shape 43"/>
           <p:cNvSpPr/>
           <p:nvPr/>
         </p:nvSpPr>
@@ -9756,7 +10058,7 @@
       </p:sp>
       <p:sp>
         <p:nvSpPr>
-          <p:cNvPr id="42" name="Text 40"/>
+          <p:cNvPr id="46" name="Text 44"/>
           <p:cNvSpPr/>
           <p:nvPr/>
         </p:nvSpPr>
@@ -10218,7 +10520,7 @@
                 <a:ea typeface="Trebuchet MS" pitchFamily="34" charset="-122"/>
                 <a:cs typeface="Trebuchet MS" pitchFamily="34" charset="-120"/>
               </a:rPr>
-              <a:t>supervisor</a:t>
+              <a:t>supervising</a:t>
             </a:r>
             <a:endParaRPr lang="en-US" sz="2800" dirty="0"/>
           </a:p>
@@ -10298,8 +10600,8 @@
         </p:nvSpPr>
         <p:spPr>
           <a:xfrm>
-            <a:off x="2221992" y="2258568"/>
-            <a:ext cx="1828800" cy="292608"/>
+            <a:off x="1989734" y="2258568"/>
+            <a:ext cx="1581912" cy="292608"/>
           </a:xfrm>
           <a:prstGeom prst="rect">
             <a:avLst>
@@ -10332,8 +10634,8 @@
         </p:nvSpPr>
         <p:spPr>
           <a:xfrm>
-            <a:off x="2221992" y="2258568"/>
-            <a:ext cx="1828800" cy="292608"/>
+            <a:off x="1989734" y="2258568"/>
+            <a:ext cx="1581912" cy="292608"/>
           </a:xfrm>
           <a:prstGeom prst="rect">
             <a:avLst/>
@@ -10371,8 +10673,8 @@
         </p:nvSpPr>
         <p:spPr>
           <a:xfrm>
-            <a:off x="2221992" y="2569464"/>
-            <a:ext cx="1828800" cy="201168"/>
+            <a:off x="1989734" y="2569464"/>
+            <a:ext cx="1581912" cy="201168"/>
           </a:xfrm>
           <a:prstGeom prst="rect">
             <a:avLst/>
@@ -10410,8 +10712,8 @@
         </p:nvSpPr>
         <p:spPr>
           <a:xfrm>
-            <a:off x="4370832" y="2258568"/>
-            <a:ext cx="1828800" cy="292608"/>
+            <a:off x="3659429" y="2258568"/>
+            <a:ext cx="1581912" cy="292608"/>
           </a:xfrm>
           <a:prstGeom prst="rect">
             <a:avLst>
@@ -10444,8 +10746,8 @@
         </p:nvSpPr>
         <p:spPr>
           <a:xfrm>
-            <a:off x="4370832" y="2258568"/>
-            <a:ext cx="1828800" cy="292608"/>
+            <a:off x="3659429" y="2258568"/>
+            <a:ext cx="1581912" cy="292608"/>
           </a:xfrm>
           <a:prstGeom prst="rect">
             <a:avLst/>
@@ -10469,7 +10771,7 @@
                 <a:ea typeface="Trebuchet MS" pitchFamily="34" charset="-122"/>
                 <a:cs typeface="Trebuchet MS" pitchFamily="34" charset="-120"/>
               </a:rPr>
-              <a:t>vise</a:t>
+              <a:t>vis</a:t>
             </a:r>
             <a:endParaRPr lang="en-US" sz="1300" dirty="0"/>
           </a:p>
@@ -10483,8 +10785,8 @@
         </p:nvSpPr>
         <p:spPr>
           <a:xfrm>
-            <a:off x="4370832" y="2569464"/>
-            <a:ext cx="1828800" cy="201168"/>
+            <a:off x="3659429" y="2569464"/>
+            <a:ext cx="1581912" cy="201168"/>
           </a:xfrm>
           <a:prstGeom prst="rect">
             <a:avLst/>
@@ -10508,7 +10810,7 @@
                 <a:ea typeface="Calibri" pitchFamily="34" charset="-122"/>
                 <a:cs typeface="Calibri" pitchFamily="34" charset="-120"/>
               </a:rPr>
-              <a:t>to see, to watch</a:t>
+              <a:t>to see</a:t>
             </a:r>
             <a:endParaRPr lang="en-US" sz="850" dirty="0"/>
           </a:p>
@@ -10522,8 +10824,8 @@
         </p:nvSpPr>
         <p:spPr>
           <a:xfrm>
-            <a:off x="6519672" y="2258568"/>
-            <a:ext cx="1828800" cy="292608"/>
+            <a:off x="5329123" y="2258568"/>
+            <a:ext cx="1581912" cy="292608"/>
           </a:xfrm>
           <a:prstGeom prst="rect">
             <a:avLst>
@@ -10556,8 +10858,8 @@
         </p:nvSpPr>
         <p:spPr>
           <a:xfrm>
-            <a:off x="6519672" y="2258568"/>
-            <a:ext cx="1828800" cy="292608"/>
+            <a:off x="5329123" y="2258568"/>
+            <a:ext cx="1581912" cy="292608"/>
           </a:xfrm>
           <a:prstGeom prst="rect">
             <a:avLst/>
@@ -10581,7 +10883,7 @@
                 <a:ea typeface="Trebuchet MS" pitchFamily="34" charset="-122"/>
                 <a:cs typeface="Trebuchet MS" pitchFamily="34" charset="-120"/>
               </a:rPr>
-              <a:t>or</a:t>
+              <a:t>e</a:t>
             </a:r>
             <a:endParaRPr lang="en-US" sz="1300" dirty="0"/>
           </a:p>
@@ -10595,8 +10897,8 @@
         </p:nvSpPr>
         <p:spPr>
           <a:xfrm>
-            <a:off x="6519672" y="2569464"/>
-            <a:ext cx="1828800" cy="201168"/>
+            <a:off x="5329123" y="2569464"/>
+            <a:ext cx="1581912" cy="201168"/>
           </a:xfrm>
           <a:prstGeom prst="rect">
             <a:avLst/>
@@ -10620,7 +10922,7 @@
                 <a:ea typeface="Calibri" pitchFamily="34" charset="-122"/>
                 <a:cs typeface="Calibri" pitchFamily="34" charset="-120"/>
               </a:rPr>
-              <a:t>person who does</a:t>
+              <a:t>base ending</a:t>
             </a:r>
             <a:endParaRPr lang="en-US" sz="850" dirty="0"/>
           </a:p>
@@ -10628,7 +10930,158 @@
       </p:sp>
       <p:sp>
         <p:nvSpPr>
-          <p:cNvPr id="25" name="Shape 23"/>
+          <p:cNvPr id="25" name="Text 23"/>
+          <p:cNvSpPr/>
+          <p:nvPr/>
+        </p:nvSpPr>
+        <p:spPr>
+          <a:xfrm>
+            <a:off x="5329123" y="2752344"/>
+            <a:ext cx="1581912" cy="182880"/>
+          </a:xfrm>
+          <a:prstGeom prst="rect">
+            <a:avLst/>
+          </a:prstGeom>
+          <a:noFill/>
+          <a:ln/>
+        </p:spPr>
+        <p:txBody>
+          <a:bodyPr wrap="square" lIns="0" tIns="0" rIns="0" bIns="0" rtlCol="0" anchor="t"/>
+          <a:lstStyle/>
+          <a:p>
+            <a:pPr algn="ctr" indent="0" marL="0">
+              <a:buNone/>
+            </a:pPr>
+            <a:r>
+              <a:rPr lang="en-US" sz="700" i="1" dirty="0">
+                <a:solidFill>
+                  <a:srgbClr val="94A3B8"/>
+                </a:solidFill>
+                <a:latin typeface="Calibri" pitchFamily="34" charset="0"/>
+                <a:ea typeface="Calibri" pitchFamily="34" charset="-122"/>
+                <a:cs typeface="Calibri" pitchFamily="34" charset="-120"/>
+              </a:rPr>
+              <a:t>'e' dropped before vowel suffix</a:t>
+            </a:r>
+            <a:endParaRPr lang="en-US" sz="700" dirty="0"/>
+          </a:p>
+        </p:txBody>
+      </p:sp>
+      <p:sp>
+        <p:nvSpPr>
+          <p:cNvPr id="26" name="Shape 24"/>
+          <p:cNvSpPr/>
+          <p:nvPr/>
+        </p:nvSpPr>
+        <p:spPr>
+          <a:xfrm>
+            <a:off x="6998818" y="2258568"/>
+            <a:ext cx="1581912" cy="292608"/>
+          </a:xfrm>
+          <a:prstGeom prst="rect">
+            <a:avLst>
+              <a:gd name="adj" fmla="val 25000"/>
+            </a:avLst>
+          </a:prstGeom>
+          <a:solidFill>
+            <a:srgbClr val="FCE7F3"/>
+          </a:solidFill>
+          <a:ln w="19050">
+            <a:solidFill>
+              <a:srgbClr val="DB2777"/>
+            </a:solidFill>
+            <a:prstDash val="solid"/>
+          </a:ln>
+          <a:effectLst>
+            <a:outerShdw sx="100000" sy="100000" kx="0" ky="0" algn="bl" rotWithShape="0" blurRad="101600" dist="38100" dir="8100000">
+              <a:srgbClr val="000000">
+                <a:alpha val="12000"/>
+              </a:srgbClr>
+            </a:outerShdw>
+          </a:effectLst>
+        </p:spPr>
+      </p:sp>
+      <p:sp>
+        <p:nvSpPr>
+          <p:cNvPr id="27" name="Text 25"/>
+          <p:cNvSpPr/>
+          <p:nvPr/>
+        </p:nvSpPr>
+        <p:spPr>
+          <a:xfrm>
+            <a:off x="6998818" y="2258568"/>
+            <a:ext cx="1581912" cy="292608"/>
+          </a:xfrm>
+          <a:prstGeom prst="rect">
+            <a:avLst/>
+          </a:prstGeom>
+          <a:noFill/>
+          <a:ln/>
+        </p:spPr>
+        <p:txBody>
+          <a:bodyPr wrap="square" lIns="0" tIns="0" rIns="0" bIns="0" rtlCol="0" anchor="ctr"/>
+          <a:lstStyle/>
+          <a:p>
+            <a:pPr algn="ctr" indent="0" marL="0">
+              <a:buNone/>
+            </a:pPr>
+            <a:r>
+              <a:rPr lang="en-US" sz="1300" b="1" dirty="0">
+                <a:solidFill>
+                  <a:srgbClr val="9D174D"/>
+                </a:solidFill>
+                <a:latin typeface="Trebuchet MS" pitchFamily="34" charset="0"/>
+                <a:ea typeface="Trebuchet MS" pitchFamily="34" charset="-122"/>
+                <a:cs typeface="Trebuchet MS" pitchFamily="34" charset="-120"/>
+              </a:rPr>
+              <a:t>ing</a:t>
+            </a:r>
+            <a:endParaRPr lang="en-US" sz="1300" dirty="0"/>
+          </a:p>
+        </p:txBody>
+      </p:sp>
+      <p:sp>
+        <p:nvSpPr>
+          <p:cNvPr id="28" name="Text 26"/>
+          <p:cNvSpPr/>
+          <p:nvPr/>
+        </p:nvSpPr>
+        <p:spPr>
+          <a:xfrm>
+            <a:off x="6998818" y="2569464"/>
+            <a:ext cx="1581912" cy="201168"/>
+          </a:xfrm>
+          <a:prstGeom prst="rect">
+            <a:avLst/>
+          </a:prstGeom>
+          <a:noFill/>
+          <a:ln/>
+        </p:spPr>
+        <p:txBody>
+          <a:bodyPr wrap="square" lIns="0" tIns="0" rIns="0" bIns="0" rtlCol="0" anchor="t"/>
+          <a:lstStyle/>
+          <a:p>
+            <a:pPr algn="ctr" indent="0" marL="0">
+              <a:buNone/>
+            </a:pPr>
+            <a:r>
+              <a:rPr lang="en-US" sz="850" dirty="0">
+                <a:solidFill>
+                  <a:srgbClr val="475569"/>
+                </a:solidFill>
+                <a:latin typeface="Calibri" pitchFamily="34" charset="0"/>
+                <a:ea typeface="Calibri" pitchFamily="34" charset="-122"/>
+                <a:cs typeface="Calibri" pitchFamily="34" charset="-120"/>
+              </a:rPr>
+              <a:t>ongoing action</a:t>
+            </a:r>
+            <a:endParaRPr lang="en-US" sz="850" dirty="0"/>
+          </a:p>
+        </p:txBody>
+      </p:sp>
+      <p:sp>
+        <p:nvSpPr>
+          <p:cNvPr id="29" name="Shape 27"/>
           <p:cNvSpPr/>
           <p:nvPr/>
         </p:nvSpPr>
@@ -10655,7 +11108,7 @@
       </p:sp>
       <p:sp>
         <p:nvSpPr>
-          <p:cNvPr id="26" name="Text 24"/>
+          <p:cNvPr id="30" name="Text 28"/>
           <p:cNvSpPr/>
           <p:nvPr/>
         </p:nvSpPr>
@@ -10694,7 +11147,7 @@
       </p:sp>
       <p:sp>
         <p:nvSpPr>
-          <p:cNvPr id="27" name="Shape 25"/>
+          <p:cNvPr id="31" name="Shape 29"/>
           <p:cNvSpPr/>
           <p:nvPr/>
         </p:nvSpPr>
@@ -10721,7 +11174,7 @@
       </p:sp>
       <p:sp>
         <p:nvSpPr>
-          <p:cNvPr id="28" name="Shape 26"/>
+          <p:cNvPr id="32" name="Shape 30"/>
           <p:cNvSpPr/>
           <p:nvPr/>
         </p:nvSpPr>
@@ -10748,7 +11201,7 @@
       </p:sp>
       <p:sp>
         <p:nvSpPr>
-          <p:cNvPr id="29" name="Text 27"/>
+          <p:cNvPr id="33" name="Text 31"/>
           <p:cNvSpPr/>
           <p:nvPr/>
         </p:nvSpPr>
@@ -10787,7 +11240,7 @@
       </p:sp>
       <p:sp>
         <p:nvSpPr>
-          <p:cNvPr id="30" name="Text 28"/>
+          <p:cNvPr id="34" name="Text 32"/>
           <p:cNvSpPr/>
           <p:nvPr/>
         </p:nvSpPr>
@@ -10826,7 +11279,7 @@
       </p:sp>
       <p:sp>
         <p:nvSpPr>
-          <p:cNvPr id="31" name="Shape 29"/>
+          <p:cNvPr id="35" name="Shape 33"/>
           <p:cNvSpPr/>
           <p:nvPr/>
         </p:nvSpPr>
@@ -10853,7 +11306,7 @@
       </p:sp>
       <p:sp>
         <p:nvSpPr>
-          <p:cNvPr id="32" name="Text 30"/>
+          <p:cNvPr id="36" name="Text 34"/>
           <p:cNvSpPr/>
           <p:nvPr/>
         </p:nvSpPr>
@@ -10892,7 +11345,7 @@
       </p:sp>
       <p:sp>
         <p:nvSpPr>
-          <p:cNvPr id="33" name="Text 31"/>
+          <p:cNvPr id="37" name="Text 35"/>
           <p:cNvSpPr/>
           <p:nvPr/>
         </p:nvSpPr>
@@ -10931,7 +11384,7 @@
       </p:sp>
       <p:sp>
         <p:nvSpPr>
-          <p:cNvPr id="34" name="Shape 32"/>
+          <p:cNvPr id="38" name="Shape 36"/>
           <p:cNvSpPr/>
           <p:nvPr/>
         </p:nvSpPr>
@@ -10958,7 +11411,7 @@
       </p:sp>
       <p:sp>
         <p:nvSpPr>
-          <p:cNvPr id="35" name="Text 33"/>
+          <p:cNvPr id="39" name="Text 37"/>
           <p:cNvSpPr/>
           <p:nvPr/>
         </p:nvSpPr>
@@ -10997,7 +11450,7 @@
       </p:sp>
       <p:sp>
         <p:nvSpPr>
-          <p:cNvPr id="36" name="Text 34"/>
+          <p:cNvPr id="40" name="Text 38"/>
           <p:cNvSpPr/>
           <p:nvPr/>
         </p:nvSpPr>
@@ -11036,7 +11489,7 @@
       </p:sp>
       <p:sp>
         <p:nvSpPr>
-          <p:cNvPr id="37" name="Shape 35"/>
+          <p:cNvPr id="41" name="Shape 39"/>
           <p:cNvSpPr/>
           <p:nvPr/>
         </p:nvSpPr>
@@ -11063,7 +11516,7 @@
       </p:sp>
       <p:sp>
         <p:nvSpPr>
-          <p:cNvPr id="38" name="Text 36"/>
+          <p:cNvPr id="42" name="Text 40"/>
           <p:cNvSpPr/>
           <p:nvPr/>
         </p:nvSpPr>
@@ -11094,7 +11547,7 @@
                 <a:ea typeface="Trebuchet MS" pitchFamily="34" charset="-122"/>
                 <a:cs typeface="Trebuchet MS" pitchFamily="34" charset="-120"/>
               </a:rPr>
-              <a:t>sor</a:t>
+              <a:t>sing</a:t>
             </a:r>
             <a:endParaRPr lang="en-US" sz="1400" dirty="0"/>
           </a:p>
@@ -11102,7 +11555,7 @@
       </p:sp>
       <p:sp>
         <p:nvSpPr>
-          <p:cNvPr id="39" name="Shape 37"/>
+          <p:cNvPr id="43" name="Shape 41"/>
           <p:cNvSpPr/>
           <p:nvPr/>
         </p:nvSpPr>
@@ -11129,7 +11582,7 @@
       </p:sp>
       <p:sp>
         <p:nvSpPr>
-          <p:cNvPr id="40" name="Text 38"/>
+          <p:cNvPr id="44" name="Text 42"/>
           <p:cNvSpPr/>
           <p:nvPr/>
         </p:nvSpPr>
@@ -11168,18 +11621,18 @@
       </p:sp>
       <p:sp>
         <p:nvSpPr>
-          <p:cNvPr id="41" name="Shape 39"/>
+          <p:cNvPr id="45" name="Shape 43"/>
           <p:cNvSpPr/>
           <p:nvPr/>
         </p:nvSpPr>
         <p:spPr>
           <a:xfrm>
             <a:off x="1874520" y="4096512"/>
-            <a:ext cx="6903720" cy="804672"/>
+            <a:ext cx="6903720" cy="658368"/>
           </a:xfrm>
           <a:prstGeom prst="rect">
             <a:avLst>
-              <a:gd name="adj" fmla="val 6818"/>
+              <a:gd name="adj" fmla="val 8333"/>
             </a:avLst>
           </a:prstGeom>
           <a:solidFill>
@@ -11195,18 +11648,18 @@
       </p:sp>
       <p:sp>
         <p:nvSpPr>
-          <p:cNvPr id="42" name="Shape 40"/>
+          <p:cNvPr id="46" name="Shape 44"/>
           <p:cNvSpPr/>
           <p:nvPr/>
         </p:nvSpPr>
         <p:spPr>
           <a:xfrm>
             <a:off x="2023872" y="4169664"/>
-            <a:ext cx="685800" cy="384048"/>
+            <a:ext cx="685800" cy="475488"/>
           </a:xfrm>
           <a:prstGeom prst="rect">
             <a:avLst>
-              <a:gd name="adj" fmla="val 9524"/>
+              <a:gd name="adj" fmla="val 7692"/>
             </a:avLst>
           </a:prstGeom>
           <a:solidFill>
@@ -11222,14 +11675,14 @@
       </p:sp>
       <p:sp>
         <p:nvSpPr>
-          <p:cNvPr id="43" name="Text 41"/>
+          <p:cNvPr id="47" name="Text 45"/>
           <p:cNvSpPr/>
           <p:nvPr/>
         </p:nvSpPr>
         <p:spPr>
           <a:xfrm>
             <a:off x="2023872" y="4169664"/>
-            <a:ext cx="685800" cy="384048"/>
+            <a:ext cx="685800" cy="475488"/>
           </a:xfrm>
           <a:prstGeom prst="rect">
             <a:avLst/>
@@ -11261,18 +11714,18 @@
       </p:sp>
       <p:sp>
         <p:nvSpPr>
-          <p:cNvPr id="44" name="Shape 42"/>
+          <p:cNvPr id="48" name="Shape 46"/>
           <p:cNvSpPr/>
           <p:nvPr/>
         </p:nvSpPr>
         <p:spPr>
           <a:xfrm>
             <a:off x="2831592" y="4169664"/>
-            <a:ext cx="685800" cy="384048"/>
+            <a:ext cx="685800" cy="475488"/>
           </a:xfrm>
           <a:prstGeom prst="rect">
             <a:avLst>
-              <a:gd name="adj" fmla="val 9524"/>
+              <a:gd name="adj" fmla="val 7692"/>
             </a:avLst>
           </a:prstGeom>
           <a:solidFill>
@@ -11288,14 +11741,14 @@
       </p:sp>
       <p:sp>
         <p:nvSpPr>
-          <p:cNvPr id="45" name="Text 43"/>
+          <p:cNvPr id="49" name="Text 47"/>
           <p:cNvSpPr/>
           <p:nvPr/>
         </p:nvSpPr>
         <p:spPr>
           <a:xfrm>
             <a:off x="2831592" y="4169664"/>
-            <a:ext cx="685800" cy="384048"/>
+            <a:ext cx="685800" cy="475488"/>
           </a:xfrm>
           <a:prstGeom prst="rect">
             <a:avLst/>
@@ -11327,18 +11780,18 @@
       </p:sp>
       <p:sp>
         <p:nvSpPr>
-          <p:cNvPr id="46" name="Shape 44"/>
+          <p:cNvPr id="50" name="Shape 48"/>
           <p:cNvSpPr/>
           <p:nvPr/>
         </p:nvSpPr>
         <p:spPr>
           <a:xfrm>
             <a:off x="3639312" y="4169664"/>
-            <a:ext cx="685800" cy="384048"/>
+            <a:ext cx="685800" cy="475488"/>
           </a:xfrm>
           <a:prstGeom prst="rect">
             <a:avLst>
-              <a:gd name="adj" fmla="val 9524"/>
+              <a:gd name="adj" fmla="val 7692"/>
             </a:avLst>
           </a:prstGeom>
           <a:solidFill>
@@ -11354,14 +11807,14 @@
       </p:sp>
       <p:sp>
         <p:nvSpPr>
-          <p:cNvPr id="47" name="Text 45"/>
+          <p:cNvPr id="51" name="Text 49"/>
           <p:cNvSpPr/>
           <p:nvPr/>
         </p:nvSpPr>
         <p:spPr>
           <a:xfrm>
             <a:off x="3639312" y="4169664"/>
-            <a:ext cx="685800" cy="384048"/>
+            <a:ext cx="685800" cy="475488"/>
           </a:xfrm>
           <a:prstGeom prst="rect">
             <a:avLst/>
@@ -11393,18 +11846,18 @@
       </p:sp>
       <p:sp>
         <p:nvSpPr>
-          <p:cNvPr id="48" name="Shape 46"/>
+          <p:cNvPr id="52" name="Shape 50"/>
           <p:cNvSpPr/>
           <p:nvPr/>
         </p:nvSpPr>
         <p:spPr>
           <a:xfrm>
             <a:off x="4447032" y="4169664"/>
-            <a:ext cx="685800" cy="384048"/>
+            <a:ext cx="685800" cy="475488"/>
           </a:xfrm>
           <a:prstGeom prst="rect">
             <a:avLst>
-              <a:gd name="adj" fmla="val 9524"/>
+              <a:gd name="adj" fmla="val 7692"/>
             </a:avLst>
           </a:prstGeom>
           <a:solidFill>
@@ -11420,14 +11873,14 @@
       </p:sp>
       <p:sp>
         <p:nvSpPr>
-          <p:cNvPr id="49" name="Text 47"/>
+          <p:cNvPr id="53" name="Text 51"/>
           <p:cNvSpPr/>
           <p:nvPr/>
         </p:nvSpPr>
         <p:spPr>
           <a:xfrm>
             <a:off x="4447032" y="4169664"/>
-            <a:ext cx="685800" cy="384048"/>
+            <a:ext cx="685800" cy="475488"/>
           </a:xfrm>
           <a:prstGeom prst="rect">
             <a:avLst/>
@@ -11459,18 +11912,18 @@
       </p:sp>
       <p:sp>
         <p:nvSpPr>
-          <p:cNvPr id="50" name="Shape 48"/>
+          <p:cNvPr id="54" name="Shape 52"/>
           <p:cNvSpPr/>
           <p:nvPr/>
         </p:nvSpPr>
         <p:spPr>
           <a:xfrm>
             <a:off x="5254752" y="4169664"/>
-            <a:ext cx="685800" cy="384048"/>
+            <a:ext cx="685800" cy="475488"/>
           </a:xfrm>
           <a:prstGeom prst="rect">
             <a:avLst>
-              <a:gd name="adj" fmla="val 9524"/>
+              <a:gd name="adj" fmla="val 7692"/>
             </a:avLst>
           </a:prstGeom>
           <a:solidFill>
@@ -11486,14 +11939,14 @@
       </p:sp>
       <p:sp>
         <p:nvSpPr>
-          <p:cNvPr id="51" name="Text 49"/>
+          <p:cNvPr id="55" name="Text 53"/>
           <p:cNvSpPr/>
           <p:nvPr/>
         </p:nvSpPr>
         <p:spPr>
           <a:xfrm>
             <a:off x="5254752" y="4169664"/>
-            <a:ext cx="685800" cy="384048"/>
+            <a:ext cx="685800" cy="475488"/>
           </a:xfrm>
           <a:prstGeom prst="rect">
             <a:avLst/>
@@ -11525,18 +11978,18 @@
       </p:sp>
       <p:sp>
         <p:nvSpPr>
-          <p:cNvPr id="52" name="Shape 50"/>
+          <p:cNvPr id="56" name="Shape 54"/>
           <p:cNvSpPr/>
           <p:nvPr/>
         </p:nvSpPr>
         <p:spPr>
           <a:xfrm>
             <a:off x="6062472" y="4169664"/>
-            <a:ext cx="685800" cy="384048"/>
+            <a:ext cx="685800" cy="475488"/>
           </a:xfrm>
           <a:prstGeom prst="rect">
             <a:avLst>
-              <a:gd name="adj" fmla="val 9524"/>
+              <a:gd name="adj" fmla="val 7692"/>
             </a:avLst>
           </a:prstGeom>
           <a:solidFill>
@@ -11552,14 +12005,14 @@
       </p:sp>
       <p:sp>
         <p:nvSpPr>
-          <p:cNvPr id="53" name="Text 51"/>
+          <p:cNvPr id="57" name="Text 55"/>
           <p:cNvSpPr/>
           <p:nvPr/>
         </p:nvSpPr>
         <p:spPr>
           <a:xfrm>
             <a:off x="6062472" y="4169664"/>
-            <a:ext cx="685800" cy="384048"/>
+            <a:ext cx="685800" cy="475488"/>
           </a:xfrm>
           <a:prstGeom prst="rect">
             <a:avLst/>
@@ -11591,18 +12044,18 @@
       </p:sp>
       <p:sp>
         <p:nvSpPr>
-          <p:cNvPr id="54" name="Shape 52"/>
+          <p:cNvPr id="58" name="Shape 56"/>
           <p:cNvSpPr/>
           <p:nvPr/>
         </p:nvSpPr>
         <p:spPr>
           <a:xfrm>
             <a:off x="6870192" y="4169664"/>
-            <a:ext cx="685800" cy="384048"/>
+            <a:ext cx="685800" cy="475488"/>
           </a:xfrm>
           <a:prstGeom prst="rect">
             <a:avLst>
-              <a:gd name="adj" fmla="val 9524"/>
+              <a:gd name="adj" fmla="val 7692"/>
             </a:avLst>
           </a:prstGeom>
           <a:solidFill>
@@ -11618,14 +12071,14 @@
       </p:sp>
       <p:sp>
         <p:nvSpPr>
-          <p:cNvPr id="55" name="Text 53"/>
+          <p:cNvPr id="59" name="Text 57"/>
           <p:cNvSpPr/>
           <p:nvPr/>
         </p:nvSpPr>
         <p:spPr>
           <a:xfrm>
             <a:off x="6870192" y="4169664"/>
-            <a:ext cx="685800" cy="384048"/>
+            <a:ext cx="685800" cy="475488"/>
           </a:xfrm>
           <a:prstGeom prst="rect">
             <a:avLst/>
@@ -11657,57 +12110,18 @@
       </p:sp>
       <p:sp>
         <p:nvSpPr>
-          <p:cNvPr id="56" name="Text 54"/>
-          <p:cNvSpPr/>
-          <p:nvPr/>
-        </p:nvSpPr>
-        <p:spPr>
-          <a:xfrm>
-            <a:off x="6870192" y="4572000"/>
-            <a:ext cx="685800" cy="219456"/>
-          </a:xfrm>
-          <a:prstGeom prst="rect">
-            <a:avLst/>
-          </a:prstGeom>
-          <a:noFill/>
-          <a:ln/>
-        </p:spPr>
-        <p:txBody>
-          <a:bodyPr wrap="square" lIns="0" tIns="0" rIns="0" bIns="0" rtlCol="0" anchor="t"/>
-          <a:lstStyle/>
-          <a:p>
-            <a:pPr algn="ctr" indent="0" marL="0">
-              <a:buNone/>
-            </a:pPr>
-            <a:r>
-              <a:rPr lang="en-US" sz="750" i="1" dirty="0">
-                <a:solidFill>
-                  <a:srgbClr val="94A3B8"/>
-                </a:solidFill>
-                <a:latin typeface="Calibri" pitchFamily="34" charset="0"/>
-                <a:ea typeface="Calibri" pitchFamily="34" charset="-122"/>
-                <a:cs typeface="Calibri" pitchFamily="34" charset="-120"/>
-              </a:rPr>
-              <a:t>/z/</a:t>
-            </a:r>
-            <a:endParaRPr lang="en-US" sz="750" dirty="0"/>
-          </a:p>
-        </p:txBody>
-      </p:sp>
-      <p:sp>
-        <p:nvSpPr>
-          <p:cNvPr id="57" name="Shape 55"/>
+          <p:cNvPr id="60" name="Shape 58"/>
           <p:cNvSpPr/>
           <p:nvPr/>
         </p:nvSpPr>
         <p:spPr>
           <a:xfrm>
             <a:off x="7677912" y="4169664"/>
-            <a:ext cx="685800" cy="384048"/>
+            <a:ext cx="685800" cy="475488"/>
           </a:xfrm>
           <a:prstGeom prst="rect">
             <a:avLst>
-              <a:gd name="adj" fmla="val 9524"/>
+              <a:gd name="adj" fmla="val 7692"/>
             </a:avLst>
           </a:prstGeom>
           <a:solidFill>
@@ -11723,14 +12137,14 @@
       </p:sp>
       <p:sp>
         <p:nvSpPr>
-          <p:cNvPr id="58" name="Text 56"/>
+          <p:cNvPr id="61" name="Text 59"/>
           <p:cNvSpPr/>
           <p:nvPr/>
         </p:nvSpPr>
         <p:spPr>
           <a:xfrm>
             <a:off x="7677912" y="4169664"/>
-            <a:ext cx="685800" cy="384048"/>
+            <a:ext cx="685800" cy="475488"/>
           </a:xfrm>
           <a:prstGeom prst="rect">
             <a:avLst/>
@@ -11754,7 +12168,7 @@
                 <a:ea typeface="Trebuchet MS" pitchFamily="34" charset="-122"/>
                 <a:cs typeface="Trebuchet MS" pitchFamily="34" charset="-120"/>
               </a:rPr>
-              <a:t>or</a:t>
+              <a:t>ing</a:t>
             </a:r>
             <a:endParaRPr lang="en-US" sz="900" dirty="0"/>
           </a:p>
@@ -12185,7 +12599,7 @@
                 <a:ea typeface="Trebuchet MS" pitchFamily="34" charset="-122"/>
                 <a:cs typeface="Trebuchet MS" pitchFamily="34" charset="-120"/>
               </a:rPr>
-              <a:t>superb</a:t>
+              <a:t>supermarket</a:t>
             </a:r>
             <a:endParaRPr lang="en-US" sz="2800" dirty="0"/>
           </a:p>
@@ -13012,7 +13426,7 @@
                 <a:ea typeface="Trebuchet MS" pitchFamily="34" charset="-122"/>
                 <a:cs typeface="Trebuchet MS" pitchFamily="34" charset="-120"/>
               </a:rPr>
-              <a:t>superb</a:t>
+              <a:t>supermarket</a:t>
             </a:r>
             <a:endParaRPr lang="en-US" sz="2800" dirty="0"/>
           </a:p>
@@ -13263,7 +13677,7 @@
                 <a:ea typeface="Trebuchet MS" pitchFamily="34" charset="-122"/>
                 <a:cs typeface="Trebuchet MS" pitchFamily="34" charset="-120"/>
               </a:rPr>
-              <a:t>b</a:t>
+              <a:t>market</a:t>
             </a:r>
             <a:endParaRPr lang="en-US" sz="1300" dirty="0"/>
           </a:p>
@@ -13302,7 +13716,7 @@
                 <a:ea typeface="Calibri" pitchFamily="34" charset="-122"/>
                 <a:cs typeface="Calibri" pitchFamily="34" charset="-120"/>
               </a:rPr>
-              <a:t>excellent (from Latin superbus)</a:t>
+              <a:t>a place to buy and sell goods</a:t>
             </a:r>
             <a:endParaRPr lang="en-US" sz="850" dirty="0"/>
           </a:p>
@@ -13997,7 +14411,7 @@
                 <a:ea typeface="Trebuchet MS" pitchFamily="34" charset="-122"/>
                 <a:cs typeface="Trebuchet MS" pitchFamily="34" charset="-120"/>
               </a:rPr>
-              <a:t>superb</a:t>
+              <a:t>supermarket</a:t>
             </a:r>
             <a:endParaRPr lang="en-US" sz="2800" dirty="0"/>
           </a:p>
@@ -14248,7 +14662,7 @@
                 <a:ea typeface="Trebuchet MS" pitchFamily="34" charset="-122"/>
                 <a:cs typeface="Trebuchet MS" pitchFamily="34" charset="-120"/>
               </a:rPr>
-              <a:t>b</a:t>
+              <a:t>market</a:t>
             </a:r>
             <a:endParaRPr lang="en-US" sz="1300" dirty="0"/>
           </a:p>
@@ -14287,7 +14701,7 @@
                 <a:ea typeface="Calibri" pitchFamily="34" charset="-122"/>
                 <a:cs typeface="Calibri" pitchFamily="34" charset="-120"/>
               </a:rPr>
-              <a:t>excellent (from Latin superbus)</a:t>
+              <a:t>a place to buy and sell goods</a:t>
             </a:r>
             <a:endParaRPr lang="en-US" sz="850" dirty="0"/>
           </a:p>
@@ -14394,8 +14808,8 @@
         </p:nvSpPr>
         <p:spPr>
           <a:xfrm>
-            <a:off x="2999232" y="3364992"/>
-            <a:ext cx="1645920" cy="475488"/>
+            <a:off x="1975104" y="3364992"/>
+            <a:ext cx="1554480" cy="475488"/>
           </a:xfrm>
           <a:prstGeom prst="rect">
             <a:avLst>
@@ -14421,8 +14835,8 @@
         </p:nvSpPr>
         <p:spPr>
           <a:xfrm>
-            <a:off x="2999232" y="3364992"/>
-            <a:ext cx="1645920" cy="475488"/>
+            <a:off x="1975104" y="3364992"/>
+            <a:ext cx="1554480" cy="475488"/>
           </a:xfrm>
           <a:prstGeom prst="rect">
             <a:avLst/>
@@ -14460,8 +14874,8 @@
         </p:nvSpPr>
         <p:spPr>
           <a:xfrm>
-            <a:off x="4645152" y="3364992"/>
-            <a:ext cx="1097280" cy="475488"/>
+            <a:off x="3529584" y="3364992"/>
+            <a:ext cx="73152" cy="475488"/>
           </a:xfrm>
           <a:prstGeom prst="rect">
             <a:avLst/>
@@ -14499,8 +14913,8 @@
         </p:nvSpPr>
         <p:spPr>
           <a:xfrm>
-            <a:off x="5742432" y="3364992"/>
-            <a:ext cx="1645920" cy="475488"/>
+            <a:off x="3602736" y="3364992"/>
+            <a:ext cx="1554480" cy="475488"/>
           </a:xfrm>
           <a:prstGeom prst="rect">
             <a:avLst>
@@ -14526,8 +14940,8 @@
         </p:nvSpPr>
         <p:spPr>
           <a:xfrm>
-            <a:off x="5742432" y="3364992"/>
-            <a:ext cx="1645920" cy="475488"/>
+            <a:off x="3602736" y="3364992"/>
+            <a:ext cx="1554480" cy="475488"/>
           </a:xfrm>
           <a:prstGeom prst="rect">
             <a:avLst/>
@@ -14551,7 +14965,7 @@
                 <a:ea typeface="Trebuchet MS" pitchFamily="34" charset="-122"/>
                 <a:cs typeface="Trebuchet MS" pitchFamily="34" charset="-120"/>
               </a:rPr>
-              <a:t>perb</a:t>
+              <a:t>per</a:t>
             </a:r>
             <a:endParaRPr lang="en-US" sz="1400" dirty="0"/>
           </a:p>
@@ -14559,7 +14973,217 @@
       </p:sp>
       <p:sp>
         <p:nvSpPr>
-          <p:cNvPr id="30" name="Shape 28"/>
+          <p:cNvPr id="30" name="Text 28"/>
+          <p:cNvSpPr/>
+          <p:nvPr/>
+        </p:nvSpPr>
+        <p:spPr>
+          <a:xfrm>
+            <a:off x="5157216" y="3364992"/>
+            <a:ext cx="73152" cy="475488"/>
+          </a:xfrm>
+          <a:prstGeom prst="rect">
+            <a:avLst/>
+          </a:prstGeom>
+          <a:noFill/>
+          <a:ln/>
+        </p:spPr>
+        <p:txBody>
+          <a:bodyPr wrap="square" lIns="0" tIns="0" rIns="0" bIns="0" rtlCol="0" anchor="ctr"/>
+          <a:lstStyle/>
+          <a:p>
+            <a:pPr algn="ctr" indent="0" marL="0">
+              <a:buNone/>
+            </a:pPr>
+            <a:r>
+              <a:rPr lang="en-US" sz="1600" b="1" dirty="0">
+                <a:solidFill>
+                  <a:srgbClr val="0D9488"/>
+                </a:solidFill>
+                <a:latin typeface="Trebuchet MS" pitchFamily="34" charset="0"/>
+                <a:ea typeface="Trebuchet MS" pitchFamily="34" charset="-122"/>
+                <a:cs typeface="Trebuchet MS" pitchFamily="34" charset="-120"/>
+              </a:rPr>
+              <a:t>·</a:t>
+            </a:r>
+            <a:endParaRPr lang="en-US" sz="1600" dirty="0"/>
+          </a:p>
+        </p:txBody>
+      </p:sp>
+      <p:sp>
+        <p:nvSpPr>
+          <p:cNvPr id="31" name="Shape 29"/>
+          <p:cNvSpPr/>
+          <p:nvPr/>
+        </p:nvSpPr>
+        <p:spPr>
+          <a:xfrm>
+            <a:off x="5230368" y="3364992"/>
+            <a:ext cx="1554480" cy="475488"/>
+          </a:xfrm>
+          <a:prstGeom prst="rect">
+            <a:avLst>
+              <a:gd name="adj" fmla="val 9615"/>
+            </a:avLst>
+          </a:prstGeom>
+          <a:solidFill>
+            <a:srgbClr val="FFFFFF"/>
+          </a:solidFill>
+          <a:ln w="12700">
+            <a:solidFill>
+              <a:srgbClr val="0D9488"/>
+            </a:solidFill>
+            <a:prstDash val="solid"/>
+          </a:ln>
+        </p:spPr>
+      </p:sp>
+      <p:sp>
+        <p:nvSpPr>
+          <p:cNvPr id="32" name="Text 30"/>
+          <p:cNvSpPr/>
+          <p:nvPr/>
+        </p:nvSpPr>
+        <p:spPr>
+          <a:xfrm>
+            <a:off x="5230368" y="3364992"/>
+            <a:ext cx="1554480" cy="475488"/>
+          </a:xfrm>
+          <a:prstGeom prst="rect">
+            <a:avLst/>
+          </a:prstGeom>
+          <a:noFill/>
+          <a:ln/>
+        </p:spPr>
+        <p:txBody>
+          <a:bodyPr wrap="square" lIns="0" tIns="0" rIns="0" bIns="0" rtlCol="0" anchor="ctr"/>
+          <a:lstStyle/>
+          <a:p>
+            <a:pPr algn="ctr" indent="0" marL="0">
+              <a:buNone/>
+            </a:pPr>
+            <a:r>
+              <a:rPr lang="en-US" sz="1400" b="1" dirty="0">
+                <a:solidFill>
+                  <a:srgbClr val="0D9488"/>
+                </a:solidFill>
+                <a:latin typeface="Trebuchet MS" pitchFamily="34" charset="0"/>
+                <a:ea typeface="Trebuchet MS" pitchFamily="34" charset="-122"/>
+                <a:cs typeface="Trebuchet MS" pitchFamily="34" charset="-120"/>
+              </a:rPr>
+              <a:t>mar</a:t>
+            </a:r>
+            <a:endParaRPr lang="en-US" sz="1400" dirty="0"/>
+          </a:p>
+        </p:txBody>
+      </p:sp>
+      <p:sp>
+        <p:nvSpPr>
+          <p:cNvPr id="33" name="Text 31"/>
+          <p:cNvSpPr/>
+          <p:nvPr/>
+        </p:nvSpPr>
+        <p:spPr>
+          <a:xfrm>
+            <a:off x="6784848" y="3364992"/>
+            <a:ext cx="73152" cy="475488"/>
+          </a:xfrm>
+          <a:prstGeom prst="rect">
+            <a:avLst/>
+          </a:prstGeom>
+          <a:noFill/>
+          <a:ln/>
+        </p:spPr>
+        <p:txBody>
+          <a:bodyPr wrap="square" lIns="0" tIns="0" rIns="0" bIns="0" rtlCol="0" anchor="ctr"/>
+          <a:lstStyle/>
+          <a:p>
+            <a:pPr algn="ctr" indent="0" marL="0">
+              <a:buNone/>
+            </a:pPr>
+            <a:r>
+              <a:rPr lang="en-US" sz="1600" b="1" dirty="0">
+                <a:solidFill>
+                  <a:srgbClr val="0D9488"/>
+                </a:solidFill>
+                <a:latin typeface="Trebuchet MS" pitchFamily="34" charset="0"/>
+                <a:ea typeface="Trebuchet MS" pitchFamily="34" charset="-122"/>
+                <a:cs typeface="Trebuchet MS" pitchFamily="34" charset="-120"/>
+              </a:rPr>
+              <a:t>·</a:t>
+            </a:r>
+            <a:endParaRPr lang="en-US" sz="1600" dirty="0"/>
+          </a:p>
+        </p:txBody>
+      </p:sp>
+      <p:sp>
+        <p:nvSpPr>
+          <p:cNvPr id="34" name="Shape 32"/>
+          <p:cNvSpPr/>
+          <p:nvPr/>
+        </p:nvSpPr>
+        <p:spPr>
+          <a:xfrm>
+            <a:off x="6858000" y="3364992"/>
+            <a:ext cx="1554480" cy="475488"/>
+          </a:xfrm>
+          <a:prstGeom prst="rect">
+            <a:avLst>
+              <a:gd name="adj" fmla="val 9615"/>
+            </a:avLst>
+          </a:prstGeom>
+          <a:solidFill>
+            <a:srgbClr val="FFFFFF"/>
+          </a:solidFill>
+          <a:ln w="12700">
+            <a:solidFill>
+              <a:srgbClr val="0D9488"/>
+            </a:solidFill>
+            <a:prstDash val="solid"/>
+          </a:ln>
+        </p:spPr>
+      </p:sp>
+      <p:sp>
+        <p:nvSpPr>
+          <p:cNvPr id="35" name="Text 33"/>
+          <p:cNvSpPr/>
+          <p:nvPr/>
+        </p:nvSpPr>
+        <p:spPr>
+          <a:xfrm>
+            <a:off x="6858000" y="3364992"/>
+            <a:ext cx="1554480" cy="475488"/>
+          </a:xfrm>
+          <a:prstGeom prst="rect">
+            <a:avLst/>
+          </a:prstGeom>
+          <a:noFill/>
+          <a:ln/>
+        </p:spPr>
+        <p:txBody>
+          <a:bodyPr wrap="square" lIns="0" tIns="0" rIns="0" bIns="0" rtlCol="0" anchor="ctr"/>
+          <a:lstStyle/>
+          <a:p>
+            <a:pPr algn="ctr" indent="0" marL="0">
+              <a:buNone/>
+            </a:pPr>
+            <a:r>
+              <a:rPr lang="en-US" sz="1400" b="1" dirty="0">
+                <a:solidFill>
+                  <a:srgbClr val="0D9488"/>
+                </a:solidFill>
+                <a:latin typeface="Trebuchet MS" pitchFamily="34" charset="0"/>
+                <a:ea typeface="Trebuchet MS" pitchFamily="34" charset="-122"/>
+                <a:cs typeface="Trebuchet MS" pitchFamily="34" charset="-120"/>
+              </a:rPr>
+              <a:t>ket</a:t>
+            </a:r>
+            <a:endParaRPr lang="en-US" sz="1400" dirty="0"/>
+          </a:p>
+        </p:txBody>
+      </p:sp>
+      <p:sp>
+        <p:nvSpPr>
+          <p:cNvPr id="36" name="Shape 34"/>
           <p:cNvSpPr/>
           <p:nvPr/>
         </p:nvSpPr>
@@ -14586,7 +15210,7 @@
       </p:sp>
       <p:sp>
         <p:nvSpPr>
-          <p:cNvPr id="31" name="Text 29"/>
+          <p:cNvPr id="37" name="Text 35"/>
           <p:cNvSpPr/>
           <p:nvPr/>
         </p:nvSpPr>
@@ -14625,7 +15249,7 @@
       </p:sp>
       <p:sp>
         <p:nvSpPr>
-          <p:cNvPr id="32" name="Shape 30"/>
+          <p:cNvPr id="38" name="Shape 36"/>
           <p:cNvSpPr/>
           <p:nvPr/>
         </p:nvSpPr>
@@ -14652,7 +15276,7 @@
       </p:sp>
       <p:sp>
         <p:nvSpPr>
-          <p:cNvPr id="33" name="Text 31"/>
+          <p:cNvPr id="39" name="Text 37"/>
           <p:cNvSpPr/>
           <p:nvPr/>
         </p:nvSpPr>
@@ -15379,7 +16003,7 @@
                 <a:ea typeface="Trebuchet MS" pitchFamily="34" charset="-122"/>
                 <a:cs typeface="Trebuchet MS" pitchFamily="34" charset="-120"/>
               </a:rPr>
-              <a:t>superb</a:t>
+              <a:t>supermarket</a:t>
             </a:r>
             <a:endParaRPr lang="en-US" sz="2800" dirty="0"/>
           </a:p>
@@ -15630,7 +16254,7 @@
                 <a:ea typeface="Trebuchet MS" pitchFamily="34" charset="-122"/>
                 <a:cs typeface="Trebuchet MS" pitchFamily="34" charset="-120"/>
               </a:rPr>
-              <a:t>b</a:t>
+              <a:t>market</a:t>
             </a:r>
             <a:endParaRPr lang="en-US" sz="1300" dirty="0"/>
           </a:p>
@@ -15669,7 +16293,7 @@
                 <a:ea typeface="Calibri" pitchFamily="34" charset="-122"/>
                 <a:cs typeface="Calibri" pitchFamily="34" charset="-120"/>
               </a:rPr>
-              <a:t>excellent (from Latin superbus)</a:t>
+              <a:t>a place to buy and sell goods</a:t>
             </a:r>
             <a:endParaRPr lang="en-US" sz="850" dirty="0"/>
           </a:p>
@@ -15776,8 +16400,8 @@
         </p:nvSpPr>
         <p:spPr>
           <a:xfrm>
-            <a:off x="2999232" y="3364992"/>
-            <a:ext cx="1645920" cy="475488"/>
+            <a:off x="1975104" y="3364992"/>
+            <a:ext cx="1554480" cy="475488"/>
           </a:xfrm>
           <a:prstGeom prst="rect">
             <a:avLst>
@@ -15803,8 +16427,8 @@
         </p:nvSpPr>
         <p:spPr>
           <a:xfrm>
-            <a:off x="2999232" y="3364992"/>
-            <a:ext cx="1645920" cy="475488"/>
+            <a:off x="1975104" y="3364992"/>
+            <a:ext cx="1554480" cy="475488"/>
           </a:xfrm>
           <a:prstGeom prst="rect">
             <a:avLst/>
@@ -15842,8 +16466,8 @@
         </p:nvSpPr>
         <p:spPr>
           <a:xfrm>
-            <a:off x="4645152" y="3364992"/>
-            <a:ext cx="1097280" cy="475488"/>
+            <a:off x="3529584" y="3364992"/>
+            <a:ext cx="73152" cy="475488"/>
           </a:xfrm>
           <a:prstGeom prst="rect">
             <a:avLst/>
@@ -15881,8 +16505,8 @@
         </p:nvSpPr>
         <p:spPr>
           <a:xfrm>
-            <a:off x="5742432" y="3364992"/>
-            <a:ext cx="1645920" cy="475488"/>
+            <a:off x="3602736" y="3364992"/>
+            <a:ext cx="1554480" cy="475488"/>
           </a:xfrm>
           <a:prstGeom prst="rect">
             <a:avLst>
@@ -15908,8 +16532,8 @@
         </p:nvSpPr>
         <p:spPr>
           <a:xfrm>
-            <a:off x="5742432" y="3364992"/>
-            <a:ext cx="1645920" cy="475488"/>
+            <a:off x="3602736" y="3364992"/>
+            <a:ext cx="1554480" cy="475488"/>
           </a:xfrm>
           <a:prstGeom prst="rect">
             <a:avLst/>
@@ -15933,7 +16557,7 @@
                 <a:ea typeface="Trebuchet MS" pitchFamily="34" charset="-122"/>
                 <a:cs typeface="Trebuchet MS" pitchFamily="34" charset="-120"/>
               </a:rPr>
-              <a:t>perb</a:t>
+              <a:t>per</a:t>
             </a:r>
             <a:endParaRPr lang="en-US" sz="1400" dirty="0"/>
           </a:p>
@@ -15941,7 +16565,217 @@
       </p:sp>
       <p:sp>
         <p:nvSpPr>
-          <p:cNvPr id="30" name="Shape 28"/>
+          <p:cNvPr id="30" name="Text 28"/>
+          <p:cNvSpPr/>
+          <p:nvPr/>
+        </p:nvSpPr>
+        <p:spPr>
+          <a:xfrm>
+            <a:off x="5157216" y="3364992"/>
+            <a:ext cx="73152" cy="475488"/>
+          </a:xfrm>
+          <a:prstGeom prst="rect">
+            <a:avLst/>
+          </a:prstGeom>
+          <a:noFill/>
+          <a:ln/>
+        </p:spPr>
+        <p:txBody>
+          <a:bodyPr wrap="square" lIns="0" tIns="0" rIns="0" bIns="0" rtlCol="0" anchor="ctr"/>
+          <a:lstStyle/>
+          <a:p>
+            <a:pPr algn="ctr" indent="0" marL="0">
+              <a:buNone/>
+            </a:pPr>
+            <a:r>
+              <a:rPr lang="en-US" sz="1600" b="1" dirty="0">
+                <a:solidFill>
+                  <a:srgbClr val="0D9488"/>
+                </a:solidFill>
+                <a:latin typeface="Trebuchet MS" pitchFamily="34" charset="0"/>
+                <a:ea typeface="Trebuchet MS" pitchFamily="34" charset="-122"/>
+                <a:cs typeface="Trebuchet MS" pitchFamily="34" charset="-120"/>
+              </a:rPr>
+              <a:t>·</a:t>
+            </a:r>
+            <a:endParaRPr lang="en-US" sz="1600" dirty="0"/>
+          </a:p>
+        </p:txBody>
+      </p:sp>
+      <p:sp>
+        <p:nvSpPr>
+          <p:cNvPr id="31" name="Shape 29"/>
+          <p:cNvSpPr/>
+          <p:nvPr/>
+        </p:nvSpPr>
+        <p:spPr>
+          <a:xfrm>
+            <a:off x="5230368" y="3364992"/>
+            <a:ext cx="1554480" cy="475488"/>
+          </a:xfrm>
+          <a:prstGeom prst="rect">
+            <a:avLst>
+              <a:gd name="adj" fmla="val 9615"/>
+            </a:avLst>
+          </a:prstGeom>
+          <a:solidFill>
+            <a:srgbClr val="FFFFFF"/>
+          </a:solidFill>
+          <a:ln w="12700">
+            <a:solidFill>
+              <a:srgbClr val="0D9488"/>
+            </a:solidFill>
+            <a:prstDash val="solid"/>
+          </a:ln>
+        </p:spPr>
+      </p:sp>
+      <p:sp>
+        <p:nvSpPr>
+          <p:cNvPr id="32" name="Text 30"/>
+          <p:cNvSpPr/>
+          <p:nvPr/>
+        </p:nvSpPr>
+        <p:spPr>
+          <a:xfrm>
+            <a:off x="5230368" y="3364992"/>
+            <a:ext cx="1554480" cy="475488"/>
+          </a:xfrm>
+          <a:prstGeom prst="rect">
+            <a:avLst/>
+          </a:prstGeom>
+          <a:noFill/>
+          <a:ln/>
+        </p:spPr>
+        <p:txBody>
+          <a:bodyPr wrap="square" lIns="0" tIns="0" rIns="0" bIns="0" rtlCol="0" anchor="ctr"/>
+          <a:lstStyle/>
+          <a:p>
+            <a:pPr algn="ctr" indent="0" marL="0">
+              <a:buNone/>
+            </a:pPr>
+            <a:r>
+              <a:rPr lang="en-US" sz="1400" b="1" dirty="0">
+                <a:solidFill>
+                  <a:srgbClr val="0D9488"/>
+                </a:solidFill>
+                <a:latin typeface="Trebuchet MS" pitchFamily="34" charset="0"/>
+                <a:ea typeface="Trebuchet MS" pitchFamily="34" charset="-122"/>
+                <a:cs typeface="Trebuchet MS" pitchFamily="34" charset="-120"/>
+              </a:rPr>
+              <a:t>mar</a:t>
+            </a:r>
+            <a:endParaRPr lang="en-US" sz="1400" dirty="0"/>
+          </a:p>
+        </p:txBody>
+      </p:sp>
+      <p:sp>
+        <p:nvSpPr>
+          <p:cNvPr id="33" name="Text 31"/>
+          <p:cNvSpPr/>
+          <p:nvPr/>
+        </p:nvSpPr>
+        <p:spPr>
+          <a:xfrm>
+            <a:off x="6784848" y="3364992"/>
+            <a:ext cx="73152" cy="475488"/>
+          </a:xfrm>
+          <a:prstGeom prst="rect">
+            <a:avLst/>
+          </a:prstGeom>
+          <a:noFill/>
+          <a:ln/>
+        </p:spPr>
+        <p:txBody>
+          <a:bodyPr wrap="square" lIns="0" tIns="0" rIns="0" bIns="0" rtlCol="0" anchor="ctr"/>
+          <a:lstStyle/>
+          <a:p>
+            <a:pPr algn="ctr" indent="0" marL="0">
+              <a:buNone/>
+            </a:pPr>
+            <a:r>
+              <a:rPr lang="en-US" sz="1600" b="1" dirty="0">
+                <a:solidFill>
+                  <a:srgbClr val="0D9488"/>
+                </a:solidFill>
+                <a:latin typeface="Trebuchet MS" pitchFamily="34" charset="0"/>
+                <a:ea typeface="Trebuchet MS" pitchFamily="34" charset="-122"/>
+                <a:cs typeface="Trebuchet MS" pitchFamily="34" charset="-120"/>
+              </a:rPr>
+              <a:t>·</a:t>
+            </a:r>
+            <a:endParaRPr lang="en-US" sz="1600" dirty="0"/>
+          </a:p>
+        </p:txBody>
+      </p:sp>
+      <p:sp>
+        <p:nvSpPr>
+          <p:cNvPr id="34" name="Shape 32"/>
+          <p:cNvSpPr/>
+          <p:nvPr/>
+        </p:nvSpPr>
+        <p:spPr>
+          <a:xfrm>
+            <a:off x="6858000" y="3364992"/>
+            <a:ext cx="1554480" cy="475488"/>
+          </a:xfrm>
+          <a:prstGeom prst="rect">
+            <a:avLst>
+              <a:gd name="adj" fmla="val 9615"/>
+            </a:avLst>
+          </a:prstGeom>
+          <a:solidFill>
+            <a:srgbClr val="FFFFFF"/>
+          </a:solidFill>
+          <a:ln w="12700">
+            <a:solidFill>
+              <a:srgbClr val="0D9488"/>
+            </a:solidFill>
+            <a:prstDash val="solid"/>
+          </a:ln>
+        </p:spPr>
+      </p:sp>
+      <p:sp>
+        <p:nvSpPr>
+          <p:cNvPr id="35" name="Text 33"/>
+          <p:cNvSpPr/>
+          <p:nvPr/>
+        </p:nvSpPr>
+        <p:spPr>
+          <a:xfrm>
+            <a:off x="6858000" y="3364992"/>
+            <a:ext cx="1554480" cy="475488"/>
+          </a:xfrm>
+          <a:prstGeom prst="rect">
+            <a:avLst/>
+          </a:prstGeom>
+          <a:noFill/>
+          <a:ln/>
+        </p:spPr>
+        <p:txBody>
+          <a:bodyPr wrap="square" lIns="0" tIns="0" rIns="0" bIns="0" rtlCol="0" anchor="ctr"/>
+          <a:lstStyle/>
+          <a:p>
+            <a:pPr algn="ctr" indent="0" marL="0">
+              <a:buNone/>
+            </a:pPr>
+            <a:r>
+              <a:rPr lang="en-US" sz="1400" b="1" dirty="0">
+                <a:solidFill>
+                  <a:srgbClr val="0D9488"/>
+                </a:solidFill>
+                <a:latin typeface="Trebuchet MS" pitchFamily="34" charset="0"/>
+                <a:ea typeface="Trebuchet MS" pitchFamily="34" charset="-122"/>
+                <a:cs typeface="Trebuchet MS" pitchFamily="34" charset="-120"/>
+              </a:rPr>
+              <a:t>ket</a:t>
+            </a:r>
+            <a:endParaRPr lang="en-US" sz="1400" dirty="0"/>
+          </a:p>
+        </p:txBody>
+      </p:sp>
+      <p:sp>
+        <p:nvSpPr>
+          <p:cNvPr id="36" name="Shape 34"/>
           <p:cNvSpPr/>
           <p:nvPr/>
         </p:nvSpPr>
@@ -15968,7 +16802,7 @@
       </p:sp>
       <p:sp>
         <p:nvSpPr>
-          <p:cNvPr id="31" name="Text 29"/>
+          <p:cNvPr id="37" name="Text 35"/>
           <p:cNvSpPr/>
           <p:nvPr/>
         </p:nvSpPr>
@@ -16007,7 +16841,7 @@
       </p:sp>
       <p:sp>
         <p:nvSpPr>
-          <p:cNvPr id="32" name="Shape 30"/>
+          <p:cNvPr id="38" name="Shape 36"/>
           <p:cNvSpPr/>
           <p:nvPr/>
         </p:nvSpPr>
@@ -16034,14 +16868,14 @@
       </p:sp>
       <p:sp>
         <p:nvSpPr>
-          <p:cNvPr id="33" name="Shape 31"/>
-          <p:cNvSpPr/>
-          <p:nvPr/>
-        </p:nvSpPr>
-        <p:spPr>
-          <a:xfrm>
-            <a:off x="2427732" y="4169664"/>
-            <a:ext cx="685800" cy="475488"/>
+          <p:cNvPr id="39" name="Shape 37"/>
+          <p:cNvSpPr/>
+          <p:nvPr/>
+        </p:nvSpPr>
+        <p:spPr>
+          <a:xfrm>
+            <a:off x="1951330" y="4169664"/>
+            <a:ext cx="676656" cy="475488"/>
           </a:xfrm>
           <a:prstGeom prst="rect">
             <a:avLst>
@@ -16061,14 +16895,14 @@
       </p:sp>
       <p:sp>
         <p:nvSpPr>
-          <p:cNvPr id="34" name="Text 32"/>
-          <p:cNvSpPr/>
-          <p:nvPr/>
-        </p:nvSpPr>
-        <p:spPr>
-          <a:xfrm>
-            <a:off x="2427732" y="4169664"/>
-            <a:ext cx="685800" cy="475488"/>
+          <p:cNvPr id="40" name="Text 38"/>
+          <p:cNvSpPr/>
+          <p:nvPr/>
+        </p:nvSpPr>
+        <p:spPr>
+          <a:xfrm>
+            <a:off x="1951330" y="4169664"/>
+            <a:ext cx="676656" cy="475488"/>
           </a:xfrm>
           <a:prstGeom prst="rect">
             <a:avLst/>
@@ -16100,14 +16934,14 @@
       </p:sp>
       <p:sp>
         <p:nvSpPr>
-          <p:cNvPr id="35" name="Shape 33"/>
-          <p:cNvSpPr/>
-          <p:nvPr/>
-        </p:nvSpPr>
-        <p:spPr>
-          <a:xfrm>
-            <a:off x="3639312" y="4169664"/>
-            <a:ext cx="685800" cy="475488"/>
+          <p:cNvPr id="41" name="Shape 39"/>
+          <p:cNvSpPr/>
+          <p:nvPr/>
+        </p:nvSpPr>
+        <p:spPr>
+          <a:xfrm>
+            <a:off x="2677363" y="4169664"/>
+            <a:ext cx="676656" cy="475488"/>
           </a:xfrm>
           <a:prstGeom prst="rect">
             <a:avLst>
@@ -16127,14 +16961,14 @@
       </p:sp>
       <p:sp>
         <p:nvSpPr>
-          <p:cNvPr id="36" name="Text 34"/>
-          <p:cNvSpPr/>
-          <p:nvPr/>
-        </p:nvSpPr>
-        <p:spPr>
-          <a:xfrm>
-            <a:off x="3639312" y="4169664"/>
-            <a:ext cx="685800" cy="475488"/>
+          <p:cNvPr id="42" name="Text 40"/>
+          <p:cNvSpPr/>
+          <p:nvPr/>
+        </p:nvSpPr>
+        <p:spPr>
+          <a:xfrm>
+            <a:off x="2677363" y="4169664"/>
+            <a:ext cx="676656" cy="475488"/>
           </a:xfrm>
           <a:prstGeom prst="rect">
             <a:avLst/>
@@ -16166,14 +17000,14 @@
       </p:sp>
       <p:sp>
         <p:nvSpPr>
-          <p:cNvPr id="37" name="Shape 35"/>
-          <p:cNvSpPr/>
-          <p:nvPr/>
-        </p:nvSpPr>
-        <p:spPr>
-          <a:xfrm>
-            <a:off x="4850892" y="4169664"/>
-            <a:ext cx="685800" cy="475488"/>
+          <p:cNvPr id="43" name="Shape 41"/>
+          <p:cNvSpPr/>
+          <p:nvPr/>
+        </p:nvSpPr>
+        <p:spPr>
+          <a:xfrm>
+            <a:off x="3403397" y="4169664"/>
+            <a:ext cx="676656" cy="475488"/>
           </a:xfrm>
           <a:prstGeom prst="rect">
             <a:avLst>
@@ -16193,14 +17027,14 @@
       </p:sp>
       <p:sp>
         <p:nvSpPr>
-          <p:cNvPr id="38" name="Text 36"/>
-          <p:cNvSpPr/>
-          <p:nvPr/>
-        </p:nvSpPr>
-        <p:spPr>
-          <a:xfrm>
-            <a:off x="4850892" y="4169664"/>
-            <a:ext cx="685800" cy="475488"/>
+          <p:cNvPr id="44" name="Text 42"/>
+          <p:cNvSpPr/>
+          <p:nvPr/>
+        </p:nvSpPr>
+        <p:spPr>
+          <a:xfrm>
+            <a:off x="3403397" y="4169664"/>
+            <a:ext cx="676656" cy="475488"/>
           </a:xfrm>
           <a:prstGeom prst="rect">
             <a:avLst/>
@@ -16232,14 +17066,14 @@
       </p:sp>
       <p:sp>
         <p:nvSpPr>
-          <p:cNvPr id="39" name="Shape 37"/>
-          <p:cNvSpPr/>
-          <p:nvPr/>
-        </p:nvSpPr>
-        <p:spPr>
-          <a:xfrm>
-            <a:off x="6062472" y="4169664"/>
-            <a:ext cx="685800" cy="475488"/>
+          <p:cNvPr id="45" name="Shape 43"/>
+          <p:cNvSpPr/>
+          <p:nvPr/>
+        </p:nvSpPr>
+        <p:spPr>
+          <a:xfrm>
+            <a:off x="4129430" y="4169664"/>
+            <a:ext cx="676656" cy="475488"/>
           </a:xfrm>
           <a:prstGeom prst="rect">
             <a:avLst>
@@ -16259,14 +17093,14 @@
       </p:sp>
       <p:sp>
         <p:nvSpPr>
-          <p:cNvPr id="40" name="Text 38"/>
-          <p:cNvSpPr/>
-          <p:nvPr/>
-        </p:nvSpPr>
-        <p:spPr>
-          <a:xfrm>
-            <a:off x="6062472" y="4169664"/>
-            <a:ext cx="685800" cy="475488"/>
+          <p:cNvPr id="46" name="Text 44"/>
+          <p:cNvSpPr/>
+          <p:nvPr/>
+        </p:nvSpPr>
+        <p:spPr>
+          <a:xfrm>
+            <a:off x="4129430" y="4169664"/>
+            <a:ext cx="676656" cy="475488"/>
           </a:xfrm>
           <a:prstGeom prst="rect">
             <a:avLst/>
@@ -16298,14 +17132,14 @@
       </p:sp>
       <p:sp>
         <p:nvSpPr>
-          <p:cNvPr id="41" name="Shape 39"/>
-          <p:cNvSpPr/>
-          <p:nvPr/>
-        </p:nvSpPr>
-        <p:spPr>
-          <a:xfrm>
-            <a:off x="7274052" y="4169664"/>
-            <a:ext cx="685800" cy="475488"/>
+          <p:cNvPr id="47" name="Shape 45"/>
+          <p:cNvSpPr/>
+          <p:nvPr/>
+        </p:nvSpPr>
+        <p:spPr>
+          <a:xfrm>
+            <a:off x="4855464" y="4169664"/>
+            <a:ext cx="676656" cy="475488"/>
           </a:xfrm>
           <a:prstGeom prst="rect">
             <a:avLst>
@@ -16325,14 +17159,14 @@
       </p:sp>
       <p:sp>
         <p:nvSpPr>
-          <p:cNvPr id="42" name="Text 40"/>
-          <p:cNvSpPr/>
-          <p:nvPr/>
-        </p:nvSpPr>
-        <p:spPr>
-          <a:xfrm>
-            <a:off x="7274052" y="4169664"/>
-            <a:ext cx="685800" cy="475488"/>
+          <p:cNvPr id="48" name="Text 46"/>
+          <p:cNvSpPr/>
+          <p:nvPr/>
+        </p:nvSpPr>
+        <p:spPr>
+          <a:xfrm>
+            <a:off x="4855464" y="4169664"/>
+            <a:ext cx="676656" cy="475488"/>
           </a:xfrm>
           <a:prstGeom prst="rect">
             <a:avLst/>
@@ -16356,7 +17190,271 @@
                 <a:ea typeface="Trebuchet MS" pitchFamily="34" charset="-122"/>
                 <a:cs typeface="Trebuchet MS" pitchFamily="34" charset="-120"/>
               </a:rPr>
-              <a:t>b</a:t>
+              <a:t>m</a:t>
+            </a:r>
+            <a:endParaRPr lang="en-US" sz="900" dirty="0"/>
+          </a:p>
+        </p:txBody>
+      </p:sp>
+      <p:sp>
+        <p:nvSpPr>
+          <p:cNvPr id="49" name="Shape 47"/>
+          <p:cNvSpPr/>
+          <p:nvPr/>
+        </p:nvSpPr>
+        <p:spPr>
+          <a:xfrm>
+            <a:off x="5581498" y="4169664"/>
+            <a:ext cx="676656" cy="475488"/>
+          </a:xfrm>
+          <a:prstGeom prst="rect">
+            <a:avLst>
+              <a:gd name="adj" fmla="val 7692"/>
+            </a:avLst>
+          </a:prstGeom>
+          <a:solidFill>
+            <a:srgbClr val="FFFFFF"/>
+          </a:solidFill>
+          <a:ln w="12700">
+            <a:solidFill>
+              <a:srgbClr val="DB2777"/>
+            </a:solidFill>
+            <a:prstDash val="solid"/>
+          </a:ln>
+        </p:spPr>
+      </p:sp>
+      <p:sp>
+        <p:nvSpPr>
+          <p:cNvPr id="50" name="Text 48"/>
+          <p:cNvSpPr/>
+          <p:nvPr/>
+        </p:nvSpPr>
+        <p:spPr>
+          <a:xfrm>
+            <a:off x="5581498" y="4169664"/>
+            <a:ext cx="676656" cy="475488"/>
+          </a:xfrm>
+          <a:prstGeom prst="rect">
+            <a:avLst/>
+          </a:prstGeom>
+          <a:noFill/>
+          <a:ln/>
+        </p:spPr>
+        <p:txBody>
+          <a:bodyPr wrap="square" lIns="0" tIns="0" rIns="0" bIns="0" rtlCol="0" anchor="ctr"/>
+          <a:lstStyle/>
+          <a:p>
+            <a:pPr algn="ctr" indent="0" marL="0">
+              <a:buNone/>
+            </a:pPr>
+            <a:r>
+              <a:rPr lang="en-US" sz="900" b="1" dirty="0">
+                <a:solidFill>
+                  <a:srgbClr val="9D174D"/>
+                </a:solidFill>
+                <a:latin typeface="Trebuchet MS" pitchFamily="34" charset="0"/>
+                <a:ea typeface="Trebuchet MS" pitchFamily="34" charset="-122"/>
+                <a:cs typeface="Trebuchet MS" pitchFamily="34" charset="-120"/>
+              </a:rPr>
+              <a:t>ar</a:t>
+            </a:r>
+            <a:endParaRPr lang="en-US" sz="900" dirty="0"/>
+          </a:p>
+        </p:txBody>
+      </p:sp>
+      <p:sp>
+        <p:nvSpPr>
+          <p:cNvPr id="51" name="Shape 49"/>
+          <p:cNvSpPr/>
+          <p:nvPr/>
+        </p:nvSpPr>
+        <p:spPr>
+          <a:xfrm>
+            <a:off x="6307531" y="4169664"/>
+            <a:ext cx="676656" cy="475488"/>
+          </a:xfrm>
+          <a:prstGeom prst="rect">
+            <a:avLst>
+              <a:gd name="adj" fmla="val 7692"/>
+            </a:avLst>
+          </a:prstGeom>
+          <a:solidFill>
+            <a:srgbClr val="FFFFFF"/>
+          </a:solidFill>
+          <a:ln w="12700">
+            <a:solidFill>
+              <a:srgbClr val="DB2777"/>
+            </a:solidFill>
+            <a:prstDash val="solid"/>
+          </a:ln>
+        </p:spPr>
+      </p:sp>
+      <p:sp>
+        <p:nvSpPr>
+          <p:cNvPr id="52" name="Text 50"/>
+          <p:cNvSpPr/>
+          <p:nvPr/>
+        </p:nvSpPr>
+        <p:spPr>
+          <a:xfrm>
+            <a:off x="6307531" y="4169664"/>
+            <a:ext cx="676656" cy="475488"/>
+          </a:xfrm>
+          <a:prstGeom prst="rect">
+            <a:avLst/>
+          </a:prstGeom>
+          <a:noFill/>
+          <a:ln/>
+        </p:spPr>
+        <p:txBody>
+          <a:bodyPr wrap="square" lIns="0" tIns="0" rIns="0" bIns="0" rtlCol="0" anchor="ctr"/>
+          <a:lstStyle/>
+          <a:p>
+            <a:pPr algn="ctr" indent="0" marL="0">
+              <a:buNone/>
+            </a:pPr>
+            <a:r>
+              <a:rPr lang="en-US" sz="900" b="1" dirty="0">
+                <a:solidFill>
+                  <a:srgbClr val="9D174D"/>
+                </a:solidFill>
+                <a:latin typeface="Trebuchet MS" pitchFamily="34" charset="0"/>
+                <a:ea typeface="Trebuchet MS" pitchFamily="34" charset="-122"/>
+                <a:cs typeface="Trebuchet MS" pitchFamily="34" charset="-120"/>
+              </a:rPr>
+              <a:t>k</a:t>
+            </a:r>
+            <a:endParaRPr lang="en-US" sz="900" dirty="0"/>
+          </a:p>
+        </p:txBody>
+      </p:sp>
+      <p:sp>
+        <p:nvSpPr>
+          <p:cNvPr id="53" name="Shape 51"/>
+          <p:cNvSpPr/>
+          <p:nvPr/>
+        </p:nvSpPr>
+        <p:spPr>
+          <a:xfrm>
+            <a:off x="7033565" y="4169664"/>
+            <a:ext cx="676656" cy="475488"/>
+          </a:xfrm>
+          <a:prstGeom prst="rect">
+            <a:avLst>
+              <a:gd name="adj" fmla="val 7692"/>
+            </a:avLst>
+          </a:prstGeom>
+          <a:solidFill>
+            <a:srgbClr val="FFFFFF"/>
+          </a:solidFill>
+          <a:ln w="12700">
+            <a:solidFill>
+              <a:srgbClr val="DB2777"/>
+            </a:solidFill>
+            <a:prstDash val="solid"/>
+          </a:ln>
+        </p:spPr>
+      </p:sp>
+      <p:sp>
+        <p:nvSpPr>
+          <p:cNvPr id="54" name="Text 52"/>
+          <p:cNvSpPr/>
+          <p:nvPr/>
+        </p:nvSpPr>
+        <p:spPr>
+          <a:xfrm>
+            <a:off x="7033565" y="4169664"/>
+            <a:ext cx="676656" cy="475488"/>
+          </a:xfrm>
+          <a:prstGeom prst="rect">
+            <a:avLst/>
+          </a:prstGeom>
+          <a:noFill/>
+          <a:ln/>
+        </p:spPr>
+        <p:txBody>
+          <a:bodyPr wrap="square" lIns="0" tIns="0" rIns="0" bIns="0" rtlCol="0" anchor="ctr"/>
+          <a:lstStyle/>
+          <a:p>
+            <a:pPr algn="ctr" indent="0" marL="0">
+              <a:buNone/>
+            </a:pPr>
+            <a:r>
+              <a:rPr lang="en-US" sz="900" b="1" dirty="0">
+                <a:solidFill>
+                  <a:srgbClr val="9D174D"/>
+                </a:solidFill>
+                <a:latin typeface="Trebuchet MS" pitchFamily="34" charset="0"/>
+                <a:ea typeface="Trebuchet MS" pitchFamily="34" charset="-122"/>
+                <a:cs typeface="Trebuchet MS" pitchFamily="34" charset="-120"/>
+              </a:rPr>
+              <a:t>e</a:t>
+            </a:r>
+            <a:endParaRPr lang="en-US" sz="900" dirty="0"/>
+          </a:p>
+        </p:txBody>
+      </p:sp>
+      <p:sp>
+        <p:nvSpPr>
+          <p:cNvPr id="55" name="Shape 53"/>
+          <p:cNvSpPr/>
+          <p:nvPr/>
+        </p:nvSpPr>
+        <p:spPr>
+          <a:xfrm>
+            <a:off x="7759598" y="4169664"/>
+            <a:ext cx="676656" cy="475488"/>
+          </a:xfrm>
+          <a:prstGeom prst="rect">
+            <a:avLst>
+              <a:gd name="adj" fmla="val 7692"/>
+            </a:avLst>
+          </a:prstGeom>
+          <a:solidFill>
+            <a:srgbClr val="FFFFFF"/>
+          </a:solidFill>
+          <a:ln w="12700">
+            <a:solidFill>
+              <a:srgbClr val="DB2777"/>
+            </a:solidFill>
+            <a:prstDash val="solid"/>
+          </a:ln>
+        </p:spPr>
+      </p:sp>
+      <p:sp>
+        <p:nvSpPr>
+          <p:cNvPr id="56" name="Text 54"/>
+          <p:cNvSpPr/>
+          <p:nvPr/>
+        </p:nvSpPr>
+        <p:spPr>
+          <a:xfrm>
+            <a:off x="7759598" y="4169664"/>
+            <a:ext cx="676656" cy="475488"/>
+          </a:xfrm>
+          <a:prstGeom prst="rect">
+            <a:avLst/>
+          </a:prstGeom>
+          <a:noFill/>
+          <a:ln/>
+        </p:spPr>
+        <p:txBody>
+          <a:bodyPr wrap="square" lIns="0" tIns="0" rIns="0" bIns="0" rtlCol="0" anchor="ctr"/>
+          <a:lstStyle/>
+          <a:p>
+            <a:pPr algn="ctr" indent="0" marL="0">
+              <a:buNone/>
+            </a:pPr>
+            <a:r>
+              <a:rPr lang="en-US" sz="900" b="1" dirty="0">
+                <a:solidFill>
+                  <a:srgbClr val="9D174D"/>
+                </a:solidFill>
+                <a:latin typeface="Trebuchet MS" pitchFamily="34" charset="0"/>
+                <a:ea typeface="Trebuchet MS" pitchFamily="34" charset="-122"/>
+                <a:cs typeface="Trebuchet MS" pitchFamily="34" charset="-120"/>
+              </a:rPr>
+              <a:t>t</a:t>
             </a:r>
             <a:endParaRPr lang="en-US" sz="900" dirty="0"/>
           </a:p>
@@ -17713,7 +18811,7 @@
                 <a:ea typeface="Calibri" pitchFamily="34" charset="-122"/>
                 <a:cs typeface="Calibri" pitchFamily="34" charset="-120"/>
               </a:rPr>
-              <a:t> story about a </a:t>
+              <a:t> film was about a </a:t>
             </a:r>
             <a:pPr algn="l" indent="0" marL="0">
               <a:buNone/>
@@ -17730,7 +18828,7 @@
                 <a:ea typeface="Calibri" pitchFamily="34" charset="-122"/>
                 <a:cs typeface="Calibri" pitchFamily="34" charset="-120"/>
               </a:rPr>
-              <a:t>superhero</a:t>
+              <a:t>superstar</a:t>
             </a:r>
             <a:pPr algn="l" indent="0" marL="0">
               <a:buNone/>
@@ -17744,7 +18842,7 @@
                 <a:ea typeface="Calibri" pitchFamily="34" charset="-122"/>
                 <a:cs typeface="Calibri" pitchFamily="34" charset="-120"/>
               </a:rPr>
-              <a:t> with </a:t>
+              <a:t> athlete who gained a </a:t>
             </a:r>
             <a:pPr algn="l" indent="0" marL="0">
               <a:buNone/>
@@ -17761,7 +18859,7 @@
                 <a:ea typeface="Calibri" pitchFamily="34" charset="-122"/>
                 <a:cs typeface="Calibri" pitchFamily="34" charset="-120"/>
               </a:rPr>
-              <a:t>supersonic</a:t>
+              <a:t>superpower</a:t>
             </a:r>
             <a:pPr algn="l" indent="0" marL="0">
               <a:buNone/>
@@ -17775,7 +18873,7 @@
                 <a:ea typeface="Calibri" pitchFamily="34" charset="-122"/>
                 <a:cs typeface="Calibri" pitchFamily="34" charset="-120"/>
               </a:rPr>
-              <a:t> speed was incredibly exciting!</a:t>
+              <a:t> after a lightning strike.</a:t>
             </a:r>
             <a:endParaRPr lang="en-US" sz="1800" dirty="0"/>
           </a:p>
@@ -18058,7 +19156,7 @@
                 <a:ea typeface="Trebuchet MS" pitchFamily="34" charset="-122"/>
                 <a:cs typeface="Trebuchet MS" pitchFamily="34" charset="-120"/>
               </a:rPr>
-              <a:t>superhero</a:t>
+              <a:t>superstar</a:t>
             </a:r>
             <a:endParaRPr lang="en-US" sz="1400" dirty="0"/>
           </a:p>
@@ -18186,7 +19284,7 @@
                 <a:ea typeface="Trebuchet MS" pitchFamily="34" charset="-122"/>
                 <a:cs typeface="Trebuchet MS" pitchFamily="34" charset="-120"/>
               </a:rPr>
-              <a:t>supersonic</a:t>
+              <a:t>superpower</a:t>
             </a:r>
             <a:endParaRPr lang="en-US" sz="1400" dirty="0"/>
           </a:p>
@@ -24289,7 +25387,7 @@
                 <a:ea typeface="Trebuchet MS" pitchFamily="34" charset="-122"/>
                 <a:cs typeface="Trebuchet MS" pitchFamily="34" charset="-120"/>
               </a:rPr>
-              <a:t>superhero</a:t>
+              <a:t>superstar</a:t>
             </a:r>
             <a:endParaRPr lang="en-US" sz="2800" dirty="0"/>
           </a:p>
@@ -25116,7 +26214,7 @@
                 <a:ea typeface="Trebuchet MS" pitchFamily="34" charset="-122"/>
                 <a:cs typeface="Trebuchet MS" pitchFamily="34" charset="-120"/>
               </a:rPr>
-              <a:t>superhero</a:t>
+              <a:t>superstar</a:t>
             </a:r>
             <a:endParaRPr lang="en-US" sz="2800" dirty="0"/>
           </a:p>
@@ -25367,7 +26465,7 @@
                 <a:ea typeface="Trebuchet MS" pitchFamily="34" charset="-122"/>
                 <a:cs typeface="Trebuchet MS" pitchFamily="34" charset="-120"/>
               </a:rPr>
-              <a:t>hero</a:t>
+              <a:t>star</a:t>
             </a:r>
             <a:endParaRPr lang="en-US" sz="1300" dirty="0"/>
           </a:p>
@@ -25406,7 +26504,7 @@
                 <a:ea typeface="Calibri" pitchFamily="34" charset="-122"/>
                 <a:cs typeface="Calibri" pitchFamily="34" charset="-120"/>
               </a:rPr>
-              <a:t>a brave, powerful person</a:t>
+              <a:t>a shining star; a brilliant person</a:t>
             </a:r>
             <a:endParaRPr lang="en-US" sz="850" dirty="0"/>
           </a:p>
@@ -26820,7 +27918,7 @@
                 <a:ea typeface="Trebuchet MS" pitchFamily="34" charset="-122"/>
                 <a:cs typeface="Trebuchet MS" pitchFamily="34" charset="-120"/>
               </a:rPr>
-              <a:t>superhero</a:t>
+              <a:t>superstar</a:t>
             </a:r>
             <a:endParaRPr lang="en-US" sz="2800" dirty="0"/>
           </a:p>
@@ -27071,7 +28169,7 @@
                 <a:ea typeface="Trebuchet MS" pitchFamily="34" charset="-122"/>
                 <a:cs typeface="Trebuchet MS" pitchFamily="34" charset="-120"/>
               </a:rPr>
-              <a:t>hero</a:t>
+              <a:t>star</a:t>
             </a:r>
             <a:endParaRPr lang="en-US" sz="1300" dirty="0"/>
           </a:p>
@@ -27110,7 +28208,7 @@
                 <a:ea typeface="Calibri" pitchFamily="34" charset="-122"/>
                 <a:cs typeface="Calibri" pitchFamily="34" charset="-120"/>
               </a:rPr>
-              <a:t>a brave, powerful person</a:t>
+              <a:t>a shining star; a brilliant person</a:t>
             </a:r>
             <a:endParaRPr lang="en-US" sz="850" dirty="0"/>
           </a:p>
@@ -27217,8 +28315,8 @@
         </p:nvSpPr>
         <p:spPr>
           <a:xfrm>
-            <a:off x="1975104" y="3364992"/>
-            <a:ext cx="1554480" cy="475488"/>
+            <a:off x="2313432" y="3364992"/>
+            <a:ext cx="1645920" cy="475488"/>
           </a:xfrm>
           <a:prstGeom prst="rect">
             <a:avLst>
@@ -27244,8 +28342,8 @@
         </p:nvSpPr>
         <p:spPr>
           <a:xfrm>
-            <a:off x="1975104" y="3364992"/>
-            <a:ext cx="1554480" cy="475488"/>
+            <a:off x="2313432" y="3364992"/>
+            <a:ext cx="1645920" cy="475488"/>
           </a:xfrm>
           <a:prstGeom prst="rect">
             <a:avLst/>
@@ -27283,8 +28381,8 @@
         </p:nvSpPr>
         <p:spPr>
           <a:xfrm>
-            <a:off x="3529584" y="3364992"/>
-            <a:ext cx="73152" cy="475488"/>
+            <a:off x="3959352" y="3364992"/>
+            <a:ext cx="411480" cy="475488"/>
           </a:xfrm>
           <a:prstGeom prst="rect">
             <a:avLst/>
@@ -27322,8 +28420,8 @@
         </p:nvSpPr>
         <p:spPr>
           <a:xfrm>
-            <a:off x="3602736" y="3364992"/>
-            <a:ext cx="1554480" cy="475488"/>
+            <a:off x="4370832" y="3364992"/>
+            <a:ext cx="1645920" cy="475488"/>
           </a:xfrm>
           <a:prstGeom prst="rect">
             <a:avLst>
@@ -27349,8 +28447,8 @@
         </p:nvSpPr>
         <p:spPr>
           <a:xfrm>
-            <a:off x="3602736" y="3364992"/>
-            <a:ext cx="1554480" cy="475488"/>
+            <a:off x="4370832" y="3364992"/>
+            <a:ext cx="1645920" cy="475488"/>
           </a:xfrm>
           <a:prstGeom prst="rect">
             <a:avLst/>
@@ -27388,8 +28486,8 @@
         </p:nvSpPr>
         <p:spPr>
           <a:xfrm>
-            <a:off x="5157216" y="3364992"/>
-            <a:ext cx="73152" cy="475488"/>
+            <a:off x="6016752" y="3364992"/>
+            <a:ext cx="411480" cy="475488"/>
           </a:xfrm>
           <a:prstGeom prst="rect">
             <a:avLst/>
@@ -27427,8 +28525,8 @@
         </p:nvSpPr>
         <p:spPr>
           <a:xfrm>
-            <a:off x="5230368" y="3364992"/>
-            <a:ext cx="1554480" cy="475488"/>
+            <a:off x="6428232" y="3364992"/>
+            <a:ext cx="1645920" cy="475488"/>
           </a:xfrm>
           <a:prstGeom prst="rect">
             <a:avLst>
@@ -27454,8 +28552,8 @@
         </p:nvSpPr>
         <p:spPr>
           <a:xfrm>
-            <a:off x="5230368" y="3364992"/>
-            <a:ext cx="1554480" cy="475488"/>
+            <a:off x="6428232" y="3364992"/>
+            <a:ext cx="1645920" cy="475488"/>
           </a:xfrm>
           <a:prstGeom prst="rect">
             <a:avLst/>
@@ -27479,7 +28577,7 @@
                 <a:ea typeface="Trebuchet MS" pitchFamily="34" charset="-122"/>
                 <a:cs typeface="Trebuchet MS" pitchFamily="34" charset="-120"/>
               </a:rPr>
-              <a:t>he</a:t>
+              <a:t>star</a:t>
             </a:r>
             <a:endParaRPr lang="en-US" sz="1400" dirty="0"/>
           </a:p>
@@ -27487,119 +28585,80 @@
       </p:sp>
       <p:sp>
         <p:nvSpPr>
-          <p:cNvPr id="33" name="Text 31"/>
-          <p:cNvSpPr/>
-          <p:nvPr/>
-        </p:nvSpPr>
-        <p:spPr>
-          <a:xfrm>
-            <a:off x="6784848" y="3364992"/>
-            <a:ext cx="73152" cy="475488"/>
-          </a:xfrm>
-          <a:prstGeom prst="rect">
-            <a:avLst/>
-          </a:prstGeom>
-          <a:noFill/>
-          <a:ln/>
-        </p:spPr>
-        <p:txBody>
-          <a:bodyPr wrap="square" lIns="0" tIns="0" rIns="0" bIns="0" rtlCol="0" anchor="ctr"/>
-          <a:lstStyle/>
-          <a:p>
-            <a:pPr algn="ctr" indent="0" marL="0">
-              <a:buNone/>
-            </a:pPr>
-            <a:r>
-              <a:rPr lang="en-US" sz="1600" b="1" dirty="0">
-                <a:solidFill>
-                  <a:srgbClr val="0D9488"/>
+          <p:cNvPr id="33" name="Shape 31"/>
+          <p:cNvSpPr/>
+          <p:nvPr/>
+        </p:nvSpPr>
+        <p:spPr>
+          <a:xfrm>
+            <a:off x="365760" y="4096512"/>
+            <a:ext cx="1371600" cy="804672"/>
+          </a:xfrm>
+          <a:prstGeom prst="rect">
+            <a:avLst>
+              <a:gd name="adj" fmla="val 6818"/>
+            </a:avLst>
+          </a:prstGeom>
+          <a:solidFill>
+            <a:srgbClr val="E2E8F0"/>
+          </a:solidFill>
+          <a:ln w="12700">
+            <a:solidFill>
+              <a:srgbClr val="E2E8F0"/>
+            </a:solidFill>
+            <a:prstDash val="solid"/>
+          </a:ln>
+        </p:spPr>
+      </p:sp>
+      <p:sp>
+        <p:nvSpPr>
+          <p:cNvPr id="34" name="Text 32"/>
+          <p:cNvSpPr/>
+          <p:nvPr/>
+        </p:nvSpPr>
+        <p:spPr>
+          <a:xfrm>
+            <a:off x="365760" y="4096512"/>
+            <a:ext cx="1371600" cy="804672"/>
+          </a:xfrm>
+          <a:prstGeom prst="rect">
+            <a:avLst/>
+          </a:prstGeom>
+          <a:noFill/>
+          <a:ln/>
+        </p:spPr>
+        <p:txBody>
+          <a:bodyPr wrap="square" lIns="0" tIns="0" rIns="0" bIns="0" rtlCol="0" anchor="ctr"/>
+          <a:lstStyle/>
+          <a:p>
+            <a:pPr algn="ctr" indent="0" marL="0">
+              <a:buNone/>
+            </a:pPr>
+            <a:r>
+              <a:rPr lang="en-US" sz="1100" b="1" dirty="0">
+                <a:solidFill>
+                  <a:srgbClr val="475569"/>
                 </a:solidFill>
                 <a:latin typeface="Trebuchet MS" pitchFamily="34" charset="0"/>
                 <a:ea typeface="Trebuchet MS" pitchFamily="34" charset="-122"/>
                 <a:cs typeface="Trebuchet MS" pitchFamily="34" charset="-120"/>
               </a:rPr>
-              <a:t>·</a:t>
-            </a:r>
-            <a:endParaRPr lang="en-US" sz="1600" dirty="0"/>
-          </a:p>
-        </p:txBody>
-      </p:sp>
-      <p:sp>
-        <p:nvSpPr>
-          <p:cNvPr id="34" name="Shape 32"/>
-          <p:cNvSpPr/>
-          <p:nvPr/>
-        </p:nvSpPr>
-        <p:spPr>
-          <a:xfrm>
-            <a:off x="6858000" y="3364992"/>
-            <a:ext cx="1554480" cy="475488"/>
-          </a:xfrm>
-          <a:prstGeom prst="rect">
-            <a:avLst>
-              <a:gd name="adj" fmla="val 9615"/>
-            </a:avLst>
-          </a:prstGeom>
-          <a:solidFill>
-            <a:srgbClr val="FFFFFF"/>
-          </a:solidFill>
-          <a:ln w="12700">
-            <a:solidFill>
-              <a:srgbClr val="0D9488"/>
-            </a:solidFill>
-            <a:prstDash val="solid"/>
-          </a:ln>
-        </p:spPr>
-      </p:sp>
-      <p:sp>
-        <p:nvSpPr>
-          <p:cNvPr id="35" name="Text 33"/>
-          <p:cNvSpPr/>
-          <p:nvPr/>
-        </p:nvSpPr>
-        <p:spPr>
-          <a:xfrm>
-            <a:off x="6858000" y="3364992"/>
-            <a:ext cx="1554480" cy="475488"/>
-          </a:xfrm>
-          <a:prstGeom prst="rect">
-            <a:avLst/>
-          </a:prstGeom>
-          <a:noFill/>
-          <a:ln/>
-        </p:spPr>
-        <p:txBody>
-          <a:bodyPr wrap="square" lIns="0" tIns="0" rIns="0" bIns="0" rtlCol="0" anchor="ctr"/>
-          <a:lstStyle/>
-          <a:p>
-            <a:pPr algn="ctr" indent="0" marL="0">
-              <a:buNone/>
-            </a:pPr>
-            <a:r>
-              <a:rPr lang="en-US" sz="1400" b="1" dirty="0">
-                <a:solidFill>
-                  <a:srgbClr val="0D9488"/>
-                </a:solidFill>
-                <a:latin typeface="Trebuchet MS" pitchFamily="34" charset="0"/>
-                <a:ea typeface="Trebuchet MS" pitchFamily="34" charset="-122"/>
-                <a:cs typeface="Trebuchet MS" pitchFamily="34" charset="-120"/>
-              </a:rPr>
-              <a:t>ro</a:t>
-            </a:r>
-            <a:endParaRPr lang="en-US" sz="1400" dirty="0"/>
-          </a:p>
-        </p:txBody>
-      </p:sp>
-      <p:sp>
-        <p:nvSpPr>
-          <p:cNvPr id="36" name="Shape 34"/>
-          <p:cNvSpPr/>
-          <p:nvPr/>
-        </p:nvSpPr>
-        <p:spPr>
-          <a:xfrm>
-            <a:off x="365760" y="4096512"/>
-            <a:ext cx="1371600" cy="804672"/>
+              <a:t>Phonemes</a:t>
+            </a:r>
+            <a:endParaRPr lang="en-US" sz="1100" dirty="0"/>
+          </a:p>
+        </p:txBody>
+      </p:sp>
+      <p:sp>
+        <p:nvSpPr>
+          <p:cNvPr id="35" name="Shape 33"/>
+          <p:cNvSpPr/>
+          <p:nvPr/>
+        </p:nvSpPr>
+        <p:spPr>
+          <a:xfrm>
+            <a:off x="1874520" y="4096512"/>
+            <a:ext cx="6903720" cy="804672"/>
           </a:xfrm>
           <a:prstGeom prst="rect">
             <a:avLst>
@@ -27607,85 +28666,19 @@
             </a:avLst>
           </a:prstGeom>
           <a:solidFill>
-            <a:srgbClr val="E2E8F0"/>
+            <a:srgbClr val="F8FAFC"/>
           </a:solidFill>
           <a:ln w="12700">
             <a:solidFill>
               <a:srgbClr val="E2E8F0"/>
             </a:solidFill>
-            <a:prstDash val="solid"/>
-          </a:ln>
-        </p:spPr>
-      </p:sp>
-      <p:sp>
-        <p:nvSpPr>
-          <p:cNvPr id="37" name="Text 35"/>
-          <p:cNvSpPr/>
-          <p:nvPr/>
-        </p:nvSpPr>
-        <p:spPr>
-          <a:xfrm>
-            <a:off x="365760" y="4096512"/>
-            <a:ext cx="1371600" cy="804672"/>
-          </a:xfrm>
-          <a:prstGeom prst="rect">
-            <a:avLst/>
-          </a:prstGeom>
-          <a:noFill/>
-          <a:ln/>
-        </p:spPr>
-        <p:txBody>
-          <a:bodyPr wrap="square" lIns="0" tIns="0" rIns="0" bIns="0" rtlCol="0" anchor="ctr"/>
-          <a:lstStyle/>
-          <a:p>
-            <a:pPr algn="ctr" indent="0" marL="0">
-              <a:buNone/>
-            </a:pPr>
-            <a:r>
-              <a:rPr lang="en-US" sz="1100" b="1" dirty="0">
-                <a:solidFill>
-                  <a:srgbClr val="475569"/>
-                </a:solidFill>
-                <a:latin typeface="Trebuchet MS" pitchFamily="34" charset="0"/>
-                <a:ea typeface="Trebuchet MS" pitchFamily="34" charset="-122"/>
-                <a:cs typeface="Trebuchet MS" pitchFamily="34" charset="-120"/>
-              </a:rPr>
-              <a:t>Phonemes</a:t>
-            </a:r>
-            <a:endParaRPr lang="en-US" sz="1100" dirty="0"/>
-          </a:p>
-        </p:txBody>
-      </p:sp>
-      <p:sp>
-        <p:nvSpPr>
-          <p:cNvPr id="38" name="Shape 36"/>
-          <p:cNvSpPr/>
-          <p:nvPr/>
-        </p:nvSpPr>
-        <p:spPr>
-          <a:xfrm>
-            <a:off x="1874520" y="4096512"/>
-            <a:ext cx="6903720" cy="804672"/>
-          </a:xfrm>
-          <a:prstGeom prst="rect">
-            <a:avLst>
-              <a:gd name="adj" fmla="val 6818"/>
-            </a:avLst>
-          </a:prstGeom>
-          <a:solidFill>
-            <a:srgbClr val="F8FAFC"/>
-          </a:solidFill>
-          <a:ln w="12700">
-            <a:solidFill>
-              <a:srgbClr val="E2E8F0"/>
-            </a:solidFill>
             <a:prstDash val="dash"/>
           </a:ln>
         </p:spPr>
       </p:sp>
       <p:sp>
         <p:nvSpPr>
-          <p:cNvPr id="39" name="Text 37"/>
+          <p:cNvPr id="36" name="Text 34"/>
           <p:cNvSpPr/>
           <p:nvPr/>
         </p:nvSpPr>
@@ -28147,7 +29140,7 @@
                 <a:ea typeface="Trebuchet MS" pitchFamily="34" charset="-122"/>
                 <a:cs typeface="Trebuchet MS" pitchFamily="34" charset="-120"/>
               </a:rPr>
-              <a:t>superhero</a:t>
+              <a:t>superstar</a:t>
             </a:r>
             <a:endParaRPr lang="en-US" sz="2800" dirty="0"/>
           </a:p>
@@ -28398,7 +29391,7 @@
                 <a:ea typeface="Trebuchet MS" pitchFamily="34" charset="-122"/>
                 <a:cs typeface="Trebuchet MS" pitchFamily="34" charset="-120"/>
               </a:rPr>
-              <a:t>hero</a:t>
+              <a:t>star</a:t>
             </a:r>
             <a:endParaRPr lang="en-US" sz="1300" dirty="0"/>
           </a:p>
@@ -28437,7 +29430,7 @@
                 <a:ea typeface="Calibri" pitchFamily="34" charset="-122"/>
                 <a:cs typeface="Calibri" pitchFamily="34" charset="-120"/>
               </a:rPr>
-              <a:t>a brave, powerful person</a:t>
+              <a:t>a shining star; a brilliant person</a:t>
             </a:r>
             <a:endParaRPr lang="en-US" sz="850" dirty="0"/>
           </a:p>
@@ -28544,8 +29537,8 @@
         </p:nvSpPr>
         <p:spPr>
           <a:xfrm>
-            <a:off x="1975104" y="3364992"/>
-            <a:ext cx="1554480" cy="475488"/>
+            <a:off x="2313432" y="3364992"/>
+            <a:ext cx="1645920" cy="475488"/>
           </a:xfrm>
           <a:prstGeom prst="rect">
             <a:avLst>
@@ -28571,8 +29564,8 @@
         </p:nvSpPr>
         <p:spPr>
           <a:xfrm>
-            <a:off x="1975104" y="3364992"/>
-            <a:ext cx="1554480" cy="475488"/>
+            <a:off x="2313432" y="3364992"/>
+            <a:ext cx="1645920" cy="475488"/>
           </a:xfrm>
           <a:prstGeom prst="rect">
             <a:avLst/>
@@ -28610,8 +29603,8 @@
         </p:nvSpPr>
         <p:spPr>
           <a:xfrm>
-            <a:off x="3529584" y="3364992"/>
-            <a:ext cx="73152" cy="475488"/>
+            <a:off x="3959352" y="3364992"/>
+            <a:ext cx="411480" cy="475488"/>
           </a:xfrm>
           <a:prstGeom prst="rect">
             <a:avLst/>
@@ -28649,8 +29642,8 @@
         </p:nvSpPr>
         <p:spPr>
           <a:xfrm>
-            <a:off x="3602736" y="3364992"/>
-            <a:ext cx="1554480" cy="475488"/>
+            <a:off x="4370832" y="3364992"/>
+            <a:ext cx="1645920" cy="475488"/>
           </a:xfrm>
           <a:prstGeom prst="rect">
             <a:avLst>
@@ -28676,8 +29669,8 @@
         </p:nvSpPr>
         <p:spPr>
           <a:xfrm>
-            <a:off x="3602736" y="3364992"/>
-            <a:ext cx="1554480" cy="475488"/>
+            <a:off x="4370832" y="3364992"/>
+            <a:ext cx="1645920" cy="475488"/>
           </a:xfrm>
           <a:prstGeom prst="rect">
             <a:avLst/>
@@ -28715,8 +29708,8 @@
         </p:nvSpPr>
         <p:spPr>
           <a:xfrm>
-            <a:off x="5157216" y="3364992"/>
-            <a:ext cx="73152" cy="475488"/>
+            <a:off x="6016752" y="3364992"/>
+            <a:ext cx="411480" cy="475488"/>
           </a:xfrm>
           <a:prstGeom prst="rect">
             <a:avLst/>
@@ -28754,8 +29747,8 @@
         </p:nvSpPr>
         <p:spPr>
           <a:xfrm>
-            <a:off x="5230368" y="3364992"/>
-            <a:ext cx="1554480" cy="475488"/>
+            <a:off x="6428232" y="3364992"/>
+            <a:ext cx="1645920" cy="475488"/>
           </a:xfrm>
           <a:prstGeom prst="rect">
             <a:avLst>
@@ -28781,8 +29774,8 @@
         </p:nvSpPr>
         <p:spPr>
           <a:xfrm>
-            <a:off x="5230368" y="3364992"/>
-            <a:ext cx="1554480" cy="475488"/>
+            <a:off x="6428232" y="3364992"/>
+            <a:ext cx="1645920" cy="475488"/>
           </a:xfrm>
           <a:prstGeom prst="rect">
             <a:avLst/>
@@ -28806,7 +29799,7 @@
                 <a:ea typeface="Trebuchet MS" pitchFamily="34" charset="-122"/>
                 <a:cs typeface="Trebuchet MS" pitchFamily="34" charset="-120"/>
               </a:rPr>
-              <a:t>he</a:t>
+              <a:t>star</a:t>
             </a:r>
             <a:endParaRPr lang="en-US" sz="1400" dirty="0"/>
           </a:p>
@@ -28814,211 +29807,238 @@
       </p:sp>
       <p:sp>
         <p:nvSpPr>
-          <p:cNvPr id="33" name="Text 31"/>
-          <p:cNvSpPr/>
-          <p:nvPr/>
-        </p:nvSpPr>
-        <p:spPr>
-          <a:xfrm>
-            <a:off x="6784848" y="3364992"/>
-            <a:ext cx="73152" cy="475488"/>
-          </a:xfrm>
-          <a:prstGeom prst="rect">
-            <a:avLst/>
-          </a:prstGeom>
-          <a:noFill/>
-          <a:ln/>
-        </p:spPr>
-        <p:txBody>
-          <a:bodyPr wrap="square" lIns="0" tIns="0" rIns="0" bIns="0" rtlCol="0" anchor="ctr"/>
-          <a:lstStyle/>
-          <a:p>
-            <a:pPr algn="ctr" indent="0" marL="0">
-              <a:buNone/>
-            </a:pPr>
-            <a:r>
-              <a:rPr lang="en-US" sz="1600" b="1" dirty="0">
-                <a:solidFill>
-                  <a:srgbClr val="0D9488"/>
+          <p:cNvPr id="33" name="Shape 31"/>
+          <p:cNvSpPr/>
+          <p:nvPr/>
+        </p:nvSpPr>
+        <p:spPr>
+          <a:xfrm>
+            <a:off x="365760" y="4096512"/>
+            <a:ext cx="1371600" cy="804672"/>
+          </a:xfrm>
+          <a:prstGeom prst="rect">
+            <a:avLst>
+              <a:gd name="adj" fmla="val 6818"/>
+            </a:avLst>
+          </a:prstGeom>
+          <a:solidFill>
+            <a:srgbClr val="E2E8F0"/>
+          </a:solidFill>
+          <a:ln w="12700">
+            <a:solidFill>
+              <a:srgbClr val="E2E8F0"/>
+            </a:solidFill>
+            <a:prstDash val="solid"/>
+          </a:ln>
+        </p:spPr>
+      </p:sp>
+      <p:sp>
+        <p:nvSpPr>
+          <p:cNvPr id="34" name="Text 32"/>
+          <p:cNvSpPr/>
+          <p:nvPr/>
+        </p:nvSpPr>
+        <p:spPr>
+          <a:xfrm>
+            <a:off x="365760" y="4096512"/>
+            <a:ext cx="1371600" cy="804672"/>
+          </a:xfrm>
+          <a:prstGeom prst="rect">
+            <a:avLst/>
+          </a:prstGeom>
+          <a:noFill/>
+          <a:ln/>
+        </p:spPr>
+        <p:txBody>
+          <a:bodyPr wrap="square" lIns="0" tIns="0" rIns="0" bIns="0" rtlCol="0" anchor="ctr"/>
+          <a:lstStyle/>
+          <a:p>
+            <a:pPr algn="ctr" indent="0" marL="0">
+              <a:buNone/>
+            </a:pPr>
+            <a:r>
+              <a:rPr lang="en-US" sz="1100" b="1" dirty="0">
+                <a:solidFill>
+                  <a:srgbClr val="475569"/>
                 </a:solidFill>
                 <a:latin typeface="Trebuchet MS" pitchFamily="34" charset="0"/>
                 <a:ea typeface="Trebuchet MS" pitchFamily="34" charset="-122"/>
                 <a:cs typeface="Trebuchet MS" pitchFamily="34" charset="-120"/>
               </a:rPr>
-              <a:t>·</a:t>
-            </a:r>
-            <a:endParaRPr lang="en-US" sz="1600" dirty="0"/>
-          </a:p>
-        </p:txBody>
-      </p:sp>
-      <p:sp>
-        <p:nvSpPr>
-          <p:cNvPr id="34" name="Shape 32"/>
-          <p:cNvSpPr/>
-          <p:nvPr/>
-        </p:nvSpPr>
-        <p:spPr>
-          <a:xfrm>
-            <a:off x="6858000" y="3364992"/>
-            <a:ext cx="1554480" cy="475488"/>
+              <a:t>Phonemes</a:t>
+            </a:r>
+            <a:endParaRPr lang="en-US" sz="1100" dirty="0"/>
+          </a:p>
+        </p:txBody>
+      </p:sp>
+      <p:sp>
+        <p:nvSpPr>
+          <p:cNvPr id="35" name="Shape 33"/>
+          <p:cNvSpPr/>
+          <p:nvPr/>
+        </p:nvSpPr>
+        <p:spPr>
+          <a:xfrm>
+            <a:off x="1874520" y="4096512"/>
+            <a:ext cx="6903720" cy="658368"/>
           </a:xfrm>
           <a:prstGeom prst="rect">
             <a:avLst>
-              <a:gd name="adj" fmla="val 9615"/>
+              <a:gd name="adj" fmla="val 8333"/>
             </a:avLst>
           </a:prstGeom>
           <a:solidFill>
+            <a:srgbClr val="FCE7F3"/>
+          </a:solidFill>
+          <a:ln w="12700">
+            <a:solidFill>
+              <a:srgbClr val="DB2777"/>
+            </a:solidFill>
+            <a:prstDash val="solid"/>
+          </a:ln>
+        </p:spPr>
+      </p:sp>
+      <p:sp>
+        <p:nvSpPr>
+          <p:cNvPr id="36" name="Shape 34"/>
+          <p:cNvSpPr/>
+          <p:nvPr/>
+        </p:nvSpPr>
+        <p:spPr>
+          <a:xfrm>
+            <a:off x="2124837" y="4169664"/>
+            <a:ext cx="685800" cy="475488"/>
+          </a:xfrm>
+          <a:prstGeom prst="rect">
+            <a:avLst>
+              <a:gd name="adj" fmla="val 7692"/>
+            </a:avLst>
+          </a:prstGeom>
+          <a:solidFill>
             <a:srgbClr val="FFFFFF"/>
           </a:solidFill>
           <a:ln w="12700">
             <a:solidFill>
-              <a:srgbClr val="0D9488"/>
-            </a:solidFill>
-            <a:prstDash val="solid"/>
-          </a:ln>
-        </p:spPr>
-      </p:sp>
-      <p:sp>
-        <p:nvSpPr>
-          <p:cNvPr id="35" name="Text 33"/>
-          <p:cNvSpPr/>
-          <p:nvPr/>
-        </p:nvSpPr>
-        <p:spPr>
-          <a:xfrm>
-            <a:off x="6858000" y="3364992"/>
-            <a:ext cx="1554480" cy="475488"/>
-          </a:xfrm>
-          <a:prstGeom prst="rect">
-            <a:avLst/>
-          </a:prstGeom>
-          <a:noFill/>
-          <a:ln/>
-        </p:spPr>
-        <p:txBody>
-          <a:bodyPr wrap="square" lIns="0" tIns="0" rIns="0" bIns="0" rtlCol="0" anchor="ctr"/>
-          <a:lstStyle/>
-          <a:p>
-            <a:pPr algn="ctr" indent="0" marL="0">
-              <a:buNone/>
-            </a:pPr>
-            <a:r>
-              <a:rPr lang="en-US" sz="1400" b="1" dirty="0">
-                <a:solidFill>
-                  <a:srgbClr val="0D9488"/>
+              <a:srgbClr val="DB2777"/>
+            </a:solidFill>
+            <a:prstDash val="solid"/>
+          </a:ln>
+        </p:spPr>
+      </p:sp>
+      <p:sp>
+        <p:nvSpPr>
+          <p:cNvPr id="37" name="Text 35"/>
+          <p:cNvSpPr/>
+          <p:nvPr/>
+        </p:nvSpPr>
+        <p:spPr>
+          <a:xfrm>
+            <a:off x="2124837" y="4169664"/>
+            <a:ext cx="685800" cy="475488"/>
+          </a:xfrm>
+          <a:prstGeom prst="rect">
+            <a:avLst/>
+          </a:prstGeom>
+          <a:noFill/>
+          <a:ln/>
+        </p:spPr>
+        <p:txBody>
+          <a:bodyPr wrap="square" lIns="0" tIns="0" rIns="0" bIns="0" rtlCol="0" anchor="ctr"/>
+          <a:lstStyle/>
+          <a:p>
+            <a:pPr algn="ctr" indent="0" marL="0">
+              <a:buNone/>
+            </a:pPr>
+            <a:r>
+              <a:rPr lang="en-US" sz="900" b="1" dirty="0">
+                <a:solidFill>
+                  <a:srgbClr val="9D174D"/>
                 </a:solidFill>
                 <a:latin typeface="Trebuchet MS" pitchFamily="34" charset="0"/>
                 <a:ea typeface="Trebuchet MS" pitchFamily="34" charset="-122"/>
                 <a:cs typeface="Trebuchet MS" pitchFamily="34" charset="-120"/>
               </a:rPr>
-              <a:t>ro</a:t>
-            </a:r>
-            <a:endParaRPr lang="en-US" sz="1400" dirty="0"/>
-          </a:p>
-        </p:txBody>
-      </p:sp>
-      <p:sp>
-        <p:nvSpPr>
-          <p:cNvPr id="36" name="Shape 34"/>
-          <p:cNvSpPr/>
-          <p:nvPr/>
-        </p:nvSpPr>
-        <p:spPr>
-          <a:xfrm>
-            <a:off x="365760" y="4096512"/>
-            <a:ext cx="1371600" cy="804672"/>
+              <a:t>s</a:t>
+            </a:r>
+            <a:endParaRPr lang="en-US" sz="900" dirty="0"/>
+          </a:p>
+        </p:txBody>
+      </p:sp>
+      <p:sp>
+        <p:nvSpPr>
+          <p:cNvPr id="38" name="Shape 36"/>
+          <p:cNvSpPr/>
+          <p:nvPr/>
+        </p:nvSpPr>
+        <p:spPr>
+          <a:xfrm>
+            <a:off x="3033522" y="4169664"/>
+            <a:ext cx="685800" cy="475488"/>
           </a:xfrm>
           <a:prstGeom prst="rect">
             <a:avLst>
-              <a:gd name="adj" fmla="val 6818"/>
+              <a:gd name="adj" fmla="val 7692"/>
             </a:avLst>
           </a:prstGeom>
           <a:solidFill>
-            <a:srgbClr val="E2E8F0"/>
-          </a:solidFill>
-          <a:ln w="12700">
-            <a:solidFill>
-              <a:srgbClr val="E2E8F0"/>
-            </a:solidFill>
-            <a:prstDash val="solid"/>
-          </a:ln>
-        </p:spPr>
-      </p:sp>
-      <p:sp>
-        <p:nvSpPr>
-          <p:cNvPr id="37" name="Text 35"/>
-          <p:cNvSpPr/>
-          <p:nvPr/>
-        </p:nvSpPr>
-        <p:spPr>
-          <a:xfrm>
-            <a:off x="365760" y="4096512"/>
-            <a:ext cx="1371600" cy="804672"/>
-          </a:xfrm>
-          <a:prstGeom prst="rect">
-            <a:avLst/>
-          </a:prstGeom>
-          <a:noFill/>
-          <a:ln/>
-        </p:spPr>
-        <p:txBody>
-          <a:bodyPr wrap="square" lIns="0" tIns="0" rIns="0" bIns="0" rtlCol="0" anchor="ctr"/>
-          <a:lstStyle/>
-          <a:p>
-            <a:pPr algn="ctr" indent="0" marL="0">
-              <a:buNone/>
-            </a:pPr>
-            <a:r>
-              <a:rPr lang="en-US" sz="1100" b="1" dirty="0">
-                <a:solidFill>
-                  <a:srgbClr val="475569"/>
+            <a:srgbClr val="FFFFFF"/>
+          </a:solidFill>
+          <a:ln w="12700">
+            <a:solidFill>
+              <a:srgbClr val="DB2777"/>
+            </a:solidFill>
+            <a:prstDash val="solid"/>
+          </a:ln>
+        </p:spPr>
+      </p:sp>
+      <p:sp>
+        <p:nvSpPr>
+          <p:cNvPr id="39" name="Text 37"/>
+          <p:cNvSpPr/>
+          <p:nvPr/>
+        </p:nvSpPr>
+        <p:spPr>
+          <a:xfrm>
+            <a:off x="3033522" y="4169664"/>
+            <a:ext cx="685800" cy="475488"/>
+          </a:xfrm>
+          <a:prstGeom prst="rect">
+            <a:avLst/>
+          </a:prstGeom>
+          <a:noFill/>
+          <a:ln/>
+        </p:spPr>
+        <p:txBody>
+          <a:bodyPr wrap="square" lIns="0" tIns="0" rIns="0" bIns="0" rtlCol="0" anchor="ctr"/>
+          <a:lstStyle/>
+          <a:p>
+            <a:pPr algn="ctr" indent="0" marL="0">
+              <a:buNone/>
+            </a:pPr>
+            <a:r>
+              <a:rPr lang="en-US" sz="900" b="1" dirty="0">
+                <a:solidFill>
+                  <a:srgbClr val="9D174D"/>
                 </a:solidFill>
                 <a:latin typeface="Trebuchet MS" pitchFamily="34" charset="0"/>
                 <a:ea typeface="Trebuchet MS" pitchFamily="34" charset="-122"/>
                 <a:cs typeface="Trebuchet MS" pitchFamily="34" charset="-120"/>
               </a:rPr>
-              <a:t>Phonemes</a:t>
-            </a:r>
-            <a:endParaRPr lang="en-US" sz="1100" dirty="0"/>
-          </a:p>
-        </p:txBody>
-      </p:sp>
-      <p:sp>
-        <p:nvSpPr>
-          <p:cNvPr id="38" name="Shape 36"/>
-          <p:cNvSpPr/>
-          <p:nvPr/>
-        </p:nvSpPr>
-        <p:spPr>
-          <a:xfrm>
-            <a:off x="1874520" y="4096512"/>
-            <a:ext cx="6903720" cy="658368"/>
-          </a:xfrm>
-          <a:prstGeom prst="rect">
-            <a:avLst>
-              <a:gd name="adj" fmla="val 8333"/>
-            </a:avLst>
-          </a:prstGeom>
-          <a:solidFill>
-            <a:srgbClr val="FCE7F3"/>
-          </a:solidFill>
-          <a:ln w="12700">
-            <a:solidFill>
-              <a:srgbClr val="DB2777"/>
-            </a:solidFill>
-            <a:prstDash val="solid"/>
-          </a:ln>
-        </p:spPr>
-      </p:sp>
-      <p:sp>
-        <p:nvSpPr>
-          <p:cNvPr id="39" name="Shape 37"/>
-          <p:cNvSpPr/>
-          <p:nvPr/>
-        </p:nvSpPr>
-        <p:spPr>
-          <a:xfrm>
-            <a:off x="2023872" y="4169664"/>
+              <a:t>u</a:t>
+            </a:r>
+            <a:endParaRPr lang="en-US" sz="900" dirty="0"/>
+          </a:p>
+        </p:txBody>
+      </p:sp>
+      <p:sp>
+        <p:nvSpPr>
+          <p:cNvPr id="40" name="Shape 38"/>
+          <p:cNvSpPr/>
+          <p:nvPr/>
+        </p:nvSpPr>
+        <p:spPr>
+          <a:xfrm>
+            <a:off x="3942207" y="4169664"/>
             <a:ext cx="685800" cy="475488"/>
           </a:xfrm>
           <a:prstGeom prst="rect">
@@ -29039,13 +30059,13 @@
       </p:sp>
       <p:sp>
         <p:nvSpPr>
-          <p:cNvPr id="40" name="Text 38"/>
-          <p:cNvSpPr/>
-          <p:nvPr/>
-        </p:nvSpPr>
-        <p:spPr>
-          <a:xfrm>
-            <a:off x="2023872" y="4169664"/>
+          <p:cNvPr id="41" name="Text 39"/>
+          <p:cNvSpPr/>
+          <p:nvPr/>
+        </p:nvSpPr>
+        <p:spPr>
+          <a:xfrm>
+            <a:off x="3942207" y="4169664"/>
             <a:ext cx="685800" cy="475488"/>
           </a:xfrm>
           <a:prstGeom prst="rect">
@@ -29070,7 +30090,7 @@
                 <a:ea typeface="Trebuchet MS" pitchFamily="34" charset="-122"/>
                 <a:cs typeface="Trebuchet MS" pitchFamily="34" charset="-120"/>
               </a:rPr>
-              <a:t>s</a:t>
+              <a:t>p</a:t>
             </a:r>
             <a:endParaRPr lang="en-US" sz="900" dirty="0"/>
           </a:p>
@@ -29078,13 +30098,13 @@
       </p:sp>
       <p:sp>
         <p:nvSpPr>
-          <p:cNvPr id="41" name="Shape 39"/>
-          <p:cNvSpPr/>
-          <p:nvPr/>
-        </p:nvSpPr>
-        <p:spPr>
-          <a:xfrm>
-            <a:off x="2831592" y="4169664"/>
+          <p:cNvPr id="42" name="Shape 40"/>
+          <p:cNvSpPr/>
+          <p:nvPr/>
+        </p:nvSpPr>
+        <p:spPr>
+          <a:xfrm>
+            <a:off x="4850892" y="4169664"/>
             <a:ext cx="685800" cy="475488"/>
           </a:xfrm>
           <a:prstGeom prst="rect">
@@ -29105,13 +30125,13 @@
       </p:sp>
       <p:sp>
         <p:nvSpPr>
-          <p:cNvPr id="42" name="Text 40"/>
-          <p:cNvSpPr/>
-          <p:nvPr/>
-        </p:nvSpPr>
-        <p:spPr>
-          <a:xfrm>
-            <a:off x="2831592" y="4169664"/>
+          <p:cNvPr id="43" name="Text 41"/>
+          <p:cNvSpPr/>
+          <p:nvPr/>
+        </p:nvSpPr>
+        <p:spPr>
+          <a:xfrm>
+            <a:off x="4850892" y="4169664"/>
             <a:ext cx="685800" cy="475488"/>
           </a:xfrm>
           <a:prstGeom prst="rect">
@@ -29136,7 +30156,7 @@
                 <a:ea typeface="Trebuchet MS" pitchFamily="34" charset="-122"/>
                 <a:cs typeface="Trebuchet MS" pitchFamily="34" charset="-120"/>
               </a:rPr>
-              <a:t>u</a:t>
+              <a:t>er</a:t>
             </a:r>
             <a:endParaRPr lang="en-US" sz="900" dirty="0"/>
           </a:p>
@@ -29144,13 +30164,13 @@
       </p:sp>
       <p:sp>
         <p:nvSpPr>
-          <p:cNvPr id="43" name="Shape 41"/>
-          <p:cNvSpPr/>
-          <p:nvPr/>
-        </p:nvSpPr>
-        <p:spPr>
-          <a:xfrm>
-            <a:off x="3639312" y="4169664"/>
+          <p:cNvPr id="44" name="Shape 42"/>
+          <p:cNvSpPr/>
+          <p:nvPr/>
+        </p:nvSpPr>
+        <p:spPr>
+          <a:xfrm>
+            <a:off x="5759577" y="4169664"/>
             <a:ext cx="685800" cy="475488"/>
           </a:xfrm>
           <a:prstGeom prst="rect">
@@ -29171,13 +30191,13 @@
       </p:sp>
       <p:sp>
         <p:nvSpPr>
-          <p:cNvPr id="44" name="Text 42"/>
-          <p:cNvSpPr/>
-          <p:nvPr/>
-        </p:nvSpPr>
-        <p:spPr>
-          <a:xfrm>
-            <a:off x="3639312" y="4169664"/>
+          <p:cNvPr id="45" name="Text 43"/>
+          <p:cNvSpPr/>
+          <p:nvPr/>
+        </p:nvSpPr>
+        <p:spPr>
+          <a:xfrm>
+            <a:off x="5759577" y="4169664"/>
             <a:ext cx="685800" cy="475488"/>
           </a:xfrm>
           <a:prstGeom prst="rect">
@@ -29202,7 +30222,7 @@
                 <a:ea typeface="Trebuchet MS" pitchFamily="34" charset="-122"/>
                 <a:cs typeface="Trebuchet MS" pitchFamily="34" charset="-120"/>
               </a:rPr>
-              <a:t>p</a:t>
+              <a:t>s</a:t>
             </a:r>
             <a:endParaRPr lang="en-US" sz="900" dirty="0"/>
           </a:p>
@@ -29210,13 +30230,13 @@
       </p:sp>
       <p:sp>
         <p:nvSpPr>
-          <p:cNvPr id="45" name="Shape 43"/>
-          <p:cNvSpPr/>
-          <p:nvPr/>
-        </p:nvSpPr>
-        <p:spPr>
-          <a:xfrm>
-            <a:off x="4447032" y="4169664"/>
+          <p:cNvPr id="46" name="Shape 44"/>
+          <p:cNvSpPr/>
+          <p:nvPr/>
+        </p:nvSpPr>
+        <p:spPr>
+          <a:xfrm>
+            <a:off x="6668262" y="4169664"/>
             <a:ext cx="685800" cy="475488"/>
           </a:xfrm>
           <a:prstGeom prst="rect">
@@ -29237,13 +30257,13 @@
       </p:sp>
       <p:sp>
         <p:nvSpPr>
-          <p:cNvPr id="46" name="Text 44"/>
-          <p:cNvSpPr/>
-          <p:nvPr/>
-        </p:nvSpPr>
-        <p:spPr>
-          <a:xfrm>
-            <a:off x="4447032" y="4169664"/>
+          <p:cNvPr id="47" name="Text 45"/>
+          <p:cNvSpPr/>
+          <p:nvPr/>
+        </p:nvSpPr>
+        <p:spPr>
+          <a:xfrm>
+            <a:off x="6668262" y="4169664"/>
             <a:ext cx="685800" cy="475488"/>
           </a:xfrm>
           <a:prstGeom prst="rect">
@@ -29268,7 +30288,7 @@
                 <a:ea typeface="Trebuchet MS" pitchFamily="34" charset="-122"/>
                 <a:cs typeface="Trebuchet MS" pitchFamily="34" charset="-120"/>
               </a:rPr>
-              <a:t>er</a:t>
+              <a:t>t</a:t>
             </a:r>
             <a:endParaRPr lang="en-US" sz="900" dirty="0"/>
           </a:p>
@@ -29276,13 +30296,13 @@
       </p:sp>
       <p:sp>
         <p:nvSpPr>
-          <p:cNvPr id="47" name="Shape 45"/>
-          <p:cNvSpPr/>
-          <p:nvPr/>
-        </p:nvSpPr>
-        <p:spPr>
-          <a:xfrm>
-            <a:off x="5254752" y="4169664"/>
+          <p:cNvPr id="48" name="Shape 46"/>
+          <p:cNvSpPr/>
+          <p:nvPr/>
+        </p:nvSpPr>
+        <p:spPr>
+          <a:xfrm>
+            <a:off x="7576947" y="4169664"/>
             <a:ext cx="685800" cy="475488"/>
           </a:xfrm>
           <a:prstGeom prst="rect">
@@ -29303,13 +30323,13 @@
       </p:sp>
       <p:sp>
         <p:nvSpPr>
-          <p:cNvPr id="48" name="Text 46"/>
-          <p:cNvSpPr/>
-          <p:nvPr/>
-        </p:nvSpPr>
-        <p:spPr>
-          <a:xfrm>
-            <a:off x="5254752" y="4169664"/>
+          <p:cNvPr id="49" name="Text 47"/>
+          <p:cNvSpPr/>
+          <p:nvPr/>
+        </p:nvSpPr>
+        <p:spPr>
+          <a:xfrm>
+            <a:off x="7576947" y="4169664"/>
             <a:ext cx="685800" cy="475488"/>
           </a:xfrm>
           <a:prstGeom prst="rect">
@@ -29334,205 +30354,7 @@
                 <a:ea typeface="Trebuchet MS" pitchFamily="34" charset="-122"/>
                 <a:cs typeface="Trebuchet MS" pitchFamily="34" charset="-120"/>
               </a:rPr>
-              <a:t>h</a:t>
-            </a:r>
-            <a:endParaRPr lang="en-US" sz="900" dirty="0"/>
-          </a:p>
-        </p:txBody>
-      </p:sp>
-      <p:sp>
-        <p:nvSpPr>
-          <p:cNvPr id="49" name="Shape 47"/>
-          <p:cNvSpPr/>
-          <p:nvPr/>
-        </p:nvSpPr>
-        <p:spPr>
-          <a:xfrm>
-            <a:off x="6062472" y="4169664"/>
-            <a:ext cx="685800" cy="475488"/>
-          </a:xfrm>
-          <a:prstGeom prst="rect">
-            <a:avLst>
-              <a:gd name="adj" fmla="val 7692"/>
-            </a:avLst>
-          </a:prstGeom>
-          <a:solidFill>
-            <a:srgbClr val="FFFFFF"/>
-          </a:solidFill>
-          <a:ln w="12700">
-            <a:solidFill>
-              <a:srgbClr val="DB2777"/>
-            </a:solidFill>
-            <a:prstDash val="solid"/>
-          </a:ln>
-        </p:spPr>
-      </p:sp>
-      <p:sp>
-        <p:nvSpPr>
-          <p:cNvPr id="50" name="Text 48"/>
-          <p:cNvSpPr/>
-          <p:nvPr/>
-        </p:nvSpPr>
-        <p:spPr>
-          <a:xfrm>
-            <a:off x="6062472" y="4169664"/>
-            <a:ext cx="685800" cy="475488"/>
-          </a:xfrm>
-          <a:prstGeom prst="rect">
-            <a:avLst/>
-          </a:prstGeom>
-          <a:noFill/>
-          <a:ln/>
-        </p:spPr>
-        <p:txBody>
-          <a:bodyPr wrap="square" lIns="0" tIns="0" rIns="0" bIns="0" rtlCol="0" anchor="ctr"/>
-          <a:lstStyle/>
-          <a:p>
-            <a:pPr algn="ctr" indent="0" marL="0">
-              <a:buNone/>
-            </a:pPr>
-            <a:r>
-              <a:rPr lang="en-US" sz="900" b="1" dirty="0">
-                <a:solidFill>
-                  <a:srgbClr val="9D174D"/>
-                </a:solidFill>
-                <a:latin typeface="Trebuchet MS" pitchFamily="34" charset="0"/>
-                <a:ea typeface="Trebuchet MS" pitchFamily="34" charset="-122"/>
-                <a:cs typeface="Trebuchet MS" pitchFamily="34" charset="-120"/>
-              </a:rPr>
-              <a:t>e</a:t>
-            </a:r>
-            <a:endParaRPr lang="en-US" sz="900" dirty="0"/>
-          </a:p>
-        </p:txBody>
-      </p:sp>
-      <p:sp>
-        <p:nvSpPr>
-          <p:cNvPr id="51" name="Shape 49"/>
-          <p:cNvSpPr/>
-          <p:nvPr/>
-        </p:nvSpPr>
-        <p:spPr>
-          <a:xfrm>
-            <a:off x="6870192" y="4169664"/>
-            <a:ext cx="685800" cy="475488"/>
-          </a:xfrm>
-          <a:prstGeom prst="rect">
-            <a:avLst>
-              <a:gd name="adj" fmla="val 7692"/>
-            </a:avLst>
-          </a:prstGeom>
-          <a:solidFill>
-            <a:srgbClr val="FFFFFF"/>
-          </a:solidFill>
-          <a:ln w="12700">
-            <a:solidFill>
-              <a:srgbClr val="DB2777"/>
-            </a:solidFill>
-            <a:prstDash val="solid"/>
-          </a:ln>
-        </p:spPr>
-      </p:sp>
-      <p:sp>
-        <p:nvSpPr>
-          <p:cNvPr id="52" name="Text 50"/>
-          <p:cNvSpPr/>
-          <p:nvPr/>
-        </p:nvSpPr>
-        <p:spPr>
-          <a:xfrm>
-            <a:off x="6870192" y="4169664"/>
-            <a:ext cx="685800" cy="475488"/>
-          </a:xfrm>
-          <a:prstGeom prst="rect">
-            <a:avLst/>
-          </a:prstGeom>
-          <a:noFill/>
-          <a:ln/>
-        </p:spPr>
-        <p:txBody>
-          <a:bodyPr wrap="square" lIns="0" tIns="0" rIns="0" bIns="0" rtlCol="0" anchor="ctr"/>
-          <a:lstStyle/>
-          <a:p>
-            <a:pPr algn="ctr" indent="0" marL="0">
-              <a:buNone/>
-            </a:pPr>
-            <a:r>
-              <a:rPr lang="en-US" sz="900" b="1" dirty="0">
-                <a:solidFill>
-                  <a:srgbClr val="9D174D"/>
-                </a:solidFill>
-                <a:latin typeface="Trebuchet MS" pitchFamily="34" charset="0"/>
-                <a:ea typeface="Trebuchet MS" pitchFamily="34" charset="-122"/>
-                <a:cs typeface="Trebuchet MS" pitchFamily="34" charset="-120"/>
-              </a:rPr>
-              <a:t>r</a:t>
-            </a:r>
-            <a:endParaRPr lang="en-US" sz="900" dirty="0"/>
-          </a:p>
-        </p:txBody>
-      </p:sp>
-      <p:sp>
-        <p:nvSpPr>
-          <p:cNvPr id="53" name="Shape 51"/>
-          <p:cNvSpPr/>
-          <p:nvPr/>
-        </p:nvSpPr>
-        <p:spPr>
-          <a:xfrm>
-            <a:off x="7677912" y="4169664"/>
-            <a:ext cx="685800" cy="475488"/>
-          </a:xfrm>
-          <a:prstGeom prst="rect">
-            <a:avLst>
-              <a:gd name="adj" fmla="val 7692"/>
-            </a:avLst>
-          </a:prstGeom>
-          <a:solidFill>
-            <a:srgbClr val="FFFFFF"/>
-          </a:solidFill>
-          <a:ln w="12700">
-            <a:solidFill>
-              <a:srgbClr val="DB2777"/>
-            </a:solidFill>
-            <a:prstDash val="solid"/>
-          </a:ln>
-        </p:spPr>
-      </p:sp>
-      <p:sp>
-        <p:nvSpPr>
-          <p:cNvPr id="54" name="Text 52"/>
-          <p:cNvSpPr/>
-          <p:nvPr/>
-        </p:nvSpPr>
-        <p:spPr>
-          <a:xfrm>
-            <a:off x="7677912" y="4169664"/>
-            <a:ext cx="685800" cy="475488"/>
-          </a:xfrm>
-          <a:prstGeom prst="rect">
-            <a:avLst/>
-          </a:prstGeom>
-          <a:noFill/>
-          <a:ln/>
-        </p:spPr>
-        <p:txBody>
-          <a:bodyPr wrap="square" lIns="0" tIns="0" rIns="0" bIns="0" rtlCol="0" anchor="ctr"/>
-          <a:lstStyle/>
-          <a:p>
-            <a:pPr algn="ctr" indent="0" marL="0">
-              <a:buNone/>
-            </a:pPr>
-            <a:r>
-              <a:rPr lang="en-US" sz="900" b="1" dirty="0">
-                <a:solidFill>
-                  <a:srgbClr val="9D174D"/>
-                </a:solidFill>
-                <a:latin typeface="Trebuchet MS" pitchFamily="34" charset="0"/>
-                <a:ea typeface="Trebuchet MS" pitchFamily="34" charset="-122"/>
-                <a:cs typeface="Trebuchet MS" pitchFamily="34" charset="-120"/>
-              </a:rPr>
-              <a:t>o</a:t>
+              <a:t>ar</a:t>
             </a:r>
             <a:endParaRPr lang="en-US" sz="900" dirty="0"/>
           </a:p>
@@ -29963,7 +30785,7 @@
                 <a:ea typeface="Trebuchet MS" pitchFamily="34" charset="-122"/>
                 <a:cs typeface="Trebuchet MS" pitchFamily="34" charset="-120"/>
               </a:rPr>
-              <a:t>supersonic</a:t>
+              <a:t>superpower</a:t>
             </a:r>
             <a:endParaRPr lang="en-US" sz="2800" dirty="0"/>
           </a:p>
@@ -30790,7 +31612,7 @@
                 <a:ea typeface="Trebuchet MS" pitchFamily="34" charset="-122"/>
                 <a:cs typeface="Trebuchet MS" pitchFamily="34" charset="-120"/>
               </a:rPr>
-              <a:t>supersonic</a:t>
+              <a:t>superpower</a:t>
             </a:r>
             <a:endParaRPr lang="en-US" sz="2800" dirty="0"/>
           </a:p>
@@ -30870,7 +31692,7 @@
         </p:nvSpPr>
         <p:spPr>
           <a:xfrm>
-            <a:off x="2221992" y="2258568"/>
+            <a:off x="2938272" y="2258568"/>
             <a:ext cx="1828800" cy="292608"/>
           </a:xfrm>
           <a:prstGeom prst="rect">
@@ -30904,7 +31726,7 @@
         </p:nvSpPr>
         <p:spPr>
           <a:xfrm>
-            <a:off x="2221992" y="2258568"/>
+            <a:off x="2938272" y="2258568"/>
             <a:ext cx="1828800" cy="292608"/>
           </a:xfrm>
           <a:prstGeom prst="rect">
@@ -30943,7 +31765,7 @@
         </p:nvSpPr>
         <p:spPr>
           <a:xfrm>
-            <a:off x="2221992" y="2569464"/>
+            <a:off x="2938272" y="2569464"/>
             <a:ext cx="1828800" cy="201168"/>
           </a:xfrm>
           <a:prstGeom prst="rect">
@@ -30982,7 +31804,7 @@
         </p:nvSpPr>
         <p:spPr>
           <a:xfrm>
-            <a:off x="4370832" y="2258568"/>
+            <a:off x="5803392" y="2258568"/>
             <a:ext cx="1828800" cy="292608"/>
           </a:xfrm>
           <a:prstGeom prst="rect">
@@ -31016,7 +31838,7 @@
         </p:nvSpPr>
         <p:spPr>
           <a:xfrm>
-            <a:off x="4370832" y="2258568"/>
+            <a:off x="5803392" y="2258568"/>
             <a:ext cx="1828800" cy="292608"/>
           </a:xfrm>
           <a:prstGeom prst="rect">
@@ -31041,7 +31863,7 @@
                 <a:ea typeface="Trebuchet MS" pitchFamily="34" charset="-122"/>
                 <a:cs typeface="Trebuchet MS" pitchFamily="34" charset="-120"/>
               </a:rPr>
-              <a:t>son</a:t>
+              <a:t>power</a:t>
             </a:r>
             <a:endParaRPr lang="en-US" sz="1300" dirty="0"/>
           </a:p>
@@ -31055,7 +31877,7 @@
         </p:nvSpPr>
         <p:spPr>
           <a:xfrm>
-            <a:off x="4370832" y="2569464"/>
+            <a:off x="5803392" y="2569464"/>
             <a:ext cx="1828800" cy="201168"/>
           </a:xfrm>
           <a:prstGeom prst="rect">
@@ -31080,7 +31902,7 @@
                 <a:ea typeface="Calibri" pitchFamily="34" charset="-122"/>
                 <a:cs typeface="Calibri" pitchFamily="34" charset="-120"/>
               </a:rPr>
-              <a:t>sound</a:t>
+              <a:t>strength or ability</a:t>
             </a:r>
             <a:endParaRPr lang="en-US" sz="850" dirty="0"/>
           </a:p>
@@ -31094,30 +31916,23 @@
         </p:nvSpPr>
         <p:spPr>
           <a:xfrm>
-            <a:off x="6519672" y="2258568"/>
-            <a:ext cx="1828800" cy="292608"/>
+            <a:off x="365760" y="3273552"/>
+            <a:ext cx="1371600" cy="658368"/>
           </a:xfrm>
           <a:prstGeom prst="rect">
             <a:avLst>
-              <a:gd name="adj" fmla="val 25000"/>
+              <a:gd name="adj" fmla="val 8333"/>
             </a:avLst>
           </a:prstGeom>
           <a:solidFill>
-            <a:srgbClr val="FCE7F3"/>
-          </a:solidFill>
-          <a:ln w="19050">
-            <a:solidFill>
-              <a:srgbClr val="DB2777"/>
-            </a:solidFill>
-            <a:prstDash val="solid"/>
-          </a:ln>
-          <a:effectLst>
-            <a:outerShdw sx="100000" sy="100000" kx="0" ky="0" algn="bl" rotWithShape="0" blurRad="101600" dist="38100" dir="8100000">
-              <a:srgbClr val="000000">
-                <a:alpha val="12000"/>
-              </a:srgbClr>
-            </a:outerShdw>
-          </a:effectLst>
+            <a:srgbClr val="E2E8F0"/>
+          </a:solidFill>
+          <a:ln w="12700">
+            <a:solidFill>
+              <a:srgbClr val="E2E8F0"/>
+            </a:solidFill>
+            <a:prstDash val="solid"/>
+          </a:ln>
         </p:spPr>
       </p:sp>
       <p:sp>
@@ -31128,90 +31943,117 @@
         </p:nvSpPr>
         <p:spPr>
           <a:xfrm>
-            <a:off x="6519672" y="2258568"/>
-            <a:ext cx="1828800" cy="292608"/>
-          </a:xfrm>
-          <a:prstGeom prst="rect">
-            <a:avLst/>
-          </a:prstGeom>
-          <a:noFill/>
-          <a:ln/>
-        </p:spPr>
-        <p:txBody>
-          <a:bodyPr wrap="square" lIns="0" tIns="0" rIns="0" bIns="0" rtlCol="0" anchor="ctr"/>
-          <a:lstStyle/>
-          <a:p>
-            <a:pPr algn="ctr" indent="0" marL="0">
-              <a:buNone/>
-            </a:pPr>
-            <a:r>
-              <a:rPr lang="en-US" sz="1300" b="1" dirty="0">
-                <a:solidFill>
-                  <a:srgbClr val="9D174D"/>
+            <a:off x="365760" y="3273552"/>
+            <a:ext cx="1371600" cy="658368"/>
+          </a:xfrm>
+          <a:prstGeom prst="rect">
+            <a:avLst/>
+          </a:prstGeom>
+          <a:noFill/>
+          <a:ln/>
+        </p:spPr>
+        <p:txBody>
+          <a:bodyPr wrap="square" lIns="0" tIns="0" rIns="0" bIns="0" rtlCol="0" anchor="ctr"/>
+          <a:lstStyle/>
+          <a:p>
+            <a:pPr algn="ctr" indent="0" marL="0">
+              <a:buNone/>
+            </a:pPr>
+            <a:r>
+              <a:rPr lang="en-US" sz="1100" b="1" dirty="0">
+                <a:solidFill>
+                  <a:srgbClr val="475569"/>
                 </a:solidFill>
                 <a:latin typeface="Trebuchet MS" pitchFamily="34" charset="0"/>
                 <a:ea typeface="Trebuchet MS" pitchFamily="34" charset="-122"/>
                 <a:cs typeface="Trebuchet MS" pitchFamily="34" charset="-120"/>
               </a:rPr>
-              <a:t>ic</a:t>
-            </a:r>
-            <a:endParaRPr lang="en-US" sz="1300" dirty="0"/>
-          </a:p>
-        </p:txBody>
-      </p:sp>
-      <p:sp>
-        <p:nvSpPr>
-          <p:cNvPr id="24" name="Text 22"/>
-          <p:cNvSpPr/>
-          <p:nvPr/>
-        </p:nvSpPr>
-        <p:spPr>
-          <a:xfrm>
-            <a:off x="6519672" y="2569464"/>
-            <a:ext cx="1828800" cy="201168"/>
-          </a:xfrm>
-          <a:prstGeom prst="rect">
-            <a:avLst/>
-          </a:prstGeom>
-          <a:noFill/>
-          <a:ln/>
-        </p:spPr>
-        <p:txBody>
-          <a:bodyPr wrap="square" lIns="0" tIns="0" rIns="0" bIns="0" rtlCol="0" anchor="t"/>
-          <a:lstStyle/>
-          <a:p>
-            <a:pPr algn="ctr" indent="0" marL="0">
-              <a:buNone/>
-            </a:pPr>
-            <a:r>
-              <a:rPr lang="en-US" sz="850" dirty="0">
-                <a:solidFill>
-                  <a:srgbClr val="475569"/>
+              <a:t>Syllables</a:t>
+            </a:r>
+            <a:endParaRPr lang="en-US" sz="1100" dirty="0"/>
+          </a:p>
+        </p:txBody>
+      </p:sp>
+      <p:sp>
+        <p:nvSpPr>
+          <p:cNvPr id="24" name="Shape 22"/>
+          <p:cNvSpPr/>
+          <p:nvPr/>
+        </p:nvSpPr>
+        <p:spPr>
+          <a:xfrm>
+            <a:off x="1874520" y="3273552"/>
+            <a:ext cx="6903720" cy="658368"/>
+          </a:xfrm>
+          <a:prstGeom prst="rect">
+            <a:avLst>
+              <a:gd name="adj" fmla="val 8333"/>
+            </a:avLst>
+          </a:prstGeom>
+          <a:solidFill>
+            <a:srgbClr val="F8FAFC"/>
+          </a:solidFill>
+          <a:ln w="12700">
+            <a:solidFill>
+              <a:srgbClr val="E2E8F0"/>
+            </a:solidFill>
+            <a:prstDash val="dash"/>
+          </a:ln>
+        </p:spPr>
+      </p:sp>
+      <p:sp>
+        <p:nvSpPr>
+          <p:cNvPr id="25" name="Text 23"/>
+          <p:cNvSpPr/>
+          <p:nvPr/>
+        </p:nvSpPr>
+        <p:spPr>
+          <a:xfrm>
+            <a:off x="1874520" y="3273552"/>
+            <a:ext cx="6903720" cy="658368"/>
+          </a:xfrm>
+          <a:prstGeom prst="rect">
+            <a:avLst/>
+          </a:prstGeom>
+          <a:noFill/>
+          <a:ln/>
+        </p:spPr>
+        <p:txBody>
+          <a:bodyPr wrap="square" rtlCol="0" anchor="ctr"/>
+          <a:lstStyle/>
+          <a:p>
+            <a:pPr algn="ctr" indent="0" marL="0">
+              <a:buNone/>
+            </a:pPr>
+            <a:r>
+              <a:rPr lang="en-US" sz="1100" i="1" dirty="0">
+                <a:solidFill>
+                  <a:srgbClr val="CBD5E1"/>
                 </a:solidFill>
                 <a:latin typeface="Calibri" pitchFamily="34" charset="0"/>
                 <a:ea typeface="Calibri" pitchFamily="34" charset="-122"/>
                 <a:cs typeface="Calibri" pitchFamily="34" charset="-120"/>
               </a:rPr>
-              <a:t>relating to</a:t>
-            </a:r>
-            <a:endParaRPr lang="en-US" sz="850" dirty="0"/>
-          </a:p>
-        </p:txBody>
-      </p:sp>
-      <p:sp>
-        <p:nvSpPr>
-          <p:cNvPr id="25" name="Shape 23"/>
-          <p:cNvSpPr/>
-          <p:nvPr/>
-        </p:nvSpPr>
-        <p:spPr>
-          <a:xfrm>
-            <a:off x="365760" y="3273552"/>
-            <a:ext cx="1371600" cy="658368"/>
+              <a:t>Write here...</a:t>
+            </a:r>
+            <a:endParaRPr lang="en-US" sz="1100" dirty="0"/>
+          </a:p>
+        </p:txBody>
+      </p:sp>
+      <p:sp>
+        <p:nvSpPr>
+          <p:cNvPr id="26" name="Shape 24"/>
+          <p:cNvSpPr/>
+          <p:nvPr/>
+        </p:nvSpPr>
+        <p:spPr>
+          <a:xfrm>
+            <a:off x="365760" y="4096512"/>
+            <a:ext cx="1371600" cy="804672"/>
           </a:xfrm>
           <a:prstGeom prst="rect">
             <a:avLst>
-              <a:gd name="adj" fmla="val 8333"/>
+              <a:gd name="adj" fmla="val 6818"/>
             </a:avLst>
           </a:prstGeom>
           <a:solidFill>
@@ -31227,14 +32069,14 @@
       </p:sp>
       <p:sp>
         <p:nvSpPr>
-          <p:cNvPr id="26" name="Text 24"/>
-          <p:cNvSpPr/>
-          <p:nvPr/>
-        </p:nvSpPr>
-        <p:spPr>
-          <a:xfrm>
-            <a:off x="365760" y="3273552"/>
-            <a:ext cx="1371600" cy="658368"/>
+          <p:cNvPr id="27" name="Text 25"/>
+          <p:cNvSpPr/>
+          <p:nvPr/>
+        </p:nvSpPr>
+        <p:spPr>
+          <a:xfrm>
+            <a:off x="365760" y="4096512"/>
+            <a:ext cx="1371600" cy="804672"/>
           </a:xfrm>
           <a:prstGeom prst="rect">
             <a:avLst/>
@@ -31258,7 +32100,7 @@
                 <a:ea typeface="Trebuchet MS" pitchFamily="34" charset="-122"/>
                 <a:cs typeface="Trebuchet MS" pitchFamily="34" charset="-120"/>
               </a:rPr>
-              <a:t>Syllables</a:t>
+              <a:t>Phonemes</a:t>
             </a:r>
             <a:endParaRPr lang="en-US" sz="1100" dirty="0"/>
           </a:p>
@@ -31266,80 +32108,14 @@
       </p:sp>
       <p:sp>
         <p:nvSpPr>
-          <p:cNvPr id="27" name="Shape 25"/>
-          <p:cNvSpPr/>
-          <p:nvPr/>
-        </p:nvSpPr>
-        <p:spPr>
-          <a:xfrm>
-            <a:off x="1874520" y="3273552"/>
-            <a:ext cx="6903720" cy="658368"/>
-          </a:xfrm>
-          <a:prstGeom prst="rect">
-            <a:avLst>
-              <a:gd name="adj" fmla="val 8333"/>
-            </a:avLst>
-          </a:prstGeom>
-          <a:solidFill>
-            <a:srgbClr val="F8FAFC"/>
-          </a:solidFill>
-          <a:ln w="12700">
-            <a:solidFill>
-              <a:srgbClr val="E2E8F0"/>
-            </a:solidFill>
-            <a:prstDash val="dash"/>
-          </a:ln>
-        </p:spPr>
-      </p:sp>
-      <p:sp>
-        <p:nvSpPr>
-          <p:cNvPr id="28" name="Text 26"/>
-          <p:cNvSpPr/>
-          <p:nvPr/>
-        </p:nvSpPr>
-        <p:spPr>
-          <a:xfrm>
-            <a:off x="1874520" y="3273552"/>
-            <a:ext cx="6903720" cy="658368"/>
-          </a:xfrm>
-          <a:prstGeom prst="rect">
-            <a:avLst/>
-          </a:prstGeom>
-          <a:noFill/>
-          <a:ln/>
-        </p:spPr>
-        <p:txBody>
-          <a:bodyPr wrap="square" rtlCol="0" anchor="ctr"/>
-          <a:lstStyle/>
-          <a:p>
-            <a:pPr algn="ctr" indent="0" marL="0">
-              <a:buNone/>
-            </a:pPr>
-            <a:r>
-              <a:rPr lang="en-US" sz="1100" i="1" dirty="0">
-                <a:solidFill>
-                  <a:srgbClr val="CBD5E1"/>
-                </a:solidFill>
-                <a:latin typeface="Calibri" pitchFamily="34" charset="0"/>
-                <a:ea typeface="Calibri" pitchFamily="34" charset="-122"/>
-                <a:cs typeface="Calibri" pitchFamily="34" charset="-120"/>
-              </a:rPr>
-              <a:t>Write here...</a:t>
-            </a:r>
-            <a:endParaRPr lang="en-US" sz="1100" dirty="0"/>
-          </a:p>
-        </p:txBody>
-      </p:sp>
-      <p:sp>
-        <p:nvSpPr>
-          <p:cNvPr id="29" name="Shape 27"/>
-          <p:cNvSpPr/>
-          <p:nvPr/>
-        </p:nvSpPr>
-        <p:spPr>
-          <a:xfrm>
-            <a:off x="365760" y="4096512"/>
-            <a:ext cx="1371600" cy="804672"/>
+          <p:cNvPr id="28" name="Shape 26"/>
+          <p:cNvSpPr/>
+          <p:nvPr/>
+        </p:nvSpPr>
+        <p:spPr>
+          <a:xfrm>
+            <a:off x="1874520" y="4096512"/>
+            <a:ext cx="6903720" cy="804672"/>
           </a:xfrm>
           <a:prstGeom prst="rect">
             <a:avLst>
@@ -31347,85 +32123,19 @@
             </a:avLst>
           </a:prstGeom>
           <a:solidFill>
-            <a:srgbClr val="E2E8F0"/>
+            <a:srgbClr val="F8FAFC"/>
           </a:solidFill>
           <a:ln w="12700">
             <a:solidFill>
               <a:srgbClr val="E2E8F0"/>
             </a:solidFill>
-            <a:prstDash val="solid"/>
-          </a:ln>
-        </p:spPr>
-      </p:sp>
-      <p:sp>
-        <p:nvSpPr>
-          <p:cNvPr id="30" name="Text 28"/>
-          <p:cNvSpPr/>
-          <p:nvPr/>
-        </p:nvSpPr>
-        <p:spPr>
-          <a:xfrm>
-            <a:off x="365760" y="4096512"/>
-            <a:ext cx="1371600" cy="804672"/>
-          </a:xfrm>
-          <a:prstGeom prst="rect">
-            <a:avLst/>
-          </a:prstGeom>
-          <a:noFill/>
-          <a:ln/>
-        </p:spPr>
-        <p:txBody>
-          <a:bodyPr wrap="square" lIns="0" tIns="0" rIns="0" bIns="0" rtlCol="0" anchor="ctr"/>
-          <a:lstStyle/>
-          <a:p>
-            <a:pPr algn="ctr" indent="0" marL="0">
-              <a:buNone/>
-            </a:pPr>
-            <a:r>
-              <a:rPr lang="en-US" sz="1100" b="1" dirty="0">
-                <a:solidFill>
-                  <a:srgbClr val="475569"/>
-                </a:solidFill>
-                <a:latin typeface="Trebuchet MS" pitchFamily="34" charset="0"/>
-                <a:ea typeface="Trebuchet MS" pitchFamily="34" charset="-122"/>
-                <a:cs typeface="Trebuchet MS" pitchFamily="34" charset="-120"/>
-              </a:rPr>
-              <a:t>Phonemes</a:t>
-            </a:r>
-            <a:endParaRPr lang="en-US" sz="1100" dirty="0"/>
-          </a:p>
-        </p:txBody>
-      </p:sp>
-      <p:sp>
-        <p:nvSpPr>
-          <p:cNvPr id="31" name="Shape 29"/>
-          <p:cNvSpPr/>
-          <p:nvPr/>
-        </p:nvSpPr>
-        <p:spPr>
-          <a:xfrm>
-            <a:off x="1874520" y="4096512"/>
-            <a:ext cx="6903720" cy="804672"/>
-          </a:xfrm>
-          <a:prstGeom prst="rect">
-            <a:avLst>
-              <a:gd name="adj" fmla="val 6818"/>
-            </a:avLst>
-          </a:prstGeom>
-          <a:solidFill>
-            <a:srgbClr val="F8FAFC"/>
-          </a:solidFill>
-          <a:ln w="12700">
-            <a:solidFill>
-              <a:srgbClr val="E2E8F0"/>
-            </a:solidFill>
             <a:prstDash val="dash"/>
           </a:ln>
         </p:spPr>
       </p:sp>
       <p:sp>
         <p:nvSpPr>
-          <p:cNvPr id="32" name="Text 30"/>
+          <p:cNvPr id="29" name="Text 27"/>
           <p:cNvSpPr/>
           <p:nvPr/>
         </p:nvSpPr>
@@ -31887,7 +32597,7 @@
                 <a:ea typeface="Trebuchet MS" pitchFamily="34" charset="-122"/>
                 <a:cs typeface="Trebuchet MS" pitchFamily="34" charset="-120"/>
               </a:rPr>
-              <a:t>supersonic</a:t>
+              <a:t>superpower</a:t>
             </a:r>
             <a:endParaRPr lang="en-US" sz="2800" dirty="0"/>
           </a:p>
@@ -31967,7 +32677,7 @@
         </p:nvSpPr>
         <p:spPr>
           <a:xfrm>
-            <a:off x="2221992" y="2258568"/>
+            <a:off x="2938272" y="2258568"/>
             <a:ext cx="1828800" cy="292608"/>
           </a:xfrm>
           <a:prstGeom prst="rect">
@@ -32001,7 +32711,7 @@
         </p:nvSpPr>
         <p:spPr>
           <a:xfrm>
-            <a:off x="2221992" y="2258568"/>
+            <a:off x="2938272" y="2258568"/>
             <a:ext cx="1828800" cy="292608"/>
           </a:xfrm>
           <a:prstGeom prst="rect">
@@ -32040,7 +32750,7 @@
         </p:nvSpPr>
         <p:spPr>
           <a:xfrm>
-            <a:off x="2221992" y="2569464"/>
+            <a:off x="2938272" y="2569464"/>
             <a:ext cx="1828800" cy="201168"/>
           </a:xfrm>
           <a:prstGeom prst="rect">
@@ -32079,7 +32789,7 @@
         </p:nvSpPr>
         <p:spPr>
           <a:xfrm>
-            <a:off x="4370832" y="2258568"/>
+            <a:off x="5803392" y="2258568"/>
             <a:ext cx="1828800" cy="292608"/>
           </a:xfrm>
           <a:prstGeom prst="rect">
@@ -32113,7 +32823,7 @@
         </p:nvSpPr>
         <p:spPr>
           <a:xfrm>
-            <a:off x="4370832" y="2258568"/>
+            <a:off x="5803392" y="2258568"/>
             <a:ext cx="1828800" cy="292608"/>
           </a:xfrm>
           <a:prstGeom prst="rect">
@@ -32138,7 +32848,7 @@
                 <a:ea typeface="Trebuchet MS" pitchFamily="34" charset="-122"/>
                 <a:cs typeface="Trebuchet MS" pitchFamily="34" charset="-120"/>
               </a:rPr>
-              <a:t>son</a:t>
+              <a:t>power</a:t>
             </a:r>
             <a:endParaRPr lang="en-US" sz="1300" dirty="0"/>
           </a:p>
@@ -32152,7 +32862,7 @@
         </p:nvSpPr>
         <p:spPr>
           <a:xfrm>
-            <a:off x="4370832" y="2569464"/>
+            <a:off x="5803392" y="2569464"/>
             <a:ext cx="1828800" cy="201168"/>
           </a:xfrm>
           <a:prstGeom prst="rect">
@@ -32177,7 +32887,7 @@
                 <a:ea typeface="Calibri" pitchFamily="34" charset="-122"/>
                 <a:cs typeface="Calibri" pitchFamily="34" charset="-120"/>
               </a:rPr>
-              <a:t>sound</a:t>
+              <a:t>strength or ability</a:t>
             </a:r>
             <a:endParaRPr lang="en-US" sz="850" dirty="0"/>
           </a:p>
@@ -32191,30 +32901,23 @@
         </p:nvSpPr>
         <p:spPr>
           <a:xfrm>
-            <a:off x="6519672" y="2258568"/>
-            <a:ext cx="1828800" cy="292608"/>
+            <a:off x="365760" y="3273552"/>
+            <a:ext cx="1371600" cy="658368"/>
           </a:xfrm>
           <a:prstGeom prst="rect">
             <a:avLst>
-              <a:gd name="adj" fmla="val 25000"/>
+              <a:gd name="adj" fmla="val 8333"/>
             </a:avLst>
           </a:prstGeom>
           <a:solidFill>
-            <a:srgbClr val="FCE7F3"/>
-          </a:solidFill>
-          <a:ln w="19050">
-            <a:solidFill>
-              <a:srgbClr val="DB2777"/>
-            </a:solidFill>
-            <a:prstDash val="solid"/>
-          </a:ln>
-          <a:effectLst>
-            <a:outerShdw sx="100000" sy="100000" kx="0" ky="0" algn="bl" rotWithShape="0" blurRad="101600" dist="38100" dir="8100000">
-              <a:srgbClr val="000000">
-                <a:alpha val="12000"/>
-              </a:srgbClr>
-            </a:outerShdw>
-          </a:effectLst>
+            <a:srgbClr val="E2E8F0"/>
+          </a:solidFill>
+          <a:ln w="12700">
+            <a:solidFill>
+              <a:srgbClr val="E2E8F0"/>
+            </a:solidFill>
+            <a:prstDash val="solid"/>
+          </a:ln>
         </p:spPr>
       </p:sp>
       <p:sp>
@@ -32225,86 +32928,47 @@
         </p:nvSpPr>
         <p:spPr>
           <a:xfrm>
-            <a:off x="6519672" y="2258568"/>
-            <a:ext cx="1828800" cy="292608"/>
-          </a:xfrm>
-          <a:prstGeom prst="rect">
-            <a:avLst/>
-          </a:prstGeom>
-          <a:noFill/>
-          <a:ln/>
-        </p:spPr>
-        <p:txBody>
-          <a:bodyPr wrap="square" lIns="0" tIns="0" rIns="0" bIns="0" rtlCol="0" anchor="ctr"/>
-          <a:lstStyle/>
-          <a:p>
-            <a:pPr algn="ctr" indent="0" marL="0">
-              <a:buNone/>
-            </a:pPr>
-            <a:r>
-              <a:rPr lang="en-US" sz="1300" b="1" dirty="0">
-                <a:solidFill>
-                  <a:srgbClr val="9D174D"/>
+            <a:off x="365760" y="3273552"/>
+            <a:ext cx="1371600" cy="658368"/>
+          </a:xfrm>
+          <a:prstGeom prst="rect">
+            <a:avLst/>
+          </a:prstGeom>
+          <a:noFill/>
+          <a:ln/>
+        </p:spPr>
+        <p:txBody>
+          <a:bodyPr wrap="square" lIns="0" tIns="0" rIns="0" bIns="0" rtlCol="0" anchor="ctr"/>
+          <a:lstStyle/>
+          <a:p>
+            <a:pPr algn="ctr" indent="0" marL="0">
+              <a:buNone/>
+            </a:pPr>
+            <a:r>
+              <a:rPr lang="en-US" sz="1100" b="1" dirty="0">
+                <a:solidFill>
+                  <a:srgbClr val="475569"/>
                 </a:solidFill>
                 <a:latin typeface="Trebuchet MS" pitchFamily="34" charset="0"/>
                 <a:ea typeface="Trebuchet MS" pitchFamily="34" charset="-122"/>
                 <a:cs typeface="Trebuchet MS" pitchFamily="34" charset="-120"/>
               </a:rPr>
-              <a:t>ic</a:t>
-            </a:r>
-            <a:endParaRPr lang="en-US" sz="1300" dirty="0"/>
-          </a:p>
-        </p:txBody>
-      </p:sp>
-      <p:sp>
-        <p:nvSpPr>
-          <p:cNvPr id="24" name="Text 22"/>
-          <p:cNvSpPr/>
-          <p:nvPr/>
-        </p:nvSpPr>
-        <p:spPr>
-          <a:xfrm>
-            <a:off x="6519672" y="2569464"/>
-            <a:ext cx="1828800" cy="201168"/>
-          </a:xfrm>
-          <a:prstGeom prst="rect">
-            <a:avLst/>
-          </a:prstGeom>
-          <a:noFill/>
-          <a:ln/>
-        </p:spPr>
-        <p:txBody>
-          <a:bodyPr wrap="square" lIns="0" tIns="0" rIns="0" bIns="0" rtlCol="0" anchor="t"/>
-          <a:lstStyle/>
-          <a:p>
-            <a:pPr algn="ctr" indent="0" marL="0">
-              <a:buNone/>
-            </a:pPr>
-            <a:r>
-              <a:rPr lang="en-US" sz="850" dirty="0">
-                <a:solidFill>
-                  <a:srgbClr val="475569"/>
-                </a:solidFill>
-                <a:latin typeface="Calibri" pitchFamily="34" charset="0"/>
-                <a:ea typeface="Calibri" pitchFamily="34" charset="-122"/>
-                <a:cs typeface="Calibri" pitchFamily="34" charset="-120"/>
-              </a:rPr>
-              <a:t>relating to</a:t>
-            </a:r>
-            <a:endParaRPr lang="en-US" sz="850" dirty="0"/>
-          </a:p>
-        </p:txBody>
-      </p:sp>
-      <p:sp>
-        <p:nvSpPr>
-          <p:cNvPr id="25" name="Shape 23"/>
-          <p:cNvSpPr/>
-          <p:nvPr/>
-        </p:nvSpPr>
-        <p:spPr>
-          <a:xfrm>
-            <a:off x="365760" y="3273552"/>
-            <a:ext cx="1371600" cy="658368"/>
+              <a:t>Syllables</a:t>
+            </a:r>
+            <a:endParaRPr lang="en-US" sz="1100" dirty="0"/>
+          </a:p>
+        </p:txBody>
+      </p:sp>
+      <p:sp>
+        <p:nvSpPr>
+          <p:cNvPr id="24" name="Shape 22"/>
+          <p:cNvSpPr/>
+          <p:nvPr/>
+        </p:nvSpPr>
+        <p:spPr>
+          <a:xfrm>
+            <a:off x="1874520" y="3273552"/>
+            <a:ext cx="6903720" cy="658368"/>
           </a:xfrm>
           <a:prstGeom prst="rect">
             <a:avLst>
@@ -32312,11 +32976,38 @@
             </a:avLst>
           </a:prstGeom>
           <a:solidFill>
-            <a:srgbClr val="E2E8F0"/>
-          </a:solidFill>
-          <a:ln w="12700">
-            <a:solidFill>
-              <a:srgbClr val="E2E8F0"/>
+            <a:srgbClr val="CCFBF1"/>
+          </a:solidFill>
+          <a:ln w="12700">
+            <a:solidFill>
+              <a:srgbClr val="0D9488"/>
+            </a:solidFill>
+            <a:prstDash val="solid"/>
+          </a:ln>
+        </p:spPr>
+      </p:sp>
+      <p:sp>
+        <p:nvSpPr>
+          <p:cNvPr id="25" name="Shape 23"/>
+          <p:cNvSpPr/>
+          <p:nvPr/>
+        </p:nvSpPr>
+        <p:spPr>
+          <a:xfrm>
+            <a:off x="1975104" y="3364992"/>
+            <a:ext cx="1554480" cy="475488"/>
+          </a:xfrm>
+          <a:prstGeom prst="rect">
+            <a:avLst>
+              <a:gd name="adj" fmla="val 9615"/>
+            </a:avLst>
+          </a:prstGeom>
+          <a:solidFill>
+            <a:srgbClr val="FFFFFF"/>
+          </a:solidFill>
+          <a:ln w="12700">
+            <a:solidFill>
+              <a:srgbClr val="0D9488"/>
             </a:solidFill>
             <a:prstDash val="solid"/>
           </a:ln>
@@ -32330,63 +33021,75 @@
         </p:nvSpPr>
         <p:spPr>
           <a:xfrm>
-            <a:off x="365760" y="3273552"/>
-            <a:ext cx="1371600" cy="658368"/>
-          </a:xfrm>
-          <a:prstGeom prst="rect">
-            <a:avLst/>
-          </a:prstGeom>
-          <a:noFill/>
-          <a:ln/>
-        </p:spPr>
-        <p:txBody>
-          <a:bodyPr wrap="square" lIns="0" tIns="0" rIns="0" bIns="0" rtlCol="0" anchor="ctr"/>
-          <a:lstStyle/>
-          <a:p>
-            <a:pPr algn="ctr" indent="0" marL="0">
-              <a:buNone/>
-            </a:pPr>
-            <a:r>
-              <a:rPr lang="en-US" sz="1100" b="1" dirty="0">
-                <a:solidFill>
-                  <a:srgbClr val="475569"/>
+            <a:off x="1975104" y="3364992"/>
+            <a:ext cx="1554480" cy="475488"/>
+          </a:xfrm>
+          <a:prstGeom prst="rect">
+            <a:avLst/>
+          </a:prstGeom>
+          <a:noFill/>
+          <a:ln/>
+        </p:spPr>
+        <p:txBody>
+          <a:bodyPr wrap="square" lIns="0" tIns="0" rIns="0" bIns="0" rtlCol="0" anchor="ctr"/>
+          <a:lstStyle/>
+          <a:p>
+            <a:pPr algn="ctr" indent="0" marL="0">
+              <a:buNone/>
+            </a:pPr>
+            <a:r>
+              <a:rPr lang="en-US" sz="1400" b="1" dirty="0">
+                <a:solidFill>
+                  <a:srgbClr val="0D9488"/>
                 </a:solidFill>
                 <a:latin typeface="Trebuchet MS" pitchFamily="34" charset="0"/>
                 <a:ea typeface="Trebuchet MS" pitchFamily="34" charset="-122"/>
                 <a:cs typeface="Trebuchet MS" pitchFamily="34" charset="-120"/>
               </a:rPr>
-              <a:t>Syllables</a:t>
-            </a:r>
-            <a:endParaRPr lang="en-US" sz="1100" dirty="0"/>
-          </a:p>
-        </p:txBody>
-      </p:sp>
-      <p:sp>
-        <p:nvSpPr>
-          <p:cNvPr id="27" name="Shape 25"/>
-          <p:cNvSpPr/>
-          <p:nvPr/>
-        </p:nvSpPr>
-        <p:spPr>
-          <a:xfrm>
-            <a:off x="1874520" y="3273552"/>
-            <a:ext cx="6903720" cy="658368"/>
-          </a:xfrm>
-          <a:prstGeom prst="rect">
-            <a:avLst>
-              <a:gd name="adj" fmla="val 8333"/>
-            </a:avLst>
-          </a:prstGeom>
-          <a:solidFill>
-            <a:srgbClr val="CCFBF1"/>
-          </a:solidFill>
-          <a:ln w="12700">
-            <a:solidFill>
-              <a:srgbClr val="0D9488"/>
-            </a:solidFill>
-            <a:prstDash val="solid"/>
-          </a:ln>
-        </p:spPr>
+              <a:t>su</a:t>
+            </a:r>
+            <a:endParaRPr lang="en-US" sz="1400" dirty="0"/>
+          </a:p>
+        </p:txBody>
+      </p:sp>
+      <p:sp>
+        <p:nvSpPr>
+          <p:cNvPr id="27" name="Text 25"/>
+          <p:cNvSpPr/>
+          <p:nvPr/>
+        </p:nvSpPr>
+        <p:spPr>
+          <a:xfrm>
+            <a:off x="3529584" y="3364992"/>
+            <a:ext cx="73152" cy="475488"/>
+          </a:xfrm>
+          <a:prstGeom prst="rect">
+            <a:avLst/>
+          </a:prstGeom>
+          <a:noFill/>
+          <a:ln/>
+        </p:spPr>
+        <p:txBody>
+          <a:bodyPr wrap="square" lIns="0" tIns="0" rIns="0" bIns="0" rtlCol="0" anchor="ctr"/>
+          <a:lstStyle/>
+          <a:p>
+            <a:pPr algn="ctr" indent="0" marL="0">
+              <a:buNone/>
+            </a:pPr>
+            <a:r>
+              <a:rPr lang="en-US" sz="1600" b="1" dirty="0">
+                <a:solidFill>
+                  <a:srgbClr val="0D9488"/>
+                </a:solidFill>
+                <a:latin typeface="Trebuchet MS" pitchFamily="34" charset="0"/>
+                <a:ea typeface="Trebuchet MS" pitchFamily="34" charset="-122"/>
+                <a:cs typeface="Trebuchet MS" pitchFamily="34" charset="-120"/>
+              </a:rPr>
+              <a:t>·</a:t>
+            </a:r>
+            <a:endParaRPr lang="en-US" sz="1600" dirty="0"/>
+          </a:p>
+        </p:txBody>
       </p:sp>
       <p:sp>
         <p:nvSpPr>
@@ -32396,7 +33099,7 @@
         </p:nvSpPr>
         <p:spPr>
           <a:xfrm>
-            <a:off x="1975104" y="3364992"/>
+            <a:off x="3602736" y="3364992"/>
             <a:ext cx="1554480" cy="475488"/>
           </a:xfrm>
           <a:prstGeom prst="rect">
@@ -32423,7 +33126,7 @@
         </p:nvSpPr>
         <p:spPr>
           <a:xfrm>
-            <a:off x="1975104" y="3364992"/>
+            <a:off x="3602736" y="3364992"/>
             <a:ext cx="1554480" cy="475488"/>
           </a:xfrm>
           <a:prstGeom prst="rect">
@@ -32448,7 +33151,7 @@
                 <a:ea typeface="Trebuchet MS" pitchFamily="34" charset="-122"/>
                 <a:cs typeface="Trebuchet MS" pitchFamily="34" charset="-120"/>
               </a:rPr>
-              <a:t>su</a:t>
+              <a:t>per</a:t>
             </a:r>
             <a:endParaRPr lang="en-US" sz="1400" dirty="0"/>
           </a:p>
@@ -32462,7 +33165,7 @@
         </p:nvSpPr>
         <p:spPr>
           <a:xfrm>
-            <a:off x="3529584" y="3364992"/>
+            <a:off x="5157216" y="3364992"/>
             <a:ext cx="73152" cy="475488"/>
           </a:xfrm>
           <a:prstGeom prst="rect">
@@ -32501,7 +33204,7 @@
         </p:nvSpPr>
         <p:spPr>
           <a:xfrm>
-            <a:off x="3602736" y="3364992"/>
+            <a:off x="5230368" y="3364992"/>
             <a:ext cx="1554480" cy="475488"/>
           </a:xfrm>
           <a:prstGeom prst="rect">
@@ -32528,7 +33231,7 @@
         </p:nvSpPr>
         <p:spPr>
           <a:xfrm>
-            <a:off x="3602736" y="3364992"/>
+            <a:off x="5230368" y="3364992"/>
             <a:ext cx="1554480" cy="475488"/>
           </a:xfrm>
           <a:prstGeom prst="rect">
@@ -32553,7 +33256,7 @@
                 <a:ea typeface="Trebuchet MS" pitchFamily="34" charset="-122"/>
                 <a:cs typeface="Trebuchet MS" pitchFamily="34" charset="-120"/>
               </a:rPr>
-              <a:t>per</a:t>
+              <a:t>pow</a:t>
             </a:r>
             <a:endParaRPr lang="en-US" sz="1400" dirty="0"/>
           </a:p>
@@ -32567,7 +33270,7 @@
         </p:nvSpPr>
         <p:spPr>
           <a:xfrm>
-            <a:off x="5157216" y="3364992"/>
+            <a:off x="6784848" y="3364992"/>
             <a:ext cx="73152" cy="475488"/>
           </a:xfrm>
           <a:prstGeom prst="rect">
@@ -32606,7 +33309,7 @@
         </p:nvSpPr>
         <p:spPr>
           <a:xfrm>
-            <a:off x="5230368" y="3364992"/>
+            <a:off x="6858000" y="3364992"/>
             <a:ext cx="1554480" cy="475488"/>
           </a:xfrm>
           <a:prstGeom prst="rect">
@@ -32633,7 +33336,7 @@
         </p:nvSpPr>
         <p:spPr>
           <a:xfrm>
-            <a:off x="5230368" y="3364992"/>
+            <a:off x="6858000" y="3364992"/>
             <a:ext cx="1554480" cy="475488"/>
           </a:xfrm>
           <a:prstGeom prst="rect">
@@ -32658,7 +33361,7 @@
                 <a:ea typeface="Trebuchet MS" pitchFamily="34" charset="-122"/>
                 <a:cs typeface="Trebuchet MS" pitchFamily="34" charset="-120"/>
               </a:rPr>
-              <a:t>son</a:t>
+              <a:t>er</a:t>
             </a:r>
             <a:endParaRPr lang="en-US" sz="1400" dirty="0"/>
           </a:p>
@@ -32666,119 +33369,80 @@
       </p:sp>
       <p:sp>
         <p:nvSpPr>
-          <p:cNvPr id="36" name="Text 34"/>
-          <p:cNvSpPr/>
-          <p:nvPr/>
-        </p:nvSpPr>
-        <p:spPr>
-          <a:xfrm>
-            <a:off x="6784848" y="3364992"/>
-            <a:ext cx="73152" cy="475488"/>
-          </a:xfrm>
-          <a:prstGeom prst="rect">
-            <a:avLst/>
-          </a:prstGeom>
-          <a:noFill/>
-          <a:ln/>
-        </p:spPr>
-        <p:txBody>
-          <a:bodyPr wrap="square" lIns="0" tIns="0" rIns="0" bIns="0" rtlCol="0" anchor="ctr"/>
-          <a:lstStyle/>
-          <a:p>
-            <a:pPr algn="ctr" indent="0" marL="0">
-              <a:buNone/>
-            </a:pPr>
-            <a:r>
-              <a:rPr lang="en-US" sz="1600" b="1" dirty="0">
-                <a:solidFill>
-                  <a:srgbClr val="0D9488"/>
+          <p:cNvPr id="36" name="Shape 34"/>
+          <p:cNvSpPr/>
+          <p:nvPr/>
+        </p:nvSpPr>
+        <p:spPr>
+          <a:xfrm>
+            <a:off x="365760" y="4096512"/>
+            <a:ext cx="1371600" cy="804672"/>
+          </a:xfrm>
+          <a:prstGeom prst="rect">
+            <a:avLst>
+              <a:gd name="adj" fmla="val 6818"/>
+            </a:avLst>
+          </a:prstGeom>
+          <a:solidFill>
+            <a:srgbClr val="E2E8F0"/>
+          </a:solidFill>
+          <a:ln w="12700">
+            <a:solidFill>
+              <a:srgbClr val="E2E8F0"/>
+            </a:solidFill>
+            <a:prstDash val="solid"/>
+          </a:ln>
+        </p:spPr>
+      </p:sp>
+      <p:sp>
+        <p:nvSpPr>
+          <p:cNvPr id="37" name="Text 35"/>
+          <p:cNvSpPr/>
+          <p:nvPr/>
+        </p:nvSpPr>
+        <p:spPr>
+          <a:xfrm>
+            <a:off x="365760" y="4096512"/>
+            <a:ext cx="1371600" cy="804672"/>
+          </a:xfrm>
+          <a:prstGeom prst="rect">
+            <a:avLst/>
+          </a:prstGeom>
+          <a:noFill/>
+          <a:ln/>
+        </p:spPr>
+        <p:txBody>
+          <a:bodyPr wrap="square" lIns="0" tIns="0" rIns="0" bIns="0" rtlCol="0" anchor="ctr"/>
+          <a:lstStyle/>
+          <a:p>
+            <a:pPr algn="ctr" indent="0" marL="0">
+              <a:buNone/>
+            </a:pPr>
+            <a:r>
+              <a:rPr lang="en-US" sz="1100" b="1" dirty="0">
+                <a:solidFill>
+                  <a:srgbClr val="475569"/>
                 </a:solidFill>
                 <a:latin typeface="Trebuchet MS" pitchFamily="34" charset="0"/>
                 <a:ea typeface="Trebuchet MS" pitchFamily="34" charset="-122"/>
                 <a:cs typeface="Trebuchet MS" pitchFamily="34" charset="-120"/>
               </a:rPr>
-              <a:t>·</a:t>
-            </a:r>
-            <a:endParaRPr lang="en-US" sz="1600" dirty="0"/>
-          </a:p>
-        </p:txBody>
-      </p:sp>
-      <p:sp>
-        <p:nvSpPr>
-          <p:cNvPr id="37" name="Shape 35"/>
-          <p:cNvSpPr/>
-          <p:nvPr/>
-        </p:nvSpPr>
-        <p:spPr>
-          <a:xfrm>
-            <a:off x="6858000" y="3364992"/>
-            <a:ext cx="1554480" cy="475488"/>
-          </a:xfrm>
-          <a:prstGeom prst="rect">
-            <a:avLst>
-              <a:gd name="adj" fmla="val 9615"/>
-            </a:avLst>
-          </a:prstGeom>
-          <a:solidFill>
-            <a:srgbClr val="FFFFFF"/>
-          </a:solidFill>
-          <a:ln w="12700">
-            <a:solidFill>
-              <a:srgbClr val="0D9488"/>
-            </a:solidFill>
-            <a:prstDash val="solid"/>
-          </a:ln>
-        </p:spPr>
-      </p:sp>
-      <p:sp>
-        <p:nvSpPr>
-          <p:cNvPr id="38" name="Text 36"/>
-          <p:cNvSpPr/>
-          <p:nvPr/>
-        </p:nvSpPr>
-        <p:spPr>
-          <a:xfrm>
-            <a:off x="6858000" y="3364992"/>
-            <a:ext cx="1554480" cy="475488"/>
-          </a:xfrm>
-          <a:prstGeom prst="rect">
-            <a:avLst/>
-          </a:prstGeom>
-          <a:noFill/>
-          <a:ln/>
-        </p:spPr>
-        <p:txBody>
-          <a:bodyPr wrap="square" lIns="0" tIns="0" rIns="0" bIns="0" rtlCol="0" anchor="ctr"/>
-          <a:lstStyle/>
-          <a:p>
-            <a:pPr algn="ctr" indent="0" marL="0">
-              <a:buNone/>
-            </a:pPr>
-            <a:r>
-              <a:rPr lang="en-US" sz="1400" b="1" dirty="0">
-                <a:solidFill>
-                  <a:srgbClr val="0D9488"/>
-                </a:solidFill>
-                <a:latin typeface="Trebuchet MS" pitchFamily="34" charset="0"/>
-                <a:ea typeface="Trebuchet MS" pitchFamily="34" charset="-122"/>
-                <a:cs typeface="Trebuchet MS" pitchFamily="34" charset="-120"/>
-              </a:rPr>
-              <a:t>ic</a:t>
-            </a:r>
-            <a:endParaRPr lang="en-US" sz="1400" dirty="0"/>
-          </a:p>
-        </p:txBody>
-      </p:sp>
-      <p:sp>
-        <p:nvSpPr>
-          <p:cNvPr id="39" name="Shape 37"/>
-          <p:cNvSpPr/>
-          <p:nvPr/>
-        </p:nvSpPr>
-        <p:spPr>
-          <a:xfrm>
-            <a:off x="365760" y="4096512"/>
-            <a:ext cx="1371600" cy="804672"/>
+              <a:t>Phonemes</a:t>
+            </a:r>
+            <a:endParaRPr lang="en-US" sz="1100" dirty="0"/>
+          </a:p>
+        </p:txBody>
+      </p:sp>
+      <p:sp>
+        <p:nvSpPr>
+          <p:cNvPr id="38" name="Shape 36"/>
+          <p:cNvSpPr/>
+          <p:nvPr/>
+        </p:nvSpPr>
+        <p:spPr>
+          <a:xfrm>
+            <a:off x="1874520" y="4096512"/>
+            <a:ext cx="6903720" cy="804672"/>
           </a:xfrm>
           <a:prstGeom prst="rect">
             <a:avLst>
@@ -32786,85 +33450,19 @@
             </a:avLst>
           </a:prstGeom>
           <a:solidFill>
-            <a:srgbClr val="E2E8F0"/>
+            <a:srgbClr val="F8FAFC"/>
           </a:solidFill>
           <a:ln w="12700">
             <a:solidFill>
               <a:srgbClr val="E2E8F0"/>
             </a:solidFill>
-            <a:prstDash val="solid"/>
-          </a:ln>
-        </p:spPr>
-      </p:sp>
-      <p:sp>
-        <p:nvSpPr>
-          <p:cNvPr id="40" name="Text 38"/>
-          <p:cNvSpPr/>
-          <p:nvPr/>
-        </p:nvSpPr>
-        <p:spPr>
-          <a:xfrm>
-            <a:off x="365760" y="4096512"/>
-            <a:ext cx="1371600" cy="804672"/>
-          </a:xfrm>
-          <a:prstGeom prst="rect">
-            <a:avLst/>
-          </a:prstGeom>
-          <a:noFill/>
-          <a:ln/>
-        </p:spPr>
-        <p:txBody>
-          <a:bodyPr wrap="square" lIns="0" tIns="0" rIns="0" bIns="0" rtlCol="0" anchor="ctr"/>
-          <a:lstStyle/>
-          <a:p>
-            <a:pPr algn="ctr" indent="0" marL="0">
-              <a:buNone/>
-            </a:pPr>
-            <a:r>
-              <a:rPr lang="en-US" sz="1100" b="1" dirty="0">
-                <a:solidFill>
-                  <a:srgbClr val="475569"/>
-                </a:solidFill>
-                <a:latin typeface="Trebuchet MS" pitchFamily="34" charset="0"/>
-                <a:ea typeface="Trebuchet MS" pitchFamily="34" charset="-122"/>
-                <a:cs typeface="Trebuchet MS" pitchFamily="34" charset="-120"/>
-              </a:rPr>
-              <a:t>Phonemes</a:t>
-            </a:r>
-            <a:endParaRPr lang="en-US" sz="1100" dirty="0"/>
-          </a:p>
-        </p:txBody>
-      </p:sp>
-      <p:sp>
-        <p:nvSpPr>
-          <p:cNvPr id="41" name="Shape 39"/>
-          <p:cNvSpPr/>
-          <p:nvPr/>
-        </p:nvSpPr>
-        <p:spPr>
-          <a:xfrm>
-            <a:off x="1874520" y="4096512"/>
-            <a:ext cx="6903720" cy="804672"/>
-          </a:xfrm>
-          <a:prstGeom prst="rect">
-            <a:avLst>
-              <a:gd name="adj" fmla="val 6818"/>
-            </a:avLst>
-          </a:prstGeom>
-          <a:solidFill>
-            <a:srgbClr val="F8FAFC"/>
-          </a:solidFill>
-          <a:ln w="12700">
-            <a:solidFill>
-              <a:srgbClr val="E2E8F0"/>
-            </a:solidFill>
             <a:prstDash val="dash"/>
           </a:ln>
         </p:spPr>
       </p:sp>
       <p:sp>
         <p:nvSpPr>
-          <p:cNvPr id="42" name="Text 40"/>
+          <p:cNvPr id="39" name="Text 37"/>
           <p:cNvSpPr/>
           <p:nvPr/>
         </p:nvSpPr>
@@ -33326,7 +33924,7 @@
                 <a:ea typeface="Trebuchet MS" pitchFamily="34" charset="-122"/>
                 <a:cs typeface="Trebuchet MS" pitchFamily="34" charset="-120"/>
               </a:rPr>
-              <a:t>supersonic</a:t>
+              <a:t>superpower</a:t>
             </a:r>
             <a:endParaRPr lang="en-US" sz="2800" dirty="0"/>
           </a:p>
@@ -33406,7 +34004,7 @@
         </p:nvSpPr>
         <p:spPr>
           <a:xfrm>
-            <a:off x="2221992" y="2258568"/>
+            <a:off x="2938272" y="2258568"/>
             <a:ext cx="1828800" cy="292608"/>
           </a:xfrm>
           <a:prstGeom prst="rect">
@@ -33440,7 +34038,7 @@
         </p:nvSpPr>
         <p:spPr>
           <a:xfrm>
-            <a:off x="2221992" y="2258568"/>
+            <a:off x="2938272" y="2258568"/>
             <a:ext cx="1828800" cy="292608"/>
           </a:xfrm>
           <a:prstGeom prst="rect">
@@ -33479,7 +34077,7 @@
         </p:nvSpPr>
         <p:spPr>
           <a:xfrm>
-            <a:off x="2221992" y="2569464"/>
+            <a:off x="2938272" y="2569464"/>
             <a:ext cx="1828800" cy="201168"/>
           </a:xfrm>
           <a:prstGeom prst="rect">
@@ -33518,7 +34116,7 @@
         </p:nvSpPr>
         <p:spPr>
           <a:xfrm>
-            <a:off x="4370832" y="2258568"/>
+            <a:off x="5803392" y="2258568"/>
             <a:ext cx="1828800" cy="292608"/>
           </a:xfrm>
           <a:prstGeom prst="rect">
@@ -33552,7 +34150,7 @@
         </p:nvSpPr>
         <p:spPr>
           <a:xfrm>
-            <a:off x="4370832" y="2258568"/>
+            <a:off x="5803392" y="2258568"/>
             <a:ext cx="1828800" cy="292608"/>
           </a:xfrm>
           <a:prstGeom prst="rect">
@@ -33577,7 +34175,7 @@
                 <a:ea typeface="Trebuchet MS" pitchFamily="34" charset="-122"/>
                 <a:cs typeface="Trebuchet MS" pitchFamily="34" charset="-120"/>
               </a:rPr>
-              <a:t>son</a:t>
+              <a:t>power</a:t>
             </a:r>
             <a:endParaRPr lang="en-US" sz="1300" dirty="0"/>
           </a:p>
@@ -33591,7 +34189,7 @@
         </p:nvSpPr>
         <p:spPr>
           <a:xfrm>
-            <a:off x="4370832" y="2569464"/>
+            <a:off x="5803392" y="2569464"/>
             <a:ext cx="1828800" cy="201168"/>
           </a:xfrm>
           <a:prstGeom prst="rect">
@@ -33616,7 +34214,7 @@
                 <a:ea typeface="Calibri" pitchFamily="34" charset="-122"/>
                 <a:cs typeface="Calibri" pitchFamily="34" charset="-120"/>
               </a:rPr>
-              <a:t>sound</a:t>
+              <a:t>strength or ability</a:t>
             </a:r>
             <a:endParaRPr lang="en-US" sz="850" dirty="0"/>
           </a:p>
@@ -33630,30 +34228,23 @@
         </p:nvSpPr>
         <p:spPr>
           <a:xfrm>
-            <a:off x="6519672" y="2258568"/>
-            <a:ext cx="1828800" cy="292608"/>
+            <a:off x="365760" y="3273552"/>
+            <a:ext cx="1371600" cy="658368"/>
           </a:xfrm>
           <a:prstGeom prst="rect">
             <a:avLst>
-              <a:gd name="adj" fmla="val 25000"/>
+              <a:gd name="adj" fmla="val 8333"/>
             </a:avLst>
           </a:prstGeom>
           <a:solidFill>
-            <a:srgbClr val="FCE7F3"/>
-          </a:solidFill>
-          <a:ln w="19050">
-            <a:solidFill>
-              <a:srgbClr val="DB2777"/>
-            </a:solidFill>
-            <a:prstDash val="solid"/>
-          </a:ln>
-          <a:effectLst>
-            <a:outerShdw sx="100000" sy="100000" kx="0" ky="0" algn="bl" rotWithShape="0" blurRad="101600" dist="38100" dir="8100000">
-              <a:srgbClr val="000000">
-                <a:alpha val="12000"/>
-              </a:srgbClr>
-            </a:outerShdw>
-          </a:effectLst>
+            <a:srgbClr val="E2E8F0"/>
+          </a:solidFill>
+          <a:ln w="12700">
+            <a:solidFill>
+              <a:srgbClr val="E2E8F0"/>
+            </a:solidFill>
+            <a:prstDash val="solid"/>
+          </a:ln>
         </p:spPr>
       </p:sp>
       <p:sp>
@@ -33664,86 +34255,47 @@
         </p:nvSpPr>
         <p:spPr>
           <a:xfrm>
-            <a:off x="6519672" y="2258568"/>
-            <a:ext cx="1828800" cy="292608"/>
-          </a:xfrm>
-          <a:prstGeom prst="rect">
-            <a:avLst/>
-          </a:prstGeom>
-          <a:noFill/>
-          <a:ln/>
-        </p:spPr>
-        <p:txBody>
-          <a:bodyPr wrap="square" lIns="0" tIns="0" rIns="0" bIns="0" rtlCol="0" anchor="ctr"/>
-          <a:lstStyle/>
-          <a:p>
-            <a:pPr algn="ctr" indent="0" marL="0">
-              <a:buNone/>
-            </a:pPr>
-            <a:r>
-              <a:rPr lang="en-US" sz="1300" b="1" dirty="0">
-                <a:solidFill>
-                  <a:srgbClr val="9D174D"/>
+            <a:off x="365760" y="3273552"/>
+            <a:ext cx="1371600" cy="658368"/>
+          </a:xfrm>
+          <a:prstGeom prst="rect">
+            <a:avLst/>
+          </a:prstGeom>
+          <a:noFill/>
+          <a:ln/>
+        </p:spPr>
+        <p:txBody>
+          <a:bodyPr wrap="square" lIns="0" tIns="0" rIns="0" bIns="0" rtlCol="0" anchor="ctr"/>
+          <a:lstStyle/>
+          <a:p>
+            <a:pPr algn="ctr" indent="0" marL="0">
+              <a:buNone/>
+            </a:pPr>
+            <a:r>
+              <a:rPr lang="en-US" sz="1100" b="1" dirty="0">
+                <a:solidFill>
+                  <a:srgbClr val="475569"/>
                 </a:solidFill>
                 <a:latin typeface="Trebuchet MS" pitchFamily="34" charset="0"/>
                 <a:ea typeface="Trebuchet MS" pitchFamily="34" charset="-122"/>
                 <a:cs typeface="Trebuchet MS" pitchFamily="34" charset="-120"/>
               </a:rPr>
-              <a:t>ic</a:t>
-            </a:r>
-            <a:endParaRPr lang="en-US" sz="1300" dirty="0"/>
-          </a:p>
-        </p:txBody>
-      </p:sp>
-      <p:sp>
-        <p:nvSpPr>
-          <p:cNvPr id="24" name="Text 22"/>
-          <p:cNvSpPr/>
-          <p:nvPr/>
-        </p:nvSpPr>
-        <p:spPr>
-          <a:xfrm>
-            <a:off x="6519672" y="2569464"/>
-            <a:ext cx="1828800" cy="201168"/>
-          </a:xfrm>
-          <a:prstGeom prst="rect">
-            <a:avLst/>
-          </a:prstGeom>
-          <a:noFill/>
-          <a:ln/>
-        </p:spPr>
-        <p:txBody>
-          <a:bodyPr wrap="square" lIns="0" tIns="0" rIns="0" bIns="0" rtlCol="0" anchor="t"/>
-          <a:lstStyle/>
-          <a:p>
-            <a:pPr algn="ctr" indent="0" marL="0">
-              <a:buNone/>
-            </a:pPr>
-            <a:r>
-              <a:rPr lang="en-US" sz="850" dirty="0">
-                <a:solidFill>
-                  <a:srgbClr val="475569"/>
-                </a:solidFill>
-                <a:latin typeface="Calibri" pitchFamily="34" charset="0"/>
-                <a:ea typeface="Calibri" pitchFamily="34" charset="-122"/>
-                <a:cs typeface="Calibri" pitchFamily="34" charset="-120"/>
-              </a:rPr>
-              <a:t>relating to</a:t>
-            </a:r>
-            <a:endParaRPr lang="en-US" sz="850" dirty="0"/>
-          </a:p>
-        </p:txBody>
-      </p:sp>
-      <p:sp>
-        <p:nvSpPr>
-          <p:cNvPr id="25" name="Shape 23"/>
-          <p:cNvSpPr/>
-          <p:nvPr/>
-        </p:nvSpPr>
-        <p:spPr>
-          <a:xfrm>
-            <a:off x="365760" y="3273552"/>
-            <a:ext cx="1371600" cy="658368"/>
+              <a:t>Syllables</a:t>
+            </a:r>
+            <a:endParaRPr lang="en-US" sz="1100" dirty="0"/>
+          </a:p>
+        </p:txBody>
+      </p:sp>
+      <p:sp>
+        <p:nvSpPr>
+          <p:cNvPr id="24" name="Shape 22"/>
+          <p:cNvSpPr/>
+          <p:nvPr/>
+        </p:nvSpPr>
+        <p:spPr>
+          <a:xfrm>
+            <a:off x="1874520" y="3273552"/>
+            <a:ext cx="6903720" cy="658368"/>
           </a:xfrm>
           <a:prstGeom prst="rect">
             <a:avLst>
@@ -33751,11 +34303,38 @@
             </a:avLst>
           </a:prstGeom>
           <a:solidFill>
-            <a:srgbClr val="E2E8F0"/>
-          </a:solidFill>
-          <a:ln w="12700">
-            <a:solidFill>
-              <a:srgbClr val="E2E8F0"/>
+            <a:srgbClr val="CCFBF1"/>
+          </a:solidFill>
+          <a:ln w="12700">
+            <a:solidFill>
+              <a:srgbClr val="0D9488"/>
+            </a:solidFill>
+            <a:prstDash val="solid"/>
+          </a:ln>
+        </p:spPr>
+      </p:sp>
+      <p:sp>
+        <p:nvSpPr>
+          <p:cNvPr id="25" name="Shape 23"/>
+          <p:cNvSpPr/>
+          <p:nvPr/>
+        </p:nvSpPr>
+        <p:spPr>
+          <a:xfrm>
+            <a:off x="1975104" y="3364992"/>
+            <a:ext cx="1554480" cy="475488"/>
+          </a:xfrm>
+          <a:prstGeom prst="rect">
+            <a:avLst>
+              <a:gd name="adj" fmla="val 9615"/>
+            </a:avLst>
+          </a:prstGeom>
+          <a:solidFill>
+            <a:srgbClr val="FFFFFF"/>
+          </a:solidFill>
+          <a:ln w="12700">
+            <a:solidFill>
+              <a:srgbClr val="0D9488"/>
             </a:solidFill>
             <a:prstDash val="solid"/>
           </a:ln>
@@ -33769,32 +34348,413 @@
         </p:nvSpPr>
         <p:spPr>
           <a:xfrm>
-            <a:off x="365760" y="3273552"/>
-            <a:ext cx="1371600" cy="658368"/>
-          </a:xfrm>
-          <a:prstGeom prst="rect">
-            <a:avLst/>
-          </a:prstGeom>
-          <a:noFill/>
-          <a:ln/>
-        </p:spPr>
-        <p:txBody>
-          <a:bodyPr wrap="square" lIns="0" tIns="0" rIns="0" bIns="0" rtlCol="0" anchor="ctr"/>
-          <a:lstStyle/>
-          <a:p>
-            <a:pPr algn="ctr" indent="0" marL="0">
-              <a:buNone/>
-            </a:pPr>
-            <a:r>
-              <a:rPr lang="en-US" sz="1100" b="1" dirty="0">
-                <a:solidFill>
-                  <a:srgbClr val="475569"/>
+            <a:off x="1975104" y="3364992"/>
+            <a:ext cx="1554480" cy="475488"/>
+          </a:xfrm>
+          <a:prstGeom prst="rect">
+            <a:avLst/>
+          </a:prstGeom>
+          <a:noFill/>
+          <a:ln/>
+        </p:spPr>
+        <p:txBody>
+          <a:bodyPr wrap="square" lIns="0" tIns="0" rIns="0" bIns="0" rtlCol="0" anchor="ctr"/>
+          <a:lstStyle/>
+          <a:p>
+            <a:pPr algn="ctr" indent="0" marL="0">
+              <a:buNone/>
+            </a:pPr>
+            <a:r>
+              <a:rPr lang="en-US" sz="1400" b="1" dirty="0">
+                <a:solidFill>
+                  <a:srgbClr val="0D9488"/>
                 </a:solidFill>
                 <a:latin typeface="Trebuchet MS" pitchFamily="34" charset="0"/>
                 <a:ea typeface="Trebuchet MS" pitchFamily="34" charset="-122"/>
                 <a:cs typeface="Trebuchet MS" pitchFamily="34" charset="-120"/>
               </a:rPr>
-              <a:t>Syllables</a:t>
+              <a:t>su</a:t>
+            </a:r>
+            <a:endParaRPr lang="en-US" sz="1400" dirty="0"/>
+          </a:p>
+        </p:txBody>
+      </p:sp>
+      <p:sp>
+        <p:nvSpPr>
+          <p:cNvPr id="27" name="Text 25"/>
+          <p:cNvSpPr/>
+          <p:nvPr/>
+        </p:nvSpPr>
+        <p:spPr>
+          <a:xfrm>
+            <a:off x="3529584" y="3364992"/>
+            <a:ext cx="73152" cy="475488"/>
+          </a:xfrm>
+          <a:prstGeom prst="rect">
+            <a:avLst/>
+          </a:prstGeom>
+          <a:noFill/>
+          <a:ln/>
+        </p:spPr>
+        <p:txBody>
+          <a:bodyPr wrap="square" lIns="0" tIns="0" rIns="0" bIns="0" rtlCol="0" anchor="ctr"/>
+          <a:lstStyle/>
+          <a:p>
+            <a:pPr algn="ctr" indent="0" marL="0">
+              <a:buNone/>
+            </a:pPr>
+            <a:r>
+              <a:rPr lang="en-US" sz="1600" b="1" dirty="0">
+                <a:solidFill>
+                  <a:srgbClr val="0D9488"/>
+                </a:solidFill>
+                <a:latin typeface="Trebuchet MS" pitchFamily="34" charset="0"/>
+                <a:ea typeface="Trebuchet MS" pitchFamily="34" charset="-122"/>
+                <a:cs typeface="Trebuchet MS" pitchFamily="34" charset="-120"/>
+              </a:rPr>
+              <a:t>·</a:t>
+            </a:r>
+            <a:endParaRPr lang="en-US" sz="1600" dirty="0"/>
+          </a:p>
+        </p:txBody>
+      </p:sp>
+      <p:sp>
+        <p:nvSpPr>
+          <p:cNvPr id="28" name="Shape 26"/>
+          <p:cNvSpPr/>
+          <p:nvPr/>
+        </p:nvSpPr>
+        <p:spPr>
+          <a:xfrm>
+            <a:off x="3602736" y="3364992"/>
+            <a:ext cx="1554480" cy="475488"/>
+          </a:xfrm>
+          <a:prstGeom prst="rect">
+            <a:avLst>
+              <a:gd name="adj" fmla="val 9615"/>
+            </a:avLst>
+          </a:prstGeom>
+          <a:solidFill>
+            <a:srgbClr val="FFFFFF"/>
+          </a:solidFill>
+          <a:ln w="12700">
+            <a:solidFill>
+              <a:srgbClr val="0D9488"/>
+            </a:solidFill>
+            <a:prstDash val="solid"/>
+          </a:ln>
+        </p:spPr>
+      </p:sp>
+      <p:sp>
+        <p:nvSpPr>
+          <p:cNvPr id="29" name="Text 27"/>
+          <p:cNvSpPr/>
+          <p:nvPr/>
+        </p:nvSpPr>
+        <p:spPr>
+          <a:xfrm>
+            <a:off x="3602736" y="3364992"/>
+            <a:ext cx="1554480" cy="475488"/>
+          </a:xfrm>
+          <a:prstGeom prst="rect">
+            <a:avLst/>
+          </a:prstGeom>
+          <a:noFill/>
+          <a:ln/>
+        </p:spPr>
+        <p:txBody>
+          <a:bodyPr wrap="square" lIns="0" tIns="0" rIns="0" bIns="0" rtlCol="0" anchor="ctr"/>
+          <a:lstStyle/>
+          <a:p>
+            <a:pPr algn="ctr" indent="0" marL="0">
+              <a:buNone/>
+            </a:pPr>
+            <a:r>
+              <a:rPr lang="en-US" sz="1400" b="1" dirty="0">
+                <a:solidFill>
+                  <a:srgbClr val="0D9488"/>
+                </a:solidFill>
+                <a:latin typeface="Trebuchet MS" pitchFamily="34" charset="0"/>
+                <a:ea typeface="Trebuchet MS" pitchFamily="34" charset="-122"/>
+                <a:cs typeface="Trebuchet MS" pitchFamily="34" charset="-120"/>
+              </a:rPr>
+              <a:t>per</a:t>
+            </a:r>
+            <a:endParaRPr lang="en-US" sz="1400" dirty="0"/>
+          </a:p>
+        </p:txBody>
+      </p:sp>
+      <p:sp>
+        <p:nvSpPr>
+          <p:cNvPr id="30" name="Text 28"/>
+          <p:cNvSpPr/>
+          <p:nvPr/>
+        </p:nvSpPr>
+        <p:spPr>
+          <a:xfrm>
+            <a:off x="5157216" y="3364992"/>
+            <a:ext cx="73152" cy="475488"/>
+          </a:xfrm>
+          <a:prstGeom prst="rect">
+            <a:avLst/>
+          </a:prstGeom>
+          <a:noFill/>
+          <a:ln/>
+        </p:spPr>
+        <p:txBody>
+          <a:bodyPr wrap="square" lIns="0" tIns="0" rIns="0" bIns="0" rtlCol="0" anchor="ctr"/>
+          <a:lstStyle/>
+          <a:p>
+            <a:pPr algn="ctr" indent="0" marL="0">
+              <a:buNone/>
+            </a:pPr>
+            <a:r>
+              <a:rPr lang="en-US" sz="1600" b="1" dirty="0">
+                <a:solidFill>
+                  <a:srgbClr val="0D9488"/>
+                </a:solidFill>
+                <a:latin typeface="Trebuchet MS" pitchFamily="34" charset="0"/>
+                <a:ea typeface="Trebuchet MS" pitchFamily="34" charset="-122"/>
+                <a:cs typeface="Trebuchet MS" pitchFamily="34" charset="-120"/>
+              </a:rPr>
+              <a:t>·</a:t>
+            </a:r>
+            <a:endParaRPr lang="en-US" sz="1600" dirty="0"/>
+          </a:p>
+        </p:txBody>
+      </p:sp>
+      <p:sp>
+        <p:nvSpPr>
+          <p:cNvPr id="31" name="Shape 29"/>
+          <p:cNvSpPr/>
+          <p:nvPr/>
+        </p:nvSpPr>
+        <p:spPr>
+          <a:xfrm>
+            <a:off x="5230368" y="3364992"/>
+            <a:ext cx="1554480" cy="475488"/>
+          </a:xfrm>
+          <a:prstGeom prst="rect">
+            <a:avLst>
+              <a:gd name="adj" fmla="val 9615"/>
+            </a:avLst>
+          </a:prstGeom>
+          <a:solidFill>
+            <a:srgbClr val="FFFFFF"/>
+          </a:solidFill>
+          <a:ln w="12700">
+            <a:solidFill>
+              <a:srgbClr val="0D9488"/>
+            </a:solidFill>
+            <a:prstDash val="solid"/>
+          </a:ln>
+        </p:spPr>
+      </p:sp>
+      <p:sp>
+        <p:nvSpPr>
+          <p:cNvPr id="32" name="Text 30"/>
+          <p:cNvSpPr/>
+          <p:nvPr/>
+        </p:nvSpPr>
+        <p:spPr>
+          <a:xfrm>
+            <a:off x="5230368" y="3364992"/>
+            <a:ext cx="1554480" cy="475488"/>
+          </a:xfrm>
+          <a:prstGeom prst="rect">
+            <a:avLst/>
+          </a:prstGeom>
+          <a:noFill/>
+          <a:ln/>
+        </p:spPr>
+        <p:txBody>
+          <a:bodyPr wrap="square" lIns="0" tIns="0" rIns="0" bIns="0" rtlCol="0" anchor="ctr"/>
+          <a:lstStyle/>
+          <a:p>
+            <a:pPr algn="ctr" indent="0" marL="0">
+              <a:buNone/>
+            </a:pPr>
+            <a:r>
+              <a:rPr lang="en-US" sz="1400" b="1" dirty="0">
+                <a:solidFill>
+                  <a:srgbClr val="0D9488"/>
+                </a:solidFill>
+                <a:latin typeface="Trebuchet MS" pitchFamily="34" charset="0"/>
+                <a:ea typeface="Trebuchet MS" pitchFamily="34" charset="-122"/>
+                <a:cs typeface="Trebuchet MS" pitchFamily="34" charset="-120"/>
+              </a:rPr>
+              <a:t>pow</a:t>
+            </a:r>
+            <a:endParaRPr lang="en-US" sz="1400" dirty="0"/>
+          </a:p>
+        </p:txBody>
+      </p:sp>
+      <p:sp>
+        <p:nvSpPr>
+          <p:cNvPr id="33" name="Text 31"/>
+          <p:cNvSpPr/>
+          <p:nvPr/>
+        </p:nvSpPr>
+        <p:spPr>
+          <a:xfrm>
+            <a:off x="6784848" y="3364992"/>
+            <a:ext cx="73152" cy="475488"/>
+          </a:xfrm>
+          <a:prstGeom prst="rect">
+            <a:avLst/>
+          </a:prstGeom>
+          <a:noFill/>
+          <a:ln/>
+        </p:spPr>
+        <p:txBody>
+          <a:bodyPr wrap="square" lIns="0" tIns="0" rIns="0" bIns="0" rtlCol="0" anchor="ctr"/>
+          <a:lstStyle/>
+          <a:p>
+            <a:pPr algn="ctr" indent="0" marL="0">
+              <a:buNone/>
+            </a:pPr>
+            <a:r>
+              <a:rPr lang="en-US" sz="1600" b="1" dirty="0">
+                <a:solidFill>
+                  <a:srgbClr val="0D9488"/>
+                </a:solidFill>
+                <a:latin typeface="Trebuchet MS" pitchFamily="34" charset="0"/>
+                <a:ea typeface="Trebuchet MS" pitchFamily="34" charset="-122"/>
+                <a:cs typeface="Trebuchet MS" pitchFamily="34" charset="-120"/>
+              </a:rPr>
+              <a:t>·</a:t>
+            </a:r>
+            <a:endParaRPr lang="en-US" sz="1600" dirty="0"/>
+          </a:p>
+        </p:txBody>
+      </p:sp>
+      <p:sp>
+        <p:nvSpPr>
+          <p:cNvPr id="34" name="Shape 32"/>
+          <p:cNvSpPr/>
+          <p:nvPr/>
+        </p:nvSpPr>
+        <p:spPr>
+          <a:xfrm>
+            <a:off x="6858000" y="3364992"/>
+            <a:ext cx="1554480" cy="475488"/>
+          </a:xfrm>
+          <a:prstGeom prst="rect">
+            <a:avLst>
+              <a:gd name="adj" fmla="val 9615"/>
+            </a:avLst>
+          </a:prstGeom>
+          <a:solidFill>
+            <a:srgbClr val="FFFFFF"/>
+          </a:solidFill>
+          <a:ln w="12700">
+            <a:solidFill>
+              <a:srgbClr val="0D9488"/>
+            </a:solidFill>
+            <a:prstDash val="solid"/>
+          </a:ln>
+        </p:spPr>
+      </p:sp>
+      <p:sp>
+        <p:nvSpPr>
+          <p:cNvPr id="35" name="Text 33"/>
+          <p:cNvSpPr/>
+          <p:nvPr/>
+        </p:nvSpPr>
+        <p:spPr>
+          <a:xfrm>
+            <a:off x="6858000" y="3364992"/>
+            <a:ext cx="1554480" cy="475488"/>
+          </a:xfrm>
+          <a:prstGeom prst="rect">
+            <a:avLst/>
+          </a:prstGeom>
+          <a:noFill/>
+          <a:ln/>
+        </p:spPr>
+        <p:txBody>
+          <a:bodyPr wrap="square" lIns="0" tIns="0" rIns="0" bIns="0" rtlCol="0" anchor="ctr"/>
+          <a:lstStyle/>
+          <a:p>
+            <a:pPr algn="ctr" indent="0" marL="0">
+              <a:buNone/>
+            </a:pPr>
+            <a:r>
+              <a:rPr lang="en-US" sz="1400" b="1" dirty="0">
+                <a:solidFill>
+                  <a:srgbClr val="0D9488"/>
+                </a:solidFill>
+                <a:latin typeface="Trebuchet MS" pitchFamily="34" charset="0"/>
+                <a:ea typeface="Trebuchet MS" pitchFamily="34" charset="-122"/>
+                <a:cs typeface="Trebuchet MS" pitchFamily="34" charset="-120"/>
+              </a:rPr>
+              <a:t>er</a:t>
+            </a:r>
+            <a:endParaRPr lang="en-US" sz="1400" dirty="0"/>
+          </a:p>
+        </p:txBody>
+      </p:sp>
+      <p:sp>
+        <p:nvSpPr>
+          <p:cNvPr id="36" name="Shape 34"/>
+          <p:cNvSpPr/>
+          <p:nvPr/>
+        </p:nvSpPr>
+        <p:spPr>
+          <a:xfrm>
+            <a:off x="365760" y="4096512"/>
+            <a:ext cx="1371600" cy="804672"/>
+          </a:xfrm>
+          <a:prstGeom prst="rect">
+            <a:avLst>
+              <a:gd name="adj" fmla="val 6818"/>
+            </a:avLst>
+          </a:prstGeom>
+          <a:solidFill>
+            <a:srgbClr val="E2E8F0"/>
+          </a:solidFill>
+          <a:ln w="12700">
+            <a:solidFill>
+              <a:srgbClr val="E2E8F0"/>
+            </a:solidFill>
+            <a:prstDash val="solid"/>
+          </a:ln>
+        </p:spPr>
+      </p:sp>
+      <p:sp>
+        <p:nvSpPr>
+          <p:cNvPr id="37" name="Text 35"/>
+          <p:cNvSpPr/>
+          <p:nvPr/>
+        </p:nvSpPr>
+        <p:spPr>
+          <a:xfrm>
+            <a:off x="365760" y="4096512"/>
+            <a:ext cx="1371600" cy="804672"/>
+          </a:xfrm>
+          <a:prstGeom prst="rect">
+            <a:avLst/>
+          </a:prstGeom>
+          <a:noFill/>
+          <a:ln/>
+        </p:spPr>
+        <p:txBody>
+          <a:bodyPr wrap="square" lIns="0" tIns="0" rIns="0" bIns="0" rtlCol="0" anchor="ctr"/>
+          <a:lstStyle/>
+          <a:p>
+            <a:pPr algn="ctr" indent="0" marL="0">
+              <a:buNone/>
+            </a:pPr>
+            <a:r>
+              <a:rPr lang="en-US" sz="1100" b="1" dirty="0">
+                <a:solidFill>
+                  <a:srgbClr val="475569"/>
+                </a:solidFill>
+                <a:latin typeface="Trebuchet MS" pitchFamily="34" charset="0"/>
+                <a:ea typeface="Trebuchet MS" pitchFamily="34" charset="-122"/>
+                <a:cs typeface="Trebuchet MS" pitchFamily="34" charset="-120"/>
+              </a:rPr>
+              <a:t>Phonemes</a:t>
             </a:r>
             <a:endParaRPr lang="en-US" sz="1100" dirty="0"/>
           </a:p>
@@ -33802,13 +34762,13 @@
       </p:sp>
       <p:sp>
         <p:nvSpPr>
-          <p:cNvPr id="27" name="Shape 25"/>
-          <p:cNvSpPr/>
-          <p:nvPr/>
-        </p:nvSpPr>
-        <p:spPr>
-          <a:xfrm>
-            <a:off x="1874520" y="3273552"/>
+          <p:cNvPr id="38" name="Shape 36"/>
+          <p:cNvSpPr/>
+          <p:nvPr/>
+        </p:nvSpPr>
+        <p:spPr>
+          <a:xfrm>
+            <a:off x="1874520" y="4096512"/>
             <a:ext cx="6903720" cy="658368"/>
           </a:xfrm>
           <a:prstGeom prst="rect">
@@ -33817,30 +34777,30 @@
             </a:avLst>
           </a:prstGeom>
           <a:solidFill>
-            <a:srgbClr val="CCFBF1"/>
-          </a:solidFill>
-          <a:ln w="12700">
-            <a:solidFill>
-              <a:srgbClr val="0D9488"/>
-            </a:solidFill>
-            <a:prstDash val="solid"/>
-          </a:ln>
-        </p:spPr>
-      </p:sp>
-      <p:sp>
-        <p:nvSpPr>
-          <p:cNvPr id="28" name="Shape 26"/>
-          <p:cNvSpPr/>
-          <p:nvPr/>
-        </p:nvSpPr>
-        <p:spPr>
-          <a:xfrm>
-            <a:off x="1975104" y="3364992"/>
-            <a:ext cx="1554480" cy="475488"/>
+            <a:srgbClr val="FCE7F3"/>
+          </a:solidFill>
+          <a:ln w="12700">
+            <a:solidFill>
+              <a:srgbClr val="DB2777"/>
+            </a:solidFill>
+            <a:prstDash val="solid"/>
+          </a:ln>
+        </p:spPr>
+      </p:sp>
+      <p:sp>
+        <p:nvSpPr>
+          <p:cNvPr id="39" name="Shape 37"/>
+          <p:cNvSpPr/>
+          <p:nvPr/>
+        </p:nvSpPr>
+        <p:spPr>
+          <a:xfrm>
+            <a:off x="2124837" y="4169664"/>
+            <a:ext cx="685800" cy="475488"/>
           </a:xfrm>
           <a:prstGeom prst="rect">
             <a:avLst>
-              <a:gd name="adj" fmla="val 9615"/>
+              <a:gd name="adj" fmla="val 7692"/>
             </a:avLst>
           </a:prstGeom>
           <a:solidFill>
@@ -33848,104 +34808,131 @@
           </a:solidFill>
           <a:ln w="12700">
             <a:solidFill>
-              <a:srgbClr val="0D9488"/>
-            </a:solidFill>
-            <a:prstDash val="solid"/>
-          </a:ln>
-        </p:spPr>
-      </p:sp>
-      <p:sp>
-        <p:nvSpPr>
-          <p:cNvPr id="29" name="Text 27"/>
-          <p:cNvSpPr/>
-          <p:nvPr/>
-        </p:nvSpPr>
-        <p:spPr>
-          <a:xfrm>
-            <a:off x="1975104" y="3364992"/>
-            <a:ext cx="1554480" cy="475488"/>
-          </a:xfrm>
-          <a:prstGeom prst="rect">
-            <a:avLst/>
-          </a:prstGeom>
-          <a:noFill/>
-          <a:ln/>
-        </p:spPr>
-        <p:txBody>
-          <a:bodyPr wrap="square" lIns="0" tIns="0" rIns="0" bIns="0" rtlCol="0" anchor="ctr"/>
-          <a:lstStyle/>
-          <a:p>
-            <a:pPr algn="ctr" indent="0" marL="0">
-              <a:buNone/>
-            </a:pPr>
-            <a:r>
-              <a:rPr lang="en-US" sz="1400" b="1" dirty="0">
-                <a:solidFill>
-                  <a:srgbClr val="0D9488"/>
+              <a:srgbClr val="DB2777"/>
+            </a:solidFill>
+            <a:prstDash val="solid"/>
+          </a:ln>
+        </p:spPr>
+      </p:sp>
+      <p:sp>
+        <p:nvSpPr>
+          <p:cNvPr id="40" name="Text 38"/>
+          <p:cNvSpPr/>
+          <p:nvPr/>
+        </p:nvSpPr>
+        <p:spPr>
+          <a:xfrm>
+            <a:off x="2124837" y="4169664"/>
+            <a:ext cx="685800" cy="475488"/>
+          </a:xfrm>
+          <a:prstGeom prst="rect">
+            <a:avLst/>
+          </a:prstGeom>
+          <a:noFill/>
+          <a:ln/>
+        </p:spPr>
+        <p:txBody>
+          <a:bodyPr wrap="square" lIns="0" tIns="0" rIns="0" bIns="0" rtlCol="0" anchor="ctr"/>
+          <a:lstStyle/>
+          <a:p>
+            <a:pPr algn="ctr" indent="0" marL="0">
+              <a:buNone/>
+            </a:pPr>
+            <a:r>
+              <a:rPr lang="en-US" sz="900" b="1" dirty="0">
+                <a:solidFill>
+                  <a:srgbClr val="9D174D"/>
                 </a:solidFill>
                 <a:latin typeface="Trebuchet MS" pitchFamily="34" charset="0"/>
                 <a:ea typeface="Trebuchet MS" pitchFamily="34" charset="-122"/>
                 <a:cs typeface="Trebuchet MS" pitchFamily="34" charset="-120"/>
               </a:rPr>
-              <a:t>su</a:t>
-            </a:r>
-            <a:endParaRPr lang="en-US" sz="1400" dirty="0"/>
-          </a:p>
-        </p:txBody>
-      </p:sp>
-      <p:sp>
-        <p:nvSpPr>
-          <p:cNvPr id="30" name="Text 28"/>
-          <p:cNvSpPr/>
-          <p:nvPr/>
-        </p:nvSpPr>
-        <p:spPr>
-          <a:xfrm>
-            <a:off x="3529584" y="3364992"/>
-            <a:ext cx="73152" cy="475488"/>
-          </a:xfrm>
-          <a:prstGeom prst="rect">
-            <a:avLst/>
-          </a:prstGeom>
-          <a:noFill/>
-          <a:ln/>
-        </p:spPr>
-        <p:txBody>
-          <a:bodyPr wrap="square" lIns="0" tIns="0" rIns="0" bIns="0" rtlCol="0" anchor="ctr"/>
-          <a:lstStyle/>
-          <a:p>
-            <a:pPr algn="ctr" indent="0" marL="0">
-              <a:buNone/>
-            </a:pPr>
-            <a:r>
-              <a:rPr lang="en-US" sz="1600" b="1" dirty="0">
-                <a:solidFill>
-                  <a:srgbClr val="0D9488"/>
+              <a:t>s</a:t>
+            </a:r>
+            <a:endParaRPr lang="en-US" sz="900" dirty="0"/>
+          </a:p>
+        </p:txBody>
+      </p:sp>
+      <p:sp>
+        <p:nvSpPr>
+          <p:cNvPr id="41" name="Shape 39"/>
+          <p:cNvSpPr/>
+          <p:nvPr/>
+        </p:nvSpPr>
+        <p:spPr>
+          <a:xfrm>
+            <a:off x="3033522" y="4169664"/>
+            <a:ext cx="685800" cy="475488"/>
+          </a:xfrm>
+          <a:prstGeom prst="rect">
+            <a:avLst>
+              <a:gd name="adj" fmla="val 7692"/>
+            </a:avLst>
+          </a:prstGeom>
+          <a:solidFill>
+            <a:srgbClr val="FFFFFF"/>
+          </a:solidFill>
+          <a:ln w="12700">
+            <a:solidFill>
+              <a:srgbClr val="DB2777"/>
+            </a:solidFill>
+            <a:prstDash val="solid"/>
+          </a:ln>
+        </p:spPr>
+      </p:sp>
+      <p:sp>
+        <p:nvSpPr>
+          <p:cNvPr id="42" name="Text 40"/>
+          <p:cNvSpPr/>
+          <p:nvPr/>
+        </p:nvSpPr>
+        <p:spPr>
+          <a:xfrm>
+            <a:off x="3033522" y="4169664"/>
+            <a:ext cx="685800" cy="475488"/>
+          </a:xfrm>
+          <a:prstGeom prst="rect">
+            <a:avLst/>
+          </a:prstGeom>
+          <a:noFill/>
+          <a:ln/>
+        </p:spPr>
+        <p:txBody>
+          <a:bodyPr wrap="square" lIns="0" tIns="0" rIns="0" bIns="0" rtlCol="0" anchor="ctr"/>
+          <a:lstStyle/>
+          <a:p>
+            <a:pPr algn="ctr" indent="0" marL="0">
+              <a:buNone/>
+            </a:pPr>
+            <a:r>
+              <a:rPr lang="en-US" sz="900" b="1" dirty="0">
+                <a:solidFill>
+                  <a:srgbClr val="9D174D"/>
                 </a:solidFill>
                 <a:latin typeface="Trebuchet MS" pitchFamily="34" charset="0"/>
                 <a:ea typeface="Trebuchet MS" pitchFamily="34" charset="-122"/>
                 <a:cs typeface="Trebuchet MS" pitchFamily="34" charset="-120"/>
               </a:rPr>
-              <a:t>·</a:t>
-            </a:r>
-            <a:endParaRPr lang="en-US" sz="1600" dirty="0"/>
-          </a:p>
-        </p:txBody>
-      </p:sp>
-      <p:sp>
-        <p:nvSpPr>
-          <p:cNvPr id="31" name="Shape 29"/>
-          <p:cNvSpPr/>
-          <p:nvPr/>
-        </p:nvSpPr>
-        <p:spPr>
-          <a:xfrm>
-            <a:off x="3602736" y="3364992"/>
-            <a:ext cx="1554480" cy="475488"/>
+              <a:t>u</a:t>
+            </a:r>
+            <a:endParaRPr lang="en-US" sz="900" dirty="0"/>
+          </a:p>
+        </p:txBody>
+      </p:sp>
+      <p:sp>
+        <p:nvSpPr>
+          <p:cNvPr id="43" name="Shape 41"/>
+          <p:cNvSpPr/>
+          <p:nvPr/>
+        </p:nvSpPr>
+        <p:spPr>
+          <a:xfrm>
+            <a:off x="3942207" y="4169664"/>
+            <a:ext cx="685800" cy="475488"/>
           </a:xfrm>
           <a:prstGeom prst="rect">
             <a:avLst>
-              <a:gd name="adj" fmla="val 9615"/>
+              <a:gd name="adj" fmla="val 7692"/>
             </a:avLst>
           </a:prstGeom>
           <a:solidFill>
@@ -33953,104 +34940,131 @@
           </a:solidFill>
           <a:ln w="12700">
             <a:solidFill>
-              <a:srgbClr val="0D9488"/>
-            </a:solidFill>
-            <a:prstDash val="solid"/>
-          </a:ln>
-        </p:spPr>
-      </p:sp>
-      <p:sp>
-        <p:nvSpPr>
-          <p:cNvPr id="32" name="Text 30"/>
-          <p:cNvSpPr/>
-          <p:nvPr/>
-        </p:nvSpPr>
-        <p:spPr>
-          <a:xfrm>
-            <a:off x="3602736" y="3364992"/>
-            <a:ext cx="1554480" cy="475488"/>
-          </a:xfrm>
-          <a:prstGeom prst="rect">
-            <a:avLst/>
-          </a:prstGeom>
-          <a:noFill/>
-          <a:ln/>
-        </p:spPr>
-        <p:txBody>
-          <a:bodyPr wrap="square" lIns="0" tIns="0" rIns="0" bIns="0" rtlCol="0" anchor="ctr"/>
-          <a:lstStyle/>
-          <a:p>
-            <a:pPr algn="ctr" indent="0" marL="0">
-              <a:buNone/>
-            </a:pPr>
-            <a:r>
-              <a:rPr lang="en-US" sz="1400" b="1" dirty="0">
-                <a:solidFill>
-                  <a:srgbClr val="0D9488"/>
+              <a:srgbClr val="DB2777"/>
+            </a:solidFill>
+            <a:prstDash val="solid"/>
+          </a:ln>
+        </p:spPr>
+      </p:sp>
+      <p:sp>
+        <p:nvSpPr>
+          <p:cNvPr id="44" name="Text 42"/>
+          <p:cNvSpPr/>
+          <p:nvPr/>
+        </p:nvSpPr>
+        <p:spPr>
+          <a:xfrm>
+            <a:off x="3942207" y="4169664"/>
+            <a:ext cx="685800" cy="475488"/>
+          </a:xfrm>
+          <a:prstGeom prst="rect">
+            <a:avLst/>
+          </a:prstGeom>
+          <a:noFill/>
+          <a:ln/>
+        </p:spPr>
+        <p:txBody>
+          <a:bodyPr wrap="square" lIns="0" tIns="0" rIns="0" bIns="0" rtlCol="0" anchor="ctr"/>
+          <a:lstStyle/>
+          <a:p>
+            <a:pPr algn="ctr" indent="0" marL="0">
+              <a:buNone/>
+            </a:pPr>
+            <a:r>
+              <a:rPr lang="en-US" sz="900" b="1" dirty="0">
+                <a:solidFill>
+                  <a:srgbClr val="9D174D"/>
                 </a:solidFill>
                 <a:latin typeface="Trebuchet MS" pitchFamily="34" charset="0"/>
                 <a:ea typeface="Trebuchet MS" pitchFamily="34" charset="-122"/>
                 <a:cs typeface="Trebuchet MS" pitchFamily="34" charset="-120"/>
               </a:rPr>
-              <a:t>per</a:t>
-            </a:r>
-            <a:endParaRPr lang="en-US" sz="1400" dirty="0"/>
-          </a:p>
-        </p:txBody>
-      </p:sp>
-      <p:sp>
-        <p:nvSpPr>
-          <p:cNvPr id="33" name="Text 31"/>
-          <p:cNvSpPr/>
-          <p:nvPr/>
-        </p:nvSpPr>
-        <p:spPr>
-          <a:xfrm>
-            <a:off x="5157216" y="3364992"/>
-            <a:ext cx="73152" cy="475488"/>
-          </a:xfrm>
-          <a:prstGeom prst="rect">
-            <a:avLst/>
-          </a:prstGeom>
-          <a:noFill/>
-          <a:ln/>
-        </p:spPr>
-        <p:txBody>
-          <a:bodyPr wrap="square" lIns="0" tIns="0" rIns="0" bIns="0" rtlCol="0" anchor="ctr"/>
-          <a:lstStyle/>
-          <a:p>
-            <a:pPr algn="ctr" indent="0" marL="0">
-              <a:buNone/>
-            </a:pPr>
-            <a:r>
-              <a:rPr lang="en-US" sz="1600" b="1" dirty="0">
-                <a:solidFill>
-                  <a:srgbClr val="0D9488"/>
+              <a:t>p</a:t>
+            </a:r>
+            <a:endParaRPr lang="en-US" sz="900" dirty="0"/>
+          </a:p>
+        </p:txBody>
+      </p:sp>
+      <p:sp>
+        <p:nvSpPr>
+          <p:cNvPr id="45" name="Shape 43"/>
+          <p:cNvSpPr/>
+          <p:nvPr/>
+        </p:nvSpPr>
+        <p:spPr>
+          <a:xfrm>
+            <a:off x="4850892" y="4169664"/>
+            <a:ext cx="685800" cy="475488"/>
+          </a:xfrm>
+          <a:prstGeom prst="rect">
+            <a:avLst>
+              <a:gd name="adj" fmla="val 7692"/>
+            </a:avLst>
+          </a:prstGeom>
+          <a:solidFill>
+            <a:srgbClr val="FFFFFF"/>
+          </a:solidFill>
+          <a:ln w="12700">
+            <a:solidFill>
+              <a:srgbClr val="DB2777"/>
+            </a:solidFill>
+            <a:prstDash val="solid"/>
+          </a:ln>
+        </p:spPr>
+      </p:sp>
+      <p:sp>
+        <p:nvSpPr>
+          <p:cNvPr id="46" name="Text 44"/>
+          <p:cNvSpPr/>
+          <p:nvPr/>
+        </p:nvSpPr>
+        <p:spPr>
+          <a:xfrm>
+            <a:off x="4850892" y="4169664"/>
+            <a:ext cx="685800" cy="475488"/>
+          </a:xfrm>
+          <a:prstGeom prst="rect">
+            <a:avLst/>
+          </a:prstGeom>
+          <a:noFill/>
+          <a:ln/>
+        </p:spPr>
+        <p:txBody>
+          <a:bodyPr wrap="square" lIns="0" tIns="0" rIns="0" bIns="0" rtlCol="0" anchor="ctr"/>
+          <a:lstStyle/>
+          <a:p>
+            <a:pPr algn="ctr" indent="0" marL="0">
+              <a:buNone/>
+            </a:pPr>
+            <a:r>
+              <a:rPr lang="en-US" sz="900" b="1" dirty="0">
+                <a:solidFill>
+                  <a:srgbClr val="9D174D"/>
                 </a:solidFill>
                 <a:latin typeface="Trebuchet MS" pitchFamily="34" charset="0"/>
                 <a:ea typeface="Trebuchet MS" pitchFamily="34" charset="-122"/>
                 <a:cs typeface="Trebuchet MS" pitchFamily="34" charset="-120"/>
               </a:rPr>
-              <a:t>·</a:t>
-            </a:r>
-            <a:endParaRPr lang="en-US" sz="1600" dirty="0"/>
-          </a:p>
-        </p:txBody>
-      </p:sp>
-      <p:sp>
-        <p:nvSpPr>
-          <p:cNvPr id="34" name="Shape 32"/>
-          <p:cNvSpPr/>
-          <p:nvPr/>
-        </p:nvSpPr>
-        <p:spPr>
-          <a:xfrm>
-            <a:off x="5230368" y="3364992"/>
-            <a:ext cx="1554480" cy="475488"/>
+              <a:t>er</a:t>
+            </a:r>
+            <a:endParaRPr lang="en-US" sz="900" dirty="0"/>
+          </a:p>
+        </p:txBody>
+      </p:sp>
+      <p:sp>
+        <p:nvSpPr>
+          <p:cNvPr id="47" name="Shape 45"/>
+          <p:cNvSpPr/>
+          <p:nvPr/>
+        </p:nvSpPr>
+        <p:spPr>
+          <a:xfrm>
+            <a:off x="5759577" y="4169664"/>
+            <a:ext cx="685800" cy="475488"/>
           </a:xfrm>
           <a:prstGeom prst="rect">
             <a:avLst>
-              <a:gd name="adj" fmla="val 9615"/>
+              <a:gd name="adj" fmla="val 7692"/>
             </a:avLst>
           </a:prstGeom>
           <a:solidFill>
@@ -34058,104 +35072,131 @@
           </a:solidFill>
           <a:ln w="12700">
             <a:solidFill>
-              <a:srgbClr val="0D9488"/>
-            </a:solidFill>
-            <a:prstDash val="solid"/>
-          </a:ln>
-        </p:spPr>
-      </p:sp>
-      <p:sp>
-        <p:nvSpPr>
-          <p:cNvPr id="35" name="Text 33"/>
-          <p:cNvSpPr/>
-          <p:nvPr/>
-        </p:nvSpPr>
-        <p:spPr>
-          <a:xfrm>
-            <a:off x="5230368" y="3364992"/>
-            <a:ext cx="1554480" cy="475488"/>
-          </a:xfrm>
-          <a:prstGeom prst="rect">
-            <a:avLst/>
-          </a:prstGeom>
-          <a:noFill/>
-          <a:ln/>
-        </p:spPr>
-        <p:txBody>
-          <a:bodyPr wrap="square" lIns="0" tIns="0" rIns="0" bIns="0" rtlCol="0" anchor="ctr"/>
-          <a:lstStyle/>
-          <a:p>
-            <a:pPr algn="ctr" indent="0" marL="0">
-              <a:buNone/>
-            </a:pPr>
-            <a:r>
-              <a:rPr lang="en-US" sz="1400" b="1" dirty="0">
-                <a:solidFill>
-                  <a:srgbClr val="0D9488"/>
+              <a:srgbClr val="DB2777"/>
+            </a:solidFill>
+            <a:prstDash val="solid"/>
+          </a:ln>
+        </p:spPr>
+      </p:sp>
+      <p:sp>
+        <p:nvSpPr>
+          <p:cNvPr id="48" name="Text 46"/>
+          <p:cNvSpPr/>
+          <p:nvPr/>
+        </p:nvSpPr>
+        <p:spPr>
+          <a:xfrm>
+            <a:off x="5759577" y="4169664"/>
+            <a:ext cx="685800" cy="475488"/>
+          </a:xfrm>
+          <a:prstGeom prst="rect">
+            <a:avLst/>
+          </a:prstGeom>
+          <a:noFill/>
+          <a:ln/>
+        </p:spPr>
+        <p:txBody>
+          <a:bodyPr wrap="square" lIns="0" tIns="0" rIns="0" bIns="0" rtlCol="0" anchor="ctr"/>
+          <a:lstStyle/>
+          <a:p>
+            <a:pPr algn="ctr" indent="0" marL="0">
+              <a:buNone/>
+            </a:pPr>
+            <a:r>
+              <a:rPr lang="en-US" sz="900" b="1" dirty="0">
+                <a:solidFill>
+                  <a:srgbClr val="9D174D"/>
                 </a:solidFill>
                 <a:latin typeface="Trebuchet MS" pitchFamily="34" charset="0"/>
                 <a:ea typeface="Trebuchet MS" pitchFamily="34" charset="-122"/>
                 <a:cs typeface="Trebuchet MS" pitchFamily="34" charset="-120"/>
               </a:rPr>
-              <a:t>son</a:t>
-            </a:r>
-            <a:endParaRPr lang="en-US" sz="1400" dirty="0"/>
-          </a:p>
-        </p:txBody>
-      </p:sp>
-      <p:sp>
-        <p:nvSpPr>
-          <p:cNvPr id="36" name="Text 34"/>
-          <p:cNvSpPr/>
-          <p:nvPr/>
-        </p:nvSpPr>
-        <p:spPr>
-          <a:xfrm>
-            <a:off x="6784848" y="3364992"/>
-            <a:ext cx="73152" cy="475488"/>
-          </a:xfrm>
-          <a:prstGeom prst="rect">
-            <a:avLst/>
-          </a:prstGeom>
-          <a:noFill/>
-          <a:ln/>
-        </p:spPr>
-        <p:txBody>
-          <a:bodyPr wrap="square" lIns="0" tIns="0" rIns="0" bIns="0" rtlCol="0" anchor="ctr"/>
-          <a:lstStyle/>
-          <a:p>
-            <a:pPr algn="ctr" indent="0" marL="0">
-              <a:buNone/>
-            </a:pPr>
-            <a:r>
-              <a:rPr lang="en-US" sz="1600" b="1" dirty="0">
-                <a:solidFill>
-                  <a:srgbClr val="0D9488"/>
+              <a:t>p</a:t>
+            </a:r>
+            <a:endParaRPr lang="en-US" sz="900" dirty="0"/>
+          </a:p>
+        </p:txBody>
+      </p:sp>
+      <p:sp>
+        <p:nvSpPr>
+          <p:cNvPr id="49" name="Shape 47"/>
+          <p:cNvSpPr/>
+          <p:nvPr/>
+        </p:nvSpPr>
+        <p:spPr>
+          <a:xfrm>
+            <a:off x="6668262" y="4169664"/>
+            <a:ext cx="685800" cy="475488"/>
+          </a:xfrm>
+          <a:prstGeom prst="rect">
+            <a:avLst>
+              <a:gd name="adj" fmla="val 7692"/>
+            </a:avLst>
+          </a:prstGeom>
+          <a:solidFill>
+            <a:srgbClr val="FFFFFF"/>
+          </a:solidFill>
+          <a:ln w="12700">
+            <a:solidFill>
+              <a:srgbClr val="DB2777"/>
+            </a:solidFill>
+            <a:prstDash val="solid"/>
+          </a:ln>
+        </p:spPr>
+      </p:sp>
+      <p:sp>
+        <p:nvSpPr>
+          <p:cNvPr id="50" name="Text 48"/>
+          <p:cNvSpPr/>
+          <p:nvPr/>
+        </p:nvSpPr>
+        <p:spPr>
+          <a:xfrm>
+            <a:off x="6668262" y="4169664"/>
+            <a:ext cx="685800" cy="475488"/>
+          </a:xfrm>
+          <a:prstGeom prst="rect">
+            <a:avLst/>
+          </a:prstGeom>
+          <a:noFill/>
+          <a:ln/>
+        </p:spPr>
+        <p:txBody>
+          <a:bodyPr wrap="square" lIns="0" tIns="0" rIns="0" bIns="0" rtlCol="0" anchor="ctr"/>
+          <a:lstStyle/>
+          <a:p>
+            <a:pPr algn="ctr" indent="0" marL="0">
+              <a:buNone/>
+            </a:pPr>
+            <a:r>
+              <a:rPr lang="en-US" sz="900" b="1" dirty="0">
+                <a:solidFill>
+                  <a:srgbClr val="9D174D"/>
                 </a:solidFill>
                 <a:latin typeface="Trebuchet MS" pitchFamily="34" charset="0"/>
                 <a:ea typeface="Trebuchet MS" pitchFamily="34" charset="-122"/>
                 <a:cs typeface="Trebuchet MS" pitchFamily="34" charset="-120"/>
               </a:rPr>
-              <a:t>·</a:t>
-            </a:r>
-            <a:endParaRPr lang="en-US" sz="1600" dirty="0"/>
-          </a:p>
-        </p:txBody>
-      </p:sp>
-      <p:sp>
-        <p:nvSpPr>
-          <p:cNvPr id="37" name="Shape 35"/>
-          <p:cNvSpPr/>
-          <p:nvPr/>
-        </p:nvSpPr>
-        <p:spPr>
-          <a:xfrm>
-            <a:off x="6858000" y="3364992"/>
-            <a:ext cx="1554480" cy="475488"/>
+              <a:t>ow</a:t>
+            </a:r>
+            <a:endParaRPr lang="en-US" sz="900" dirty="0"/>
+          </a:p>
+        </p:txBody>
+      </p:sp>
+      <p:sp>
+        <p:nvSpPr>
+          <p:cNvPr id="51" name="Shape 49"/>
+          <p:cNvSpPr/>
+          <p:nvPr/>
+        </p:nvSpPr>
+        <p:spPr>
+          <a:xfrm>
+            <a:off x="7576947" y="4169664"/>
+            <a:ext cx="685800" cy="475488"/>
           </a:xfrm>
           <a:prstGeom prst="rect">
             <a:avLst>
-              <a:gd name="adj" fmla="val 9615"/>
+              <a:gd name="adj" fmla="val 7692"/>
             </a:avLst>
           </a:prstGeom>
           <a:solidFill>
@@ -34163,708 +35204,48 @@
           </a:solidFill>
           <a:ln w="12700">
             <a:solidFill>
-              <a:srgbClr val="0D9488"/>
-            </a:solidFill>
-            <a:prstDash val="solid"/>
-          </a:ln>
-        </p:spPr>
-      </p:sp>
-      <p:sp>
-        <p:nvSpPr>
-          <p:cNvPr id="38" name="Text 36"/>
-          <p:cNvSpPr/>
-          <p:nvPr/>
-        </p:nvSpPr>
-        <p:spPr>
-          <a:xfrm>
-            <a:off x="6858000" y="3364992"/>
-            <a:ext cx="1554480" cy="475488"/>
-          </a:xfrm>
-          <a:prstGeom prst="rect">
-            <a:avLst/>
-          </a:prstGeom>
-          <a:noFill/>
-          <a:ln/>
-        </p:spPr>
-        <p:txBody>
-          <a:bodyPr wrap="square" lIns="0" tIns="0" rIns="0" bIns="0" rtlCol="0" anchor="ctr"/>
-          <a:lstStyle/>
-          <a:p>
-            <a:pPr algn="ctr" indent="0" marL="0">
-              <a:buNone/>
-            </a:pPr>
-            <a:r>
-              <a:rPr lang="en-US" sz="1400" b="1" dirty="0">
-                <a:solidFill>
-                  <a:srgbClr val="0D9488"/>
+              <a:srgbClr val="DB2777"/>
+            </a:solidFill>
+            <a:prstDash val="solid"/>
+          </a:ln>
+        </p:spPr>
+      </p:sp>
+      <p:sp>
+        <p:nvSpPr>
+          <p:cNvPr id="52" name="Text 50"/>
+          <p:cNvSpPr/>
+          <p:nvPr/>
+        </p:nvSpPr>
+        <p:spPr>
+          <a:xfrm>
+            <a:off x="7576947" y="4169664"/>
+            <a:ext cx="685800" cy="475488"/>
+          </a:xfrm>
+          <a:prstGeom prst="rect">
+            <a:avLst/>
+          </a:prstGeom>
+          <a:noFill/>
+          <a:ln/>
+        </p:spPr>
+        <p:txBody>
+          <a:bodyPr wrap="square" lIns="0" tIns="0" rIns="0" bIns="0" rtlCol="0" anchor="ctr"/>
+          <a:lstStyle/>
+          <a:p>
+            <a:pPr algn="ctr" indent="0" marL="0">
+              <a:buNone/>
+            </a:pPr>
+            <a:r>
+              <a:rPr lang="en-US" sz="900" b="1" dirty="0">
+                <a:solidFill>
+                  <a:srgbClr val="9D174D"/>
                 </a:solidFill>
                 <a:latin typeface="Trebuchet MS" pitchFamily="34" charset="0"/>
                 <a:ea typeface="Trebuchet MS" pitchFamily="34" charset="-122"/>
                 <a:cs typeface="Trebuchet MS" pitchFamily="34" charset="-120"/>
               </a:rPr>
-              <a:t>ic</a:t>
-            </a:r>
-            <a:endParaRPr lang="en-US" sz="1400" dirty="0"/>
-          </a:p>
-        </p:txBody>
-      </p:sp>
-      <p:sp>
-        <p:nvSpPr>
-          <p:cNvPr id="39" name="Shape 37"/>
-          <p:cNvSpPr/>
-          <p:nvPr/>
-        </p:nvSpPr>
-        <p:spPr>
-          <a:xfrm>
-            <a:off x="365760" y="4096512"/>
-            <a:ext cx="1371600" cy="804672"/>
-          </a:xfrm>
-          <a:prstGeom prst="rect">
-            <a:avLst>
-              <a:gd name="adj" fmla="val 6818"/>
-            </a:avLst>
-          </a:prstGeom>
-          <a:solidFill>
-            <a:srgbClr val="E2E8F0"/>
-          </a:solidFill>
-          <a:ln w="12700">
-            <a:solidFill>
-              <a:srgbClr val="E2E8F0"/>
-            </a:solidFill>
-            <a:prstDash val="solid"/>
-          </a:ln>
-        </p:spPr>
-      </p:sp>
-      <p:sp>
-        <p:nvSpPr>
-          <p:cNvPr id="40" name="Text 38"/>
-          <p:cNvSpPr/>
-          <p:nvPr/>
-        </p:nvSpPr>
-        <p:spPr>
-          <a:xfrm>
-            <a:off x="365760" y="4096512"/>
-            <a:ext cx="1371600" cy="804672"/>
-          </a:xfrm>
-          <a:prstGeom prst="rect">
-            <a:avLst/>
-          </a:prstGeom>
-          <a:noFill/>
-          <a:ln/>
-        </p:spPr>
-        <p:txBody>
-          <a:bodyPr wrap="square" lIns="0" tIns="0" rIns="0" bIns="0" rtlCol="0" anchor="ctr"/>
-          <a:lstStyle/>
-          <a:p>
-            <a:pPr algn="ctr" indent="0" marL="0">
-              <a:buNone/>
-            </a:pPr>
-            <a:r>
-              <a:rPr lang="en-US" sz="1100" b="1" dirty="0">
-                <a:solidFill>
-                  <a:srgbClr val="475569"/>
-                </a:solidFill>
-                <a:latin typeface="Trebuchet MS" pitchFamily="34" charset="0"/>
-                <a:ea typeface="Trebuchet MS" pitchFamily="34" charset="-122"/>
-                <a:cs typeface="Trebuchet MS" pitchFamily="34" charset="-120"/>
-              </a:rPr>
-              <a:t>Phonemes</a:t>
-            </a:r>
-            <a:endParaRPr lang="en-US" sz="1100" dirty="0"/>
-          </a:p>
-        </p:txBody>
-      </p:sp>
-      <p:sp>
-        <p:nvSpPr>
-          <p:cNvPr id="41" name="Shape 39"/>
-          <p:cNvSpPr/>
-          <p:nvPr/>
-        </p:nvSpPr>
-        <p:spPr>
-          <a:xfrm>
-            <a:off x="1874520" y="4096512"/>
-            <a:ext cx="6903720" cy="804672"/>
-          </a:xfrm>
-          <a:prstGeom prst="rect">
-            <a:avLst>
-              <a:gd name="adj" fmla="val 6818"/>
-            </a:avLst>
-          </a:prstGeom>
-          <a:solidFill>
-            <a:srgbClr val="FCE7F3"/>
-          </a:solidFill>
-          <a:ln w="12700">
-            <a:solidFill>
-              <a:srgbClr val="DB2777"/>
-            </a:solidFill>
-            <a:prstDash val="solid"/>
-          </a:ln>
-        </p:spPr>
-      </p:sp>
-      <p:sp>
-        <p:nvSpPr>
-          <p:cNvPr id="42" name="Shape 40"/>
-          <p:cNvSpPr/>
-          <p:nvPr/>
-        </p:nvSpPr>
-        <p:spPr>
-          <a:xfrm>
-            <a:off x="2023872" y="4169664"/>
-            <a:ext cx="685800" cy="384048"/>
-          </a:xfrm>
-          <a:prstGeom prst="rect">
-            <a:avLst>
-              <a:gd name="adj" fmla="val 9524"/>
-            </a:avLst>
-          </a:prstGeom>
-          <a:solidFill>
-            <a:srgbClr val="FFFFFF"/>
-          </a:solidFill>
-          <a:ln w="12700">
-            <a:solidFill>
-              <a:srgbClr val="DB2777"/>
-            </a:solidFill>
-            <a:prstDash val="solid"/>
-          </a:ln>
-        </p:spPr>
-      </p:sp>
-      <p:sp>
-        <p:nvSpPr>
-          <p:cNvPr id="43" name="Text 41"/>
-          <p:cNvSpPr/>
-          <p:nvPr/>
-        </p:nvSpPr>
-        <p:spPr>
-          <a:xfrm>
-            <a:off x="2023872" y="4169664"/>
-            <a:ext cx="685800" cy="384048"/>
-          </a:xfrm>
-          <a:prstGeom prst="rect">
-            <a:avLst/>
-          </a:prstGeom>
-          <a:noFill/>
-          <a:ln/>
-        </p:spPr>
-        <p:txBody>
-          <a:bodyPr wrap="square" lIns="0" tIns="0" rIns="0" bIns="0" rtlCol="0" anchor="ctr"/>
-          <a:lstStyle/>
-          <a:p>
-            <a:pPr algn="ctr" indent="0" marL="0">
-              <a:buNone/>
-            </a:pPr>
-            <a:r>
-              <a:rPr lang="en-US" sz="900" b="1" dirty="0">
-                <a:solidFill>
-                  <a:srgbClr val="9D174D"/>
-                </a:solidFill>
-                <a:latin typeface="Trebuchet MS" pitchFamily="34" charset="0"/>
-                <a:ea typeface="Trebuchet MS" pitchFamily="34" charset="-122"/>
-                <a:cs typeface="Trebuchet MS" pitchFamily="34" charset="-120"/>
-              </a:rPr>
-              <a:t>s</a:t>
+              <a:t>er</a:t>
             </a:r>
             <a:endParaRPr lang="en-US" sz="900" dirty="0"/>
-          </a:p>
-        </p:txBody>
-      </p:sp>
-      <p:sp>
-        <p:nvSpPr>
-          <p:cNvPr id="44" name="Shape 42"/>
-          <p:cNvSpPr/>
-          <p:nvPr/>
-        </p:nvSpPr>
-        <p:spPr>
-          <a:xfrm>
-            <a:off x="2831592" y="4169664"/>
-            <a:ext cx="685800" cy="384048"/>
-          </a:xfrm>
-          <a:prstGeom prst="rect">
-            <a:avLst>
-              <a:gd name="adj" fmla="val 9524"/>
-            </a:avLst>
-          </a:prstGeom>
-          <a:solidFill>
-            <a:srgbClr val="FFFFFF"/>
-          </a:solidFill>
-          <a:ln w="12700">
-            <a:solidFill>
-              <a:srgbClr val="DB2777"/>
-            </a:solidFill>
-            <a:prstDash val="solid"/>
-          </a:ln>
-        </p:spPr>
-      </p:sp>
-      <p:sp>
-        <p:nvSpPr>
-          <p:cNvPr id="45" name="Text 43"/>
-          <p:cNvSpPr/>
-          <p:nvPr/>
-        </p:nvSpPr>
-        <p:spPr>
-          <a:xfrm>
-            <a:off x="2831592" y="4169664"/>
-            <a:ext cx="685800" cy="384048"/>
-          </a:xfrm>
-          <a:prstGeom prst="rect">
-            <a:avLst/>
-          </a:prstGeom>
-          <a:noFill/>
-          <a:ln/>
-        </p:spPr>
-        <p:txBody>
-          <a:bodyPr wrap="square" lIns="0" tIns="0" rIns="0" bIns="0" rtlCol="0" anchor="ctr"/>
-          <a:lstStyle/>
-          <a:p>
-            <a:pPr algn="ctr" indent="0" marL="0">
-              <a:buNone/>
-            </a:pPr>
-            <a:r>
-              <a:rPr lang="en-US" sz="900" b="1" dirty="0">
-                <a:solidFill>
-                  <a:srgbClr val="9D174D"/>
-                </a:solidFill>
-                <a:latin typeface="Trebuchet MS" pitchFamily="34" charset="0"/>
-                <a:ea typeface="Trebuchet MS" pitchFamily="34" charset="-122"/>
-                <a:cs typeface="Trebuchet MS" pitchFamily="34" charset="-120"/>
-              </a:rPr>
-              <a:t>u</a:t>
-            </a:r>
-            <a:endParaRPr lang="en-US" sz="900" dirty="0"/>
-          </a:p>
-        </p:txBody>
-      </p:sp>
-      <p:sp>
-        <p:nvSpPr>
-          <p:cNvPr id="46" name="Shape 44"/>
-          <p:cNvSpPr/>
-          <p:nvPr/>
-        </p:nvSpPr>
-        <p:spPr>
-          <a:xfrm>
-            <a:off x="3639312" y="4169664"/>
-            <a:ext cx="685800" cy="384048"/>
-          </a:xfrm>
-          <a:prstGeom prst="rect">
-            <a:avLst>
-              <a:gd name="adj" fmla="val 9524"/>
-            </a:avLst>
-          </a:prstGeom>
-          <a:solidFill>
-            <a:srgbClr val="FFFFFF"/>
-          </a:solidFill>
-          <a:ln w="12700">
-            <a:solidFill>
-              <a:srgbClr val="DB2777"/>
-            </a:solidFill>
-            <a:prstDash val="solid"/>
-          </a:ln>
-        </p:spPr>
-      </p:sp>
-      <p:sp>
-        <p:nvSpPr>
-          <p:cNvPr id="47" name="Text 45"/>
-          <p:cNvSpPr/>
-          <p:nvPr/>
-        </p:nvSpPr>
-        <p:spPr>
-          <a:xfrm>
-            <a:off x="3639312" y="4169664"/>
-            <a:ext cx="685800" cy="384048"/>
-          </a:xfrm>
-          <a:prstGeom prst="rect">
-            <a:avLst/>
-          </a:prstGeom>
-          <a:noFill/>
-          <a:ln/>
-        </p:spPr>
-        <p:txBody>
-          <a:bodyPr wrap="square" lIns="0" tIns="0" rIns="0" bIns="0" rtlCol="0" anchor="ctr"/>
-          <a:lstStyle/>
-          <a:p>
-            <a:pPr algn="ctr" indent="0" marL="0">
-              <a:buNone/>
-            </a:pPr>
-            <a:r>
-              <a:rPr lang="en-US" sz="900" b="1" dirty="0">
-                <a:solidFill>
-                  <a:srgbClr val="9D174D"/>
-                </a:solidFill>
-                <a:latin typeface="Trebuchet MS" pitchFamily="34" charset="0"/>
-                <a:ea typeface="Trebuchet MS" pitchFamily="34" charset="-122"/>
-                <a:cs typeface="Trebuchet MS" pitchFamily="34" charset="-120"/>
-              </a:rPr>
-              <a:t>p</a:t>
-            </a:r>
-            <a:endParaRPr lang="en-US" sz="900" dirty="0"/>
-          </a:p>
-        </p:txBody>
-      </p:sp>
-      <p:sp>
-        <p:nvSpPr>
-          <p:cNvPr id="48" name="Shape 46"/>
-          <p:cNvSpPr/>
-          <p:nvPr/>
-        </p:nvSpPr>
-        <p:spPr>
-          <a:xfrm>
-            <a:off x="4447032" y="4169664"/>
-            <a:ext cx="685800" cy="384048"/>
-          </a:xfrm>
-          <a:prstGeom prst="rect">
-            <a:avLst>
-              <a:gd name="adj" fmla="val 9524"/>
-            </a:avLst>
-          </a:prstGeom>
-          <a:solidFill>
-            <a:srgbClr val="FFFFFF"/>
-          </a:solidFill>
-          <a:ln w="12700">
-            <a:solidFill>
-              <a:srgbClr val="DB2777"/>
-            </a:solidFill>
-            <a:prstDash val="solid"/>
-          </a:ln>
-        </p:spPr>
-      </p:sp>
-      <p:sp>
-        <p:nvSpPr>
-          <p:cNvPr id="49" name="Text 47"/>
-          <p:cNvSpPr/>
-          <p:nvPr/>
-        </p:nvSpPr>
-        <p:spPr>
-          <a:xfrm>
-            <a:off x="4447032" y="4169664"/>
-            <a:ext cx="685800" cy="384048"/>
-          </a:xfrm>
-          <a:prstGeom prst="rect">
-            <a:avLst/>
-          </a:prstGeom>
-          <a:noFill/>
-          <a:ln/>
-        </p:spPr>
-        <p:txBody>
-          <a:bodyPr wrap="square" lIns="0" tIns="0" rIns="0" bIns="0" rtlCol="0" anchor="ctr"/>
-          <a:lstStyle/>
-          <a:p>
-            <a:pPr algn="ctr" indent="0" marL="0">
-              <a:buNone/>
-            </a:pPr>
-            <a:r>
-              <a:rPr lang="en-US" sz="900" b="1" dirty="0">
-                <a:solidFill>
-                  <a:srgbClr val="9D174D"/>
-                </a:solidFill>
-                <a:latin typeface="Trebuchet MS" pitchFamily="34" charset="0"/>
-                <a:ea typeface="Trebuchet MS" pitchFamily="34" charset="-122"/>
-                <a:cs typeface="Trebuchet MS" pitchFamily="34" charset="-120"/>
-              </a:rPr>
-              <a:t>er</a:t>
-            </a:r>
-            <a:endParaRPr lang="en-US" sz="900" dirty="0"/>
-          </a:p>
-        </p:txBody>
-      </p:sp>
-      <p:sp>
-        <p:nvSpPr>
-          <p:cNvPr id="50" name="Shape 48"/>
-          <p:cNvSpPr/>
-          <p:nvPr/>
-        </p:nvSpPr>
-        <p:spPr>
-          <a:xfrm>
-            <a:off x="5254752" y="4169664"/>
-            <a:ext cx="685800" cy="384048"/>
-          </a:xfrm>
-          <a:prstGeom prst="rect">
-            <a:avLst>
-              <a:gd name="adj" fmla="val 9524"/>
-            </a:avLst>
-          </a:prstGeom>
-          <a:solidFill>
-            <a:srgbClr val="FFFFFF"/>
-          </a:solidFill>
-          <a:ln w="12700">
-            <a:solidFill>
-              <a:srgbClr val="DB2777"/>
-            </a:solidFill>
-            <a:prstDash val="solid"/>
-          </a:ln>
-        </p:spPr>
-      </p:sp>
-      <p:sp>
-        <p:nvSpPr>
-          <p:cNvPr id="51" name="Text 49"/>
-          <p:cNvSpPr/>
-          <p:nvPr/>
-        </p:nvSpPr>
-        <p:spPr>
-          <a:xfrm>
-            <a:off x="5254752" y="4169664"/>
-            <a:ext cx="685800" cy="384048"/>
-          </a:xfrm>
-          <a:prstGeom prst="rect">
-            <a:avLst/>
-          </a:prstGeom>
-          <a:noFill/>
-          <a:ln/>
-        </p:spPr>
-        <p:txBody>
-          <a:bodyPr wrap="square" lIns="0" tIns="0" rIns="0" bIns="0" rtlCol="0" anchor="ctr"/>
-          <a:lstStyle/>
-          <a:p>
-            <a:pPr algn="ctr" indent="0" marL="0">
-              <a:buNone/>
-            </a:pPr>
-            <a:r>
-              <a:rPr lang="en-US" sz="900" b="1" dirty="0">
-                <a:solidFill>
-                  <a:srgbClr val="9D174D"/>
-                </a:solidFill>
-                <a:latin typeface="Trebuchet MS" pitchFamily="34" charset="0"/>
-                <a:ea typeface="Trebuchet MS" pitchFamily="34" charset="-122"/>
-                <a:cs typeface="Trebuchet MS" pitchFamily="34" charset="-120"/>
-              </a:rPr>
-              <a:t>s</a:t>
-            </a:r>
-            <a:endParaRPr lang="en-US" sz="900" dirty="0"/>
-          </a:p>
-        </p:txBody>
-      </p:sp>
-      <p:sp>
-        <p:nvSpPr>
-          <p:cNvPr id="52" name="Shape 50"/>
-          <p:cNvSpPr/>
-          <p:nvPr/>
-        </p:nvSpPr>
-        <p:spPr>
-          <a:xfrm>
-            <a:off x="6062472" y="4169664"/>
-            <a:ext cx="685800" cy="384048"/>
-          </a:xfrm>
-          <a:prstGeom prst="rect">
-            <a:avLst>
-              <a:gd name="adj" fmla="val 9524"/>
-            </a:avLst>
-          </a:prstGeom>
-          <a:solidFill>
-            <a:srgbClr val="FFFFFF"/>
-          </a:solidFill>
-          <a:ln w="12700">
-            <a:solidFill>
-              <a:srgbClr val="DB2777"/>
-            </a:solidFill>
-            <a:prstDash val="solid"/>
-          </a:ln>
-        </p:spPr>
-      </p:sp>
-      <p:sp>
-        <p:nvSpPr>
-          <p:cNvPr id="53" name="Text 51"/>
-          <p:cNvSpPr/>
-          <p:nvPr/>
-        </p:nvSpPr>
-        <p:spPr>
-          <a:xfrm>
-            <a:off x="6062472" y="4169664"/>
-            <a:ext cx="685800" cy="384048"/>
-          </a:xfrm>
-          <a:prstGeom prst="rect">
-            <a:avLst/>
-          </a:prstGeom>
-          <a:noFill/>
-          <a:ln/>
-        </p:spPr>
-        <p:txBody>
-          <a:bodyPr wrap="square" lIns="0" tIns="0" rIns="0" bIns="0" rtlCol="0" anchor="ctr"/>
-          <a:lstStyle/>
-          <a:p>
-            <a:pPr algn="ctr" indent="0" marL="0">
-              <a:buNone/>
-            </a:pPr>
-            <a:r>
-              <a:rPr lang="en-US" sz="900" b="1" dirty="0">
-                <a:solidFill>
-                  <a:srgbClr val="9D174D"/>
-                </a:solidFill>
-                <a:latin typeface="Trebuchet MS" pitchFamily="34" charset="0"/>
-                <a:ea typeface="Trebuchet MS" pitchFamily="34" charset="-122"/>
-                <a:cs typeface="Trebuchet MS" pitchFamily="34" charset="-120"/>
-              </a:rPr>
-              <a:t>on</a:t>
-            </a:r>
-            <a:endParaRPr lang="en-US" sz="900" dirty="0"/>
-          </a:p>
-        </p:txBody>
-      </p:sp>
-      <p:sp>
-        <p:nvSpPr>
-          <p:cNvPr id="54" name="Shape 52"/>
-          <p:cNvSpPr/>
-          <p:nvPr/>
-        </p:nvSpPr>
-        <p:spPr>
-          <a:xfrm>
-            <a:off x="6870192" y="4169664"/>
-            <a:ext cx="685800" cy="384048"/>
-          </a:xfrm>
-          <a:prstGeom prst="rect">
-            <a:avLst>
-              <a:gd name="adj" fmla="val 9524"/>
-            </a:avLst>
-          </a:prstGeom>
-          <a:solidFill>
-            <a:srgbClr val="FFFFFF"/>
-          </a:solidFill>
-          <a:ln w="12700">
-            <a:solidFill>
-              <a:srgbClr val="DB2777"/>
-            </a:solidFill>
-            <a:prstDash val="solid"/>
-          </a:ln>
-        </p:spPr>
-      </p:sp>
-      <p:sp>
-        <p:nvSpPr>
-          <p:cNvPr id="55" name="Text 53"/>
-          <p:cNvSpPr/>
-          <p:nvPr/>
-        </p:nvSpPr>
-        <p:spPr>
-          <a:xfrm>
-            <a:off x="6870192" y="4169664"/>
-            <a:ext cx="685800" cy="384048"/>
-          </a:xfrm>
-          <a:prstGeom prst="rect">
-            <a:avLst/>
-          </a:prstGeom>
-          <a:noFill/>
-          <a:ln/>
-        </p:spPr>
-        <p:txBody>
-          <a:bodyPr wrap="square" lIns="0" tIns="0" rIns="0" bIns="0" rtlCol="0" anchor="ctr"/>
-          <a:lstStyle/>
-          <a:p>
-            <a:pPr algn="ctr" indent="0" marL="0">
-              <a:buNone/>
-            </a:pPr>
-            <a:r>
-              <a:rPr lang="en-US" sz="900" b="1" dirty="0">
-                <a:solidFill>
-                  <a:srgbClr val="9D174D"/>
-                </a:solidFill>
-                <a:latin typeface="Trebuchet MS" pitchFamily="34" charset="0"/>
-                <a:ea typeface="Trebuchet MS" pitchFamily="34" charset="-122"/>
-                <a:cs typeface="Trebuchet MS" pitchFamily="34" charset="-120"/>
-              </a:rPr>
-              <a:t>i</a:t>
-            </a:r>
-            <a:endParaRPr lang="en-US" sz="900" dirty="0"/>
-          </a:p>
-        </p:txBody>
-      </p:sp>
-      <p:sp>
-        <p:nvSpPr>
-          <p:cNvPr id="56" name="Shape 54"/>
-          <p:cNvSpPr/>
-          <p:nvPr/>
-        </p:nvSpPr>
-        <p:spPr>
-          <a:xfrm>
-            <a:off x="7677912" y="4169664"/>
-            <a:ext cx="685800" cy="384048"/>
-          </a:xfrm>
-          <a:prstGeom prst="rect">
-            <a:avLst>
-              <a:gd name="adj" fmla="val 9524"/>
-            </a:avLst>
-          </a:prstGeom>
-          <a:solidFill>
-            <a:srgbClr val="FFFFFF"/>
-          </a:solidFill>
-          <a:ln w="12700">
-            <a:solidFill>
-              <a:srgbClr val="DB2777"/>
-            </a:solidFill>
-            <a:prstDash val="solid"/>
-          </a:ln>
-        </p:spPr>
-      </p:sp>
-      <p:sp>
-        <p:nvSpPr>
-          <p:cNvPr id="57" name="Text 55"/>
-          <p:cNvSpPr/>
-          <p:nvPr/>
-        </p:nvSpPr>
-        <p:spPr>
-          <a:xfrm>
-            <a:off x="7677912" y="4169664"/>
-            <a:ext cx="685800" cy="384048"/>
-          </a:xfrm>
-          <a:prstGeom prst="rect">
-            <a:avLst/>
-          </a:prstGeom>
-          <a:noFill/>
-          <a:ln/>
-        </p:spPr>
-        <p:txBody>
-          <a:bodyPr wrap="square" lIns="0" tIns="0" rIns="0" bIns="0" rtlCol="0" anchor="ctr"/>
-          <a:lstStyle/>
-          <a:p>
-            <a:pPr algn="ctr" indent="0" marL="0">
-              <a:buNone/>
-            </a:pPr>
-            <a:r>
-              <a:rPr lang="en-US" sz="900" b="1" dirty="0">
-                <a:solidFill>
-                  <a:srgbClr val="9D174D"/>
-                </a:solidFill>
-                <a:latin typeface="Trebuchet MS" pitchFamily="34" charset="0"/>
-                <a:ea typeface="Trebuchet MS" pitchFamily="34" charset="-122"/>
-                <a:cs typeface="Trebuchet MS" pitchFamily="34" charset="-120"/>
-              </a:rPr>
-              <a:t>c</a:t>
-            </a:r>
-            <a:endParaRPr lang="en-US" sz="900" dirty="0"/>
-          </a:p>
-        </p:txBody>
-      </p:sp>
-      <p:sp>
-        <p:nvSpPr>
-          <p:cNvPr id="58" name="Text 56"/>
-          <p:cNvSpPr/>
-          <p:nvPr/>
-        </p:nvSpPr>
-        <p:spPr>
-          <a:xfrm>
-            <a:off x="7677912" y="4572000"/>
-            <a:ext cx="685800" cy="219456"/>
-          </a:xfrm>
-          <a:prstGeom prst="rect">
-            <a:avLst/>
-          </a:prstGeom>
-          <a:noFill/>
-          <a:ln/>
-        </p:spPr>
-        <p:txBody>
-          <a:bodyPr wrap="square" lIns="0" tIns="0" rIns="0" bIns="0" rtlCol="0" anchor="t"/>
-          <a:lstStyle/>
-          <a:p>
-            <a:pPr algn="ctr" indent="0" marL="0">
-              <a:buNone/>
-            </a:pPr>
-            <a:r>
-              <a:rPr lang="en-US" sz="750" i="1" dirty="0">
-                <a:solidFill>
-                  <a:srgbClr val="94A3B8"/>
-                </a:solidFill>
-                <a:latin typeface="Calibri" pitchFamily="34" charset="0"/>
-                <a:ea typeface="Calibri" pitchFamily="34" charset="-122"/>
-                <a:cs typeface="Calibri" pitchFamily="34" charset="-120"/>
-              </a:rPr>
-              <a:t>/k/</a:t>
-            </a:r>
-            <a:endParaRPr lang="en-US" sz="750" dirty="0"/>
           </a:p>
         </p:txBody>
       </p:sp>
@@ -37058,7 +37439,7 @@
                 <a:ea typeface="Trebuchet MS" pitchFamily="34" charset="-122"/>
                 <a:cs typeface="Trebuchet MS" pitchFamily="34" charset="-120"/>
               </a:rPr>
-              <a:t>-or</a:t>
+              <a:t>-er</a:t>
             </a:r>
             <a:endParaRPr lang="en-US" sz="1300" dirty="0"/>
           </a:p>
@@ -37147,7 +37528,7 @@
                 <a:ea typeface="Trebuchet MS" pitchFamily="34" charset="-122"/>
                 <a:cs typeface="Trebuchet MS" pitchFamily="34" charset="-120"/>
               </a:rPr>
-              <a:t>power</a:t>
+              <a:t>man</a:t>
             </a:r>
             <a:endParaRPr lang="en-US" sz="1300" dirty="0"/>
           </a:p>
@@ -37211,7 +37592,7 @@
                 <a:ea typeface="Trebuchet MS" pitchFamily="34" charset="-122"/>
                 <a:cs typeface="Trebuchet MS" pitchFamily="34" charset="-120"/>
               </a:rPr>
-              <a:t>-tion</a:t>
+              <a:t>-ly</a:t>
             </a:r>
             <a:endParaRPr lang="en-US" sz="1300" dirty="0"/>
           </a:p>
@@ -37300,7 +37681,7 @@
                 <a:ea typeface="Trebuchet MS" pitchFamily="34" charset="-122"/>
                 <a:cs typeface="Trebuchet MS" pitchFamily="34" charset="-120"/>
               </a:rPr>
-              <a:t>vise</a:t>
+              <a:t>power</a:t>
             </a:r>
             <a:endParaRPr lang="en-US" sz="1300" dirty="0"/>
           </a:p>
@@ -37364,7 +37745,7 @@
                 <a:ea typeface="Trebuchet MS" pitchFamily="34" charset="-122"/>
                 <a:cs typeface="Trebuchet MS" pitchFamily="34" charset="-120"/>
               </a:rPr>
-              <a:t>-ly</a:t>
+              <a:t>-ior</a:t>
             </a:r>
             <a:endParaRPr lang="en-US" sz="1300" dirty="0"/>
           </a:p>
@@ -37469,7 +37850,7 @@
                 <a:ea typeface="Trebuchet MS" pitchFamily="34" charset="-122"/>
                 <a:cs typeface="Trebuchet MS" pitchFamily="34" charset="-120"/>
               </a:rPr>
-              <a:t>superhero</a:t>
+              <a:t>supermarket</a:t>
             </a:r>
             <a:endParaRPr lang="en-US" sz="1200" dirty="0"/>
           </a:p>
@@ -37535,7 +37916,7 @@
                 <a:ea typeface="Trebuchet MS" pitchFamily="34" charset="-122"/>
                 <a:cs typeface="Trebuchet MS" pitchFamily="34" charset="-120"/>
               </a:rPr>
-              <a:t>supermarket</a:t>
+              <a:t>superhero</a:t>
             </a:r>
             <a:endParaRPr lang="en-US" sz="1200" dirty="0"/>
           </a:p>
@@ -37667,7 +38048,7 @@
                 <a:ea typeface="Trebuchet MS" pitchFamily="34" charset="-122"/>
                 <a:cs typeface="Trebuchet MS" pitchFamily="34" charset="-120"/>
               </a:rPr>
-              <a:t>superpower</a:t>
+              <a:t>superior</a:t>
             </a:r>
             <a:endParaRPr lang="en-US" sz="1200" dirty="0"/>
           </a:p>
@@ -37733,7 +38114,7 @@
                 <a:ea typeface="Trebuchet MS" pitchFamily="34" charset="-122"/>
                 <a:cs typeface="Trebuchet MS" pitchFamily="34" charset="-120"/>
               </a:rPr>
-              <a:t>supervisor</a:t>
+              <a:t>superstar</a:t>
             </a:r>
             <a:endParaRPr lang="en-US" sz="1200" dirty="0"/>
           </a:p>
@@ -37799,7 +38180,7 @@
                 <a:ea typeface="Trebuchet MS" pitchFamily="34" charset="-122"/>
                 <a:cs typeface="Trebuchet MS" pitchFamily="34" charset="-120"/>
               </a:rPr>
-              <a:t>superior</a:t>
+              <a:t>supervise</a:t>
             </a:r>
             <a:endParaRPr lang="en-US" sz="1200" dirty="0"/>
           </a:p>
@@ -37865,7 +38246,7 @@
                 <a:ea typeface="Trebuchet MS" pitchFamily="34" charset="-122"/>
                 <a:cs typeface="Trebuchet MS" pitchFamily="34" charset="-120"/>
               </a:rPr>
-              <a:t>supersonic</a:t>
+              <a:t>superpower</a:t>
             </a:r>
             <a:endParaRPr lang="en-US" sz="1200" dirty="0"/>
           </a:p>
@@ -37931,7 +38312,7 @@
                 <a:ea typeface="Trebuchet MS" pitchFamily="34" charset="-122"/>
                 <a:cs typeface="Trebuchet MS" pitchFamily="34" charset="-120"/>
               </a:rPr>
-              <a:t>superstar</a:t>
+              <a:t>supersonic</a:t>
             </a:r>
             <a:endParaRPr lang="en-US" sz="1200" dirty="0"/>
           </a:p>
@@ -38551,7 +38932,7 @@
                 <a:ea typeface="Calibri" pitchFamily="34" charset="-122"/>
                 <a:cs typeface="Calibri" pitchFamily="34" charset="-120"/>
               </a:rPr>
-              <a:t>The core part of a word carrying its basic meaning. In 'superhero', the root is the part after the prefix 'super-'.</a:t>
+              <a:t>The core part of a word carrying its basic meaning. In 'supermarket', the root is the part after the prefix 'super-'.</a:t>
             </a:r>
             <a:endParaRPr lang="en-US" sz="1350" dirty="0"/>
           </a:p>
@@ -39119,7 +39500,7 @@
                 <a:ea typeface="Calibri" pitchFamily="34" charset="-122"/>
                 <a:cs typeface="Calibri" pitchFamily="34" charset="-120"/>
               </a:rPr>
-              <a:t>1.  The prefix 'super-' comes from Latin and means above or beyond.</a:t>
+              <a:t>1.  The word 'supermarket' contains the prefix 'super-'.</a:t>
             </a:r>
             <a:endParaRPr lang="en-US" sz="1300" dirty="0"/>
           </a:p>
@@ -39258,7 +39639,7 @@
                 <a:ea typeface="Calibri" pitchFamily="34" charset="-122"/>
                 <a:cs typeface="Calibri" pitchFamily="34" charset="-120"/>
               </a:rPr>
-              <a:t>2.  The word 'supermarket' means a market that sells only super healthy food.</a:t>
+              <a:t>2.  'Supernatural' means something that is perfectly ordinary and easy to explain.</a:t>
             </a:r>
             <a:endParaRPr lang="en-US" sz="1300" dirty="0"/>
           </a:p>
@@ -39397,7 +39778,7 @@
                 <a:ea typeface="Calibri" pitchFamily="34" charset="-122"/>
                 <a:cs typeface="Calibri" pitchFamily="34" charset="-120"/>
               </a:rPr>
-              <a:t>3.  Adding 'super-' to a word makes it mean something greater or more extreme.</a:t>
+              <a:t>3.  The prefix 'super-' means below or under something.</a:t>
             </a:r>
             <a:endParaRPr lang="en-US" sz="1300" dirty="0"/>
           </a:p>
@@ -39420,11 +39801,11 @@
             </a:avLst>
           </a:prstGeom>
           <a:solidFill>
-            <a:srgbClr val="DCFCE7"/>
-          </a:solidFill>
-          <a:ln w="12700">
-            <a:solidFill>
-              <a:srgbClr val="16A34A"/>
+            <a:srgbClr val="FEE2E2"/>
+          </a:solidFill>
+          <a:ln w="12700">
+            <a:solidFill>
+              <a:srgbClr val="DC2626"/>
             </a:solidFill>
             <a:prstDash val="solid"/>
           </a:ln>
@@ -39457,13 +39838,13 @@
             <a:r>
               <a:rPr lang="en-US" sz="1100" b="1" dirty="0">
                 <a:solidFill>
-                  <a:srgbClr val="16A34A"/>
+                  <a:srgbClr val="DC2626"/>
                 </a:solidFill>
                 <a:latin typeface="Trebuchet MS" pitchFamily="34" charset="0"/>
                 <a:ea typeface="Trebuchet MS" pitchFamily="34" charset="-122"/>
                 <a:cs typeface="Trebuchet MS" pitchFamily="34" charset="-120"/>
               </a:rPr>
-              <a:t>TRUE</a:t>
+              <a:t>FALSE</a:t>
             </a:r>
             <a:endParaRPr lang="en-US" sz="1100" dirty="0"/>
           </a:p>
@@ -39536,7 +39917,7 @@
                 <a:ea typeface="Calibri" pitchFamily="34" charset="-122"/>
                 <a:cs typeface="Calibri" pitchFamily="34" charset="-120"/>
               </a:rPr>
-              <a:t>4.  A superhero has abilities that go beyond what ordinary people can do.</a:t>
+              <a:t>4.  The prefix 'super-' comes from Latin.</a:t>
             </a:r>
             <a:endParaRPr lang="en-US" sz="1300" dirty="0"/>
           </a:p>
@@ -39675,7 +40056,7 @@
                 <a:ea typeface="Calibri" pitchFamily="34" charset="-122"/>
                 <a:cs typeface="Calibri" pitchFamily="34" charset="-120"/>
               </a:rPr>
-              <a:t>5.  The prefix 'super-' means the same thing as the prefix 'sub-', which means under.</a:t>
+              <a:t>5.  Adding 'super-' to a base word usually makes it mean something greater or beyond normal.</a:t>
             </a:r>
             <a:endParaRPr lang="en-US" sz="1300" dirty="0"/>
           </a:p>
@@ -39698,11 +40079,11 @@
             </a:avLst>
           </a:prstGeom>
           <a:solidFill>
-            <a:srgbClr val="FEE2E2"/>
-          </a:solidFill>
-          <a:ln w="12700">
-            <a:solidFill>
-              <a:srgbClr val="DC2626"/>
+            <a:srgbClr val="DCFCE7"/>
+          </a:solidFill>
+          <a:ln w="12700">
+            <a:solidFill>
+              <a:srgbClr val="16A34A"/>
             </a:solidFill>
             <a:prstDash val="solid"/>
           </a:ln>
@@ -39735,13 +40116,13 @@
             <a:r>
               <a:rPr lang="en-US" sz="1100" b="1" dirty="0">
                 <a:solidFill>
-                  <a:srgbClr val="DC2626"/>
+                  <a:srgbClr val="16A34A"/>
                 </a:solidFill>
                 <a:latin typeface="Trebuchet MS" pitchFamily="34" charset="0"/>
                 <a:ea typeface="Trebuchet MS" pitchFamily="34" charset="-122"/>
                 <a:cs typeface="Trebuchet MS" pitchFamily="34" charset="-120"/>
               </a:rPr>
-              <a:t>FALSE</a:t>
+              <a:t>TRUE</a:t>
             </a:r>
             <a:endParaRPr lang="en-US" sz="1100" dirty="0"/>
           </a:p>
@@ -40314,7 +40695,7 @@
                 <a:ea typeface="Trebuchet MS" pitchFamily="34" charset="-122"/>
                 <a:cs typeface="Trebuchet MS" pitchFamily="34" charset="-120"/>
               </a:rPr>
-              <a:t>superhero</a:t>
+              <a:t>supermarket</a:t>
             </a:r>
             <a:endParaRPr lang="en-US" sz="1300" dirty="0"/>
           </a:p>
@@ -40380,7 +40761,7 @@
                 <a:ea typeface="Trebuchet MS" pitchFamily="34" charset="-122"/>
                 <a:cs typeface="Trebuchet MS" pitchFamily="34" charset="-120"/>
               </a:rPr>
-              <a:t>supermarket</a:t>
+              <a:t>superhero</a:t>
             </a:r>
             <a:endParaRPr lang="en-US" sz="1300" dirty="0"/>
           </a:p>
@@ -40512,7 +40893,7 @@
                 <a:ea typeface="Trebuchet MS" pitchFamily="34" charset="-122"/>
                 <a:cs typeface="Trebuchet MS" pitchFamily="34" charset="-120"/>
               </a:rPr>
-              <a:t>superpower</a:t>
+              <a:t>superior</a:t>
             </a:r>
             <a:endParaRPr lang="en-US" sz="1300" dirty="0"/>
           </a:p>
@@ -40578,7 +40959,7 @@
                 <a:ea typeface="Trebuchet MS" pitchFamily="34" charset="-122"/>
                 <a:cs typeface="Trebuchet MS" pitchFamily="34" charset="-120"/>
               </a:rPr>
-              <a:t>supervisor</a:t>
+              <a:t>superstar</a:t>
             </a:r>
             <a:endParaRPr lang="en-US" sz="1300" dirty="0"/>
           </a:p>
@@ -40644,7 +41025,7 @@
                 <a:ea typeface="Trebuchet MS" pitchFamily="34" charset="-122"/>
                 <a:cs typeface="Trebuchet MS" pitchFamily="34" charset="-120"/>
               </a:rPr>
-              <a:t>superior</a:t>
+              <a:t>supervise</a:t>
             </a:r>
             <a:endParaRPr lang="en-US" sz="1300" dirty="0"/>
           </a:p>
@@ -40710,7 +41091,7 @@
                 <a:ea typeface="Trebuchet MS" pitchFamily="34" charset="-122"/>
                 <a:cs typeface="Trebuchet MS" pitchFamily="34" charset="-120"/>
               </a:rPr>
-              <a:t>supersonic</a:t>
+              <a:t>superpower</a:t>
             </a:r>
             <a:endParaRPr lang="en-US" sz="1300" dirty="0"/>
           </a:p>
@@ -41737,7 +42118,7 @@
                 <a:ea typeface="Trebuchet MS" pitchFamily="34" charset="-122"/>
                 <a:cs typeface="Trebuchet MS" pitchFamily="34" charset="-120"/>
               </a:rPr>
-              <a:t>-or</a:t>
+              <a:t>-er</a:t>
             </a:r>
             <a:endParaRPr lang="en-US" sz="1300" dirty="0"/>
           </a:p>
@@ -41826,7 +42207,7 @@
                 <a:ea typeface="Trebuchet MS" pitchFamily="34" charset="-122"/>
                 <a:cs typeface="Trebuchet MS" pitchFamily="34" charset="-120"/>
               </a:rPr>
-              <a:t>power</a:t>
+              <a:t>man</a:t>
             </a:r>
             <a:endParaRPr lang="en-US" sz="1300" dirty="0"/>
           </a:p>
@@ -41890,7 +42271,7 @@
                 <a:ea typeface="Trebuchet MS" pitchFamily="34" charset="-122"/>
                 <a:cs typeface="Trebuchet MS" pitchFamily="34" charset="-120"/>
               </a:rPr>
-              <a:t>-tion</a:t>
+              <a:t>-ly</a:t>
             </a:r>
             <a:endParaRPr lang="en-US" sz="1300" dirty="0"/>
           </a:p>
@@ -41979,7 +42360,7 @@
                 <a:ea typeface="Trebuchet MS" pitchFamily="34" charset="-122"/>
                 <a:cs typeface="Trebuchet MS" pitchFamily="34" charset="-120"/>
               </a:rPr>
-              <a:t>vise</a:t>
+              <a:t>power</a:t>
             </a:r>
             <a:endParaRPr lang="en-US" sz="1300" dirty="0"/>
           </a:p>
@@ -42043,7 +42424,7 @@
                 <a:ea typeface="Trebuchet MS" pitchFamily="34" charset="-122"/>
                 <a:cs typeface="Trebuchet MS" pitchFamily="34" charset="-120"/>
               </a:rPr>
-              <a:t>-ly</a:t>
+              <a:t>-ior</a:t>
             </a:r>
             <a:endParaRPr lang="en-US" sz="1300" dirty="0"/>
           </a:p>
@@ -42484,7 +42865,7 @@
                 <a:ea typeface="Trebuchet MS" pitchFamily="34" charset="-122"/>
                 <a:cs typeface="Trebuchet MS" pitchFamily="34" charset="-120"/>
               </a:rPr>
-              <a:t>superhero</a:t>
+              <a:t>supermarket</a:t>
             </a:r>
             <a:endParaRPr lang="en-US" sz="1400" dirty="0"/>
           </a:p>
@@ -42888,7 +43269,7 @@
                 <a:ea typeface="Trebuchet MS" pitchFamily="34" charset="-122"/>
                 <a:cs typeface="Trebuchet MS" pitchFamily="34" charset="-120"/>
               </a:rPr>
-              <a:t>superhero</a:t>
+              <a:t>supermarket</a:t>
             </a:r>
             <a:endParaRPr lang="en-US" sz="1200" dirty="0"/>
           </a:p>
@@ -42954,7 +43335,7 @@
                 <a:ea typeface="Calibri" pitchFamily="34" charset="-122"/>
                 <a:cs typeface="Calibri" pitchFamily="34" charset="-120"/>
               </a:rPr>
-              <a:t>Moving faster than the speed of sound, which is incredibly fast.</a:t>
+              <a:t>An extraordinary ability that goes far beyond what normal people can do.</a:t>
             </a:r>
             <a:endParaRPr lang="en-US" sz="1200" dirty="0"/>
           </a:p>
@@ -43027,7 +43408,7 @@
                 <a:ea typeface="Trebuchet MS" pitchFamily="34" charset="-122"/>
                 <a:cs typeface="Trebuchet MS" pitchFamily="34" charset="-120"/>
               </a:rPr>
-              <a:t>supermarket</a:t>
+              <a:t>superhero</a:t>
             </a:r>
             <a:endParaRPr lang="en-US" sz="1200" dirty="0"/>
           </a:p>
@@ -43093,7 +43474,7 @@
                 <a:ea typeface="Calibri" pitchFamily="34" charset="-122"/>
                 <a:cs typeface="Calibri" pitchFamily="34" charset="-120"/>
               </a:rPr>
-              <a:t>A person who is in charge of watching over and guiding other people's work.</a:t>
+              <a:t>A person who is extremely famous and very talented, especially in sport or entertainment.</a:t>
             </a:r>
             <a:endParaRPr lang="en-US" sz="1200" dirty="0"/>
           </a:p>
@@ -43232,7 +43613,7 @@
                 <a:ea typeface="Calibri" pitchFamily="34" charset="-122"/>
                 <a:cs typeface="Calibri" pitchFamily="34" charset="-120"/>
               </a:rPr>
-              <a:t>An extraordinary ability that goes far beyond what ordinary people can do.</a:t>
+              <a:t>Better than others in quality, ability, or rank.</a:t>
             </a:r>
             <a:endParaRPr lang="en-US" sz="1200" dirty="0"/>
           </a:p>
@@ -43305,7 +43686,7 @@
                 <a:ea typeface="Trebuchet MS" pitchFamily="34" charset="-122"/>
                 <a:cs typeface="Trebuchet MS" pitchFamily="34" charset="-120"/>
               </a:rPr>
-              <a:t>superpower</a:t>
+              <a:t>superior</a:t>
             </a:r>
             <a:endParaRPr lang="en-US" sz="1200" dirty="0"/>
           </a:p>
@@ -43371,7 +43752,7 @@
                 <a:ea typeface="Calibri" pitchFamily="34" charset="-122"/>
                 <a:cs typeface="Calibri" pitchFamily="34" charset="-120"/>
               </a:rPr>
-              <a:t>Better than others or higher in rank or quality.</a:t>
+              <a:t>To watch over and be in charge of people while they work or do an activity.</a:t>
             </a:r>
             <a:endParaRPr lang="en-US" sz="1200" dirty="0"/>
           </a:p>
@@ -43444,7 +43825,7 @@
                 <a:ea typeface="Trebuchet MS" pitchFamily="34" charset="-122"/>
                 <a:cs typeface="Trebuchet MS" pitchFamily="34" charset="-120"/>
               </a:rPr>
-              <a:t>supervisor</a:t>
+              <a:t>superstar</a:t>
             </a:r>
             <a:endParaRPr lang="en-US" sz="1200" dirty="0"/>
           </a:p>
@@ -43583,7 +43964,7 @@
                 <a:ea typeface="Trebuchet MS" pitchFamily="34" charset="-122"/>
                 <a:cs typeface="Trebuchet MS" pitchFamily="34" charset="-120"/>
               </a:rPr>
-              <a:t>superior</a:t>
+              <a:t>supervise</a:t>
             </a:r>
             <a:endParaRPr lang="en-US" sz="1200" dirty="0"/>
           </a:p>
@@ -43649,7 +44030,7 @@
                 <a:ea typeface="Calibri" pitchFamily="34" charset="-122"/>
                 <a:cs typeface="Calibri" pitchFamily="34" charset="-120"/>
               </a:rPr>
-              <a:t>A person with amazing powers who helps others and fights against evil.</a:t>
+              <a:t>A very large shop where you can buy food, drinks, and many other everyday items all in one place.</a:t>
             </a:r>
             <a:endParaRPr lang="en-US" sz="1200" dirty="0"/>
           </a:p>
@@ -43722,7 +44103,7 @@
                 <a:ea typeface="Trebuchet MS" pitchFamily="34" charset="-122"/>
                 <a:cs typeface="Trebuchet MS" pitchFamily="34" charset="-120"/>
               </a:rPr>
-              <a:t>supersonic</a:t>
+              <a:t>superpower</a:t>
             </a:r>
             <a:endParaRPr lang="en-US" sz="1200" dirty="0"/>
           </a:p>
@@ -43788,7 +44169,7 @@
                 <a:ea typeface="Calibri" pitchFamily="34" charset="-122"/>
                 <a:cs typeface="Calibri" pitchFamily="34" charset="-120"/>
               </a:rPr>
-              <a:t>A large shop where you can buy food, drinks, and household items all in one place.</a:t>
+              <a:t>A fictional character with amazing powers who uses them to help others and fight evil.</a:t>
             </a:r>
             <a:endParaRPr lang="en-US" sz="1200" dirty="0"/>
           </a:p>
@@ -44283,7 +44664,7 @@
                 <a:ea typeface="Calibri" pitchFamily="34" charset="-122"/>
                 <a:cs typeface="Calibri" pitchFamily="34" charset="-120"/>
               </a:rPr>
-              <a:t>The superhero flew above the city and saved everyone from danger.</a:t>
+              <a:t>The supermarket was packed with shoppers on Saturday morning.</a:t>
             </a:r>
             <a:endParaRPr lang="en-US" sz="1500" dirty="0"/>
           </a:p>
@@ -44447,7 +44828,7 @@
                 <a:ea typeface="Calibri" pitchFamily="34" charset="-122"/>
                 <a:cs typeface="Calibri" pitchFamily="34" charset="-120"/>
               </a:rPr>
-              <a:t>Mum asked me to grab some apples from the supermarket on the way home.</a:t>
+              <a:t>She dreamed of becoming a superhero who could fly above the clouds.</a:t>
             </a:r>
             <a:endParaRPr lang="en-US" sz="1500" dirty="0"/>
           </a:p>
@@ -44611,7 +44992,7 @@
                 <a:ea typeface="Calibri" pitchFamily="34" charset="-122"/>
                 <a:cs typeface="Calibri" pitchFamily="34" charset="-120"/>
               </a:rPr>
-              <a:t>The supersonic jet travelled faster than the speed of sound.</a:t>
+              <a:t>The jet travelled at supersonic speed, faster than the sound of its own engine.</a:t>
             </a:r>
             <a:endParaRPr lang="en-US" sz="1500" dirty="0"/>
           </a:p>
